--- a/软件科目一考试赋能_有序数据结构_set.pptx
+++ b/软件科目一考试赋能_有序数据结构_set.pptx
@@ -2,20 +2,23 @@
 <file path=ppt/presentation.xml><?xml version="1.0" encoding="utf-8"?>
 <p:presentation xmlns:p="http://schemas.openxmlformats.org/presentationml/2006/main">
   <p:sldMasterIdLst>
-    <p:sldMasterId xmlns:r="http://schemas.openxmlformats.org/officeDocument/2006/relationships" id="2147483648" r:id="Reb99e16fe11c488e"/>
+    <p:sldMasterId xmlns:r="http://schemas.openxmlformats.org/officeDocument/2006/relationships" id="2147483648" r:id="R88de7031c96d4761"/>
   </p:sldMasterIdLst>
   <p:notesMasterIdLst>
-    <p:notesMasterId xmlns:r="http://schemas.openxmlformats.org/officeDocument/2006/relationships" r:id="R0cc40c64be3947eb"/>
+    <p:notesMasterId xmlns:r="http://schemas.openxmlformats.org/officeDocument/2006/relationships" r:id="R59037ecf07844933"/>
   </p:notesMasterIdLst>
   <p:sldIdLst>
-    <p:sldId xmlns:r="http://schemas.openxmlformats.org/officeDocument/2006/relationships" id="256" r:id="R6d44eed370124539"/>
-    <p:sldId xmlns:r="http://schemas.openxmlformats.org/officeDocument/2006/relationships" id="257" r:id="Rf932be91a6a14d38"/>
-    <p:sldId xmlns:r="http://schemas.openxmlformats.org/officeDocument/2006/relationships" id="258" r:id="R13111e56fe9248df"/>
-    <p:sldId xmlns:r="http://schemas.openxmlformats.org/officeDocument/2006/relationships" id="259" r:id="Ra034e37bb1584039"/>
-    <p:sldId xmlns:r="http://schemas.openxmlformats.org/officeDocument/2006/relationships" id="260" r:id="R42ea49d89eee431b"/>
-    <p:sldId xmlns:r="http://schemas.openxmlformats.org/officeDocument/2006/relationships" id="261" r:id="R70e96ce192f844b8"/>
-    <p:sldId xmlns:r="http://schemas.openxmlformats.org/officeDocument/2006/relationships" id="262" r:id="R734cb0a288314606"/>
-    <p:sldId xmlns:r="http://schemas.openxmlformats.org/officeDocument/2006/relationships" id="263" r:id="R483b301eba984171"/>
+    <p:sldId xmlns:r="http://schemas.openxmlformats.org/officeDocument/2006/relationships" id="256" r:id="Re92fdc01cc2d41dc"/>
+    <p:sldId xmlns:r="http://schemas.openxmlformats.org/officeDocument/2006/relationships" id="257" r:id="Re825b2ce82f94e7b"/>
+    <p:sldId xmlns:r="http://schemas.openxmlformats.org/officeDocument/2006/relationships" id="258" r:id="R1e204bda53224bdd"/>
+    <p:sldId xmlns:r="http://schemas.openxmlformats.org/officeDocument/2006/relationships" id="259" r:id="Ra2d5b2cf08a44f3f"/>
+    <p:sldId xmlns:r="http://schemas.openxmlformats.org/officeDocument/2006/relationships" id="260" r:id="R0e140f11250f43b8"/>
+    <p:sldId xmlns:r="http://schemas.openxmlformats.org/officeDocument/2006/relationships" id="261" r:id="Rc947e7a711e44939"/>
+    <p:sldId xmlns:r="http://schemas.openxmlformats.org/officeDocument/2006/relationships" id="262" r:id="Ra7ef6ca41a3743b5"/>
+    <p:sldId xmlns:r="http://schemas.openxmlformats.org/officeDocument/2006/relationships" id="263" r:id="R134bcb00bb0e457a"/>
+    <p:sldId xmlns:r="http://schemas.openxmlformats.org/officeDocument/2006/relationships" id="264" r:id="R119f5fd6270b46cc"/>
+    <p:sldId xmlns:r="http://schemas.openxmlformats.org/officeDocument/2006/relationships" id="265" r:id="R82b7527353df47ba"/>
+    <p:sldId xmlns:r="http://schemas.openxmlformats.org/officeDocument/2006/relationships" id="266" r:id="R7550cba8f2bc4fd9"/>
   </p:sldIdLst>
   <p:sldSz cx="12192000" cy="6858000"/>
   <p:notesSz cx="6858000" cy="9144000"/>
@@ -475,6 +478,138 @@
 </p:notes>
 </file>
 
+<file path=ppt/notesSlides/notesSlide10.xml><?xml version="1.0" encoding="utf-8"?>
+<p:notes xmlns:p="http://schemas.openxmlformats.org/presentationml/2006/main">
+  <p:cSld>
+    <p:spTree>
+      <p:nvGrpSpPr>
+        <p:cNvPr id="1" name=""/>
+        <p:cNvGrpSpPr/>
+        <p:nvPr/>
+      </p:nvGrpSpPr>
+      <p:grpSpPr>
+        <a:xfrm xmlns:a="http://schemas.openxmlformats.org/drawingml/2006/main"/>
+      </p:grpSpPr>
+      <p:sp>
+        <p:nvSpPr>
+          <p:cNvPr id="2" name="Slide Image Placeholder 1"/>
+          <p:cNvSpPr>
+            <a:spLocks xmlns:a="http://schemas.openxmlformats.org/drawingml/2006/main" noGrp="1"/>
+          </p:cNvSpPr>
+          <p:nvPr>
+            <p:ph type="sldImg" idx="0"/>
+          </p:nvPr>
+        </p:nvSpPr>
+        <p:spPr/>
+      </p:sp>
+      <p:sp>
+        <p:nvSpPr>
+          <p:cNvPr id="3" name="Notes Placeholder 2"/>
+          <p:cNvSpPr>
+            <a:spLocks xmlns:a="http://schemas.openxmlformats.org/drawingml/2006/main" noGrp="1"/>
+          </p:cNvSpPr>
+          <p:nvPr>
+            <p:ph type="body" idx="1"/>
+          </p:nvPr>
+        </p:nvSpPr>
+        <p:spPr/>
+        <p:txBody>
+          <a:bodyPr xmlns:a="http://schemas.openxmlformats.org/drawingml/2006/main"/>
+          <a:lstStyle xmlns:a="http://schemas.openxmlformats.org/drawingml/2006/main"/>
+          <a:p xmlns:a="http://schemas.openxmlformats.org/drawingml/2006/main"/>
+        </p:txBody>
+      </p:sp>
+      <p:sp>
+        <p:nvSpPr>
+          <p:cNvPr id="4" name="Slide Number Placeholder 3"/>
+          <p:cNvSpPr>
+            <a:spLocks xmlns:a="http://schemas.openxmlformats.org/drawingml/2006/main" noGrp="1"/>
+          </p:cNvSpPr>
+          <p:nvPr>
+            <p:ph type="sldNum" idx="5"/>
+          </p:nvPr>
+        </p:nvSpPr>
+        <p:spPr/>
+        <p:txBody>
+          <a:bodyPr xmlns:a="http://schemas.openxmlformats.org/drawingml/2006/main"/>
+          <a:lstStyle xmlns:a="http://schemas.openxmlformats.org/drawingml/2006/main"/>
+          <a:p xmlns:a="http://schemas.openxmlformats.org/drawingml/2006/main"/>
+        </p:txBody>
+      </p:sp>
+    </p:spTree>
+  </p:cSld>
+  <p:clrMapOvr>
+    <a:masterClrMapping xmlns:a="http://schemas.openxmlformats.org/drawingml/2006/main"/>
+  </p:clrMapOvr>
+</p:notes>
+</file>
+
+<file path=ppt/notesSlides/notesSlide11.xml><?xml version="1.0" encoding="utf-8"?>
+<p:notes xmlns:p="http://schemas.openxmlformats.org/presentationml/2006/main">
+  <p:cSld>
+    <p:spTree>
+      <p:nvGrpSpPr>
+        <p:cNvPr id="1" name=""/>
+        <p:cNvGrpSpPr/>
+        <p:nvPr/>
+      </p:nvGrpSpPr>
+      <p:grpSpPr>
+        <a:xfrm xmlns:a="http://schemas.openxmlformats.org/drawingml/2006/main"/>
+      </p:grpSpPr>
+      <p:sp>
+        <p:nvSpPr>
+          <p:cNvPr id="2" name="Slide Image Placeholder 1"/>
+          <p:cNvSpPr>
+            <a:spLocks xmlns:a="http://schemas.openxmlformats.org/drawingml/2006/main" noGrp="1"/>
+          </p:cNvSpPr>
+          <p:nvPr>
+            <p:ph type="sldImg" idx="0"/>
+          </p:nvPr>
+        </p:nvSpPr>
+        <p:spPr/>
+      </p:sp>
+      <p:sp>
+        <p:nvSpPr>
+          <p:cNvPr id="3" name="Notes Placeholder 2"/>
+          <p:cNvSpPr>
+            <a:spLocks xmlns:a="http://schemas.openxmlformats.org/drawingml/2006/main" noGrp="1"/>
+          </p:cNvSpPr>
+          <p:nvPr>
+            <p:ph type="body" idx="1"/>
+          </p:nvPr>
+        </p:nvSpPr>
+        <p:spPr/>
+        <p:txBody>
+          <a:bodyPr xmlns:a="http://schemas.openxmlformats.org/drawingml/2006/main"/>
+          <a:lstStyle xmlns:a="http://schemas.openxmlformats.org/drawingml/2006/main"/>
+          <a:p xmlns:a="http://schemas.openxmlformats.org/drawingml/2006/main"/>
+        </p:txBody>
+      </p:sp>
+      <p:sp>
+        <p:nvSpPr>
+          <p:cNvPr id="4" name="Slide Number Placeholder 3"/>
+          <p:cNvSpPr>
+            <a:spLocks xmlns:a="http://schemas.openxmlformats.org/drawingml/2006/main" noGrp="1"/>
+          </p:cNvSpPr>
+          <p:nvPr>
+            <p:ph type="sldNum" idx="5"/>
+          </p:nvPr>
+        </p:nvSpPr>
+        <p:spPr/>
+        <p:txBody>
+          <a:bodyPr xmlns:a="http://schemas.openxmlformats.org/drawingml/2006/main"/>
+          <a:lstStyle xmlns:a="http://schemas.openxmlformats.org/drawingml/2006/main"/>
+          <a:p xmlns:a="http://schemas.openxmlformats.org/drawingml/2006/main"/>
+        </p:txBody>
+      </p:sp>
+    </p:spTree>
+  </p:cSld>
+  <p:clrMapOvr>
+    <a:masterClrMapping xmlns:a="http://schemas.openxmlformats.org/drawingml/2006/main"/>
+  </p:clrMapOvr>
+</p:notes>
+</file>
+
 <file path=ppt/notesSlides/notesSlide2.xml><?xml version="1.0" encoding="utf-8"?>
 <p:notes xmlns:p="http://schemas.openxmlformats.org/presentationml/2006/main">
   <p:cSld>
@@ -872,6 +1007,72 @@
 </file>
 
 <file path=ppt/notesSlides/notesSlide8.xml><?xml version="1.0" encoding="utf-8"?>
+<p:notes xmlns:p="http://schemas.openxmlformats.org/presentationml/2006/main">
+  <p:cSld>
+    <p:spTree>
+      <p:nvGrpSpPr>
+        <p:cNvPr id="1" name=""/>
+        <p:cNvGrpSpPr/>
+        <p:nvPr/>
+      </p:nvGrpSpPr>
+      <p:grpSpPr>
+        <a:xfrm xmlns:a="http://schemas.openxmlformats.org/drawingml/2006/main"/>
+      </p:grpSpPr>
+      <p:sp>
+        <p:nvSpPr>
+          <p:cNvPr id="2" name="Slide Image Placeholder 1"/>
+          <p:cNvSpPr>
+            <a:spLocks xmlns:a="http://schemas.openxmlformats.org/drawingml/2006/main" noGrp="1"/>
+          </p:cNvSpPr>
+          <p:nvPr>
+            <p:ph type="sldImg" idx="0"/>
+          </p:nvPr>
+        </p:nvSpPr>
+        <p:spPr/>
+      </p:sp>
+      <p:sp>
+        <p:nvSpPr>
+          <p:cNvPr id="3" name="Notes Placeholder 2"/>
+          <p:cNvSpPr>
+            <a:spLocks xmlns:a="http://schemas.openxmlformats.org/drawingml/2006/main" noGrp="1"/>
+          </p:cNvSpPr>
+          <p:nvPr>
+            <p:ph type="body" idx="1"/>
+          </p:nvPr>
+        </p:nvSpPr>
+        <p:spPr/>
+        <p:txBody>
+          <a:bodyPr xmlns:a="http://schemas.openxmlformats.org/drawingml/2006/main"/>
+          <a:lstStyle xmlns:a="http://schemas.openxmlformats.org/drawingml/2006/main"/>
+          <a:p xmlns:a="http://schemas.openxmlformats.org/drawingml/2006/main"/>
+        </p:txBody>
+      </p:sp>
+      <p:sp>
+        <p:nvSpPr>
+          <p:cNvPr id="4" name="Slide Number Placeholder 3"/>
+          <p:cNvSpPr>
+            <a:spLocks xmlns:a="http://schemas.openxmlformats.org/drawingml/2006/main" noGrp="1"/>
+          </p:cNvSpPr>
+          <p:nvPr>
+            <p:ph type="sldNum" idx="5"/>
+          </p:nvPr>
+        </p:nvSpPr>
+        <p:spPr/>
+        <p:txBody>
+          <a:bodyPr xmlns:a="http://schemas.openxmlformats.org/drawingml/2006/main"/>
+          <a:lstStyle xmlns:a="http://schemas.openxmlformats.org/drawingml/2006/main"/>
+          <a:p xmlns:a="http://schemas.openxmlformats.org/drawingml/2006/main"/>
+        </p:txBody>
+      </p:sp>
+    </p:spTree>
+  </p:cSld>
+  <p:clrMapOvr>
+    <a:masterClrMapping xmlns:a="http://schemas.openxmlformats.org/drawingml/2006/main"/>
+  </p:clrMapOvr>
+</p:notes>
+</file>
+
+<file path=ppt/notesSlides/notesSlide9.xml><?xml version="1.0" encoding="utf-8"?>
 <p:notes xmlns:p="http://schemas.openxmlformats.org/presentationml/2006/main">
   <p:cSld>
     <p:spTree>
@@ -975,7 +1176,7 @@
   </p:cSld>
   <p:clrMap bg1="lt1" tx1="dk1" bg2="lt2" tx2="dk2" accent1="accent1" accent2="accent2" accent3="accent3" accent4="accent4" accent5="accent5" accent6="accent6" hlink="hlink" folHlink="folHlink"/>
   <p:sldLayoutIdLst>
-    <p:sldLayoutId xmlns:r="http://schemas.openxmlformats.org/officeDocument/2006/relationships" id="2147483649" r:id="R2527ec8e83e84ce9"/>
+    <p:sldLayoutId xmlns:r="http://schemas.openxmlformats.org/officeDocument/2006/relationships" id="2147483649" r:id="Rafda63fd20d9431c"/>
   </p:sldLayoutIdLst>
   <p:txStyles>
     <p:titleStyle>
@@ -1526,7 +1727,7 @@
           <p:cNvPr id="8" name="">
             <a:extLst xmlns:a="http://schemas.openxmlformats.org/drawingml/2006/main">
               <a:ext uri="{FF2B5EF4-FFF2-40B4-BE49-F238E27FC236}">
-                <a16:creationId xmlns:a16="http://schemas.microsoft.com/office/drawing/2014/main" id="{EE4526B3-1170-4E7D-930F-49CB5DDC58DD}"/>
+                <a16:creationId xmlns:a16="http://schemas.microsoft.com/office/drawing/2014/main" id="{FA7E6576-87C5-44B1-B69E-4406352BA80C}"/>
               </a:ext>
             </a:extLst>
           </p:cNvPr>
@@ -1559,7 +1760,7 @@
           <p:cNvPr id="2" name="">
             <a:extLst xmlns:a="http://schemas.openxmlformats.org/drawingml/2006/main">
               <a:ext uri="{FF2B5EF4-FFF2-40B4-BE49-F238E27FC236}">
-                <a16:creationId xmlns:a16="http://schemas.microsoft.com/office/drawing/2014/main" id="{3AE65341-BC7F-487D-858A-6DEF1DCB0DA1}"/>
+                <a16:creationId xmlns:a16="http://schemas.microsoft.com/office/drawing/2014/main" id="{9DE473F1-EC3D-4A8B-A44C-41DCB59A4C9E}"/>
               </a:ext>
             </a:extLst>
           </p:cNvPr>
@@ -1617,7 +1818,7 @@
           <p:cNvPr id="3" name="">
             <a:extLst xmlns:a="http://schemas.openxmlformats.org/drawingml/2006/main">
               <a:ext uri="{FF2B5EF4-FFF2-40B4-BE49-F238E27FC236}">
-                <a16:creationId xmlns:a16="http://schemas.microsoft.com/office/drawing/2014/main" id="{B175DEE8-A239-4F2E-A868-EBC7EA8A56C4}"/>
+                <a16:creationId xmlns:a16="http://schemas.microsoft.com/office/drawing/2014/main" id="{44261D66-AA0B-47EA-88A7-1DF50169F9FC}"/>
               </a:ext>
             </a:extLst>
           </p:cNvPr>
@@ -1675,7 +1876,7 @@
           <p:cNvPr id="4" name="">
             <a:extLst xmlns:a="http://schemas.openxmlformats.org/drawingml/2006/main">
               <a:ext uri="{FF2B5EF4-FFF2-40B4-BE49-F238E27FC236}">
-                <a16:creationId xmlns:a16="http://schemas.microsoft.com/office/drawing/2014/main" id="{D04D10B0-761C-4108-A427-DC162D508305}"/>
+                <a16:creationId xmlns:a16="http://schemas.microsoft.com/office/drawing/2014/main" id="{415391C4-BDE5-4F21-AD08-F9C223B91E5B}"/>
               </a:ext>
             </a:extLst>
           </p:cNvPr>
@@ -1733,7 +1934,7 @@
           <p:cNvPr id="5" name="">
             <a:extLst xmlns:a="http://schemas.openxmlformats.org/drawingml/2006/main">
               <a:ext uri="{FF2B5EF4-FFF2-40B4-BE49-F238E27FC236}">
-                <a16:creationId xmlns:a16="http://schemas.microsoft.com/office/drawing/2014/main" id="{5FE157E7-618F-469A-9C24-5FDD68BAAF97}"/>
+                <a16:creationId xmlns:a16="http://schemas.microsoft.com/office/drawing/2014/main" id="{104ED7EF-9871-455E-8261-701EFF4BCF0D}"/>
               </a:ext>
             </a:extLst>
           </p:cNvPr>
@@ -1768,7 +1969,7 @@
           <p:cNvPr id="6" name="">
             <a:extLst xmlns:a="http://schemas.openxmlformats.org/drawingml/2006/main">
               <a:ext uri="{FF2B5EF4-FFF2-40B4-BE49-F238E27FC236}">
-                <a16:creationId xmlns:a16="http://schemas.microsoft.com/office/drawing/2014/main" id="{DD1B4DB9-F5C9-470E-A6F8-4EB91262FC6A}"/>
+                <a16:creationId xmlns:a16="http://schemas.microsoft.com/office/drawing/2014/main" id="{17649C56-3C42-4562-9F57-2CB2008EEBE5}"/>
               </a:ext>
             </a:extLst>
           </p:cNvPr>
@@ -1826,7 +2027,7 @@
           <p:cNvPr id="7" name="">
             <a:extLst xmlns:a="http://schemas.openxmlformats.org/drawingml/2006/main">
               <a:ext uri="{FF2B5EF4-FFF2-40B4-BE49-F238E27FC236}">
-                <a16:creationId xmlns:a16="http://schemas.microsoft.com/office/drawing/2014/main" id="{D77BB116-57AD-4ABD-A55B-D715C48B10A8}"/>
+                <a16:creationId xmlns:a16="http://schemas.microsoft.com/office/drawing/2014/main" id="{67E11C2F-62A0-479A-8DD8-3E914EFE953E}"/>
               </a:ext>
             </a:extLst>
           </p:cNvPr>
@@ -1882,7 +2083,2446 @@
     </p:spTree>
     <p:extLst>
       <p:ext uri="{BB962C8B-B14F-4D97-AF65-F5344CB8AC3E}">
-        <p14:creationId xmlns:p14="http://schemas.microsoft.com/office/powerpoint/2010/main" val="1712972210"/>
+        <p14:creationId xmlns:p14="http://schemas.microsoft.com/office/powerpoint/2010/main" val="607594851"/>
+      </p:ext>
+    </p:extLst>
+  </p:cSld>
+</p:sld>
+</file>
+
+<file path=ppt/slides/slide10.xml><?xml version="1.0" encoding="utf-8"?>
+<p:sld xmlns:p="http://schemas.openxmlformats.org/presentationml/2006/main">
+  <p:cSld>
+    <p:bg>
+      <p:bgPr>
+        <a:solidFill xmlns:a="http://schemas.openxmlformats.org/drawingml/2006/main">
+          <a:srgbClr val="F7F8FA"/>
+        </a:solidFill>
+      </p:bgPr>
+    </p:bg>
+    <p:spTree>
+      <p:nvGrpSpPr>
+        <p:cNvPr id="1" name=""/>
+        <p:cNvGrpSpPr/>
+        <p:nvPr/>
+      </p:nvGrpSpPr>
+      <p:grpSpPr>
+        <a:xfrm xmlns:a="http://schemas.openxmlformats.org/drawingml/2006/main"/>
+      </p:grpSpPr>
+      <p:sp>
+        <p:nvSpPr>
+          <p:cNvPr id="21" name="">
+            <a:extLst xmlns:a="http://schemas.openxmlformats.org/drawingml/2006/main">
+              <a:ext uri="{FF2B5EF4-FFF2-40B4-BE49-F238E27FC236}">
+                <a16:creationId xmlns:a16="http://schemas.microsoft.com/office/drawing/2014/main" id="{C67D19D4-2F80-4867-9F6B-ADDFEB32FF68}"/>
+              </a:ext>
+            </a:extLst>
+          </p:cNvPr>
+          <p:cNvSpPr>
+            <a:spLocks xmlns:a="http://schemas.openxmlformats.org/drawingml/2006/main" noGrp="1"/>
+          </p:cNvSpPr>
+          <p:nvPr/>
+        </p:nvSpPr>
+        <p:spPr>
+          <a:xfrm xmlns:a="http://schemas.openxmlformats.org/drawingml/2006/main">
+            <a:off x="0" y="0"/>
+            <a:ext cx="133350" cy="6858000"/>
+          </a:xfrm>
+          <a:prstGeom xmlns:a="http://schemas.openxmlformats.org/drawingml/2006/main" prst="rect">
+            <a:avLst/>
+          </a:prstGeom>
+          <a:solidFill xmlns:a="http://schemas.openxmlformats.org/drawingml/2006/main">
+            <a:srgbClr val="2563EB"/>
+          </a:solidFill>
+          <a:ln xmlns:a="http://schemas.openxmlformats.org/drawingml/2006/main" w="0">
+            <a:solidFill>
+              <a:srgbClr val="2563EB"/>
+            </a:solidFill>
+            <a:prstDash val="solid"/>
+          </a:ln>
+        </p:spPr>
+      </p:sp>
+      <p:sp>
+        <p:nvSpPr>
+          <p:cNvPr id="2" name="">
+            <a:extLst xmlns:a="http://schemas.openxmlformats.org/drawingml/2006/main">
+              <a:ext uri="{FF2B5EF4-FFF2-40B4-BE49-F238E27FC236}">
+                <a16:creationId xmlns:a16="http://schemas.microsoft.com/office/drawing/2014/main" id="{736B70A2-C8C5-42B6-9FD7-DA7CB9D4AEB7}"/>
+              </a:ext>
+            </a:extLst>
+          </p:cNvPr>
+          <p:cNvSpPr>
+            <a:spLocks xmlns:a="http://schemas.openxmlformats.org/drawingml/2006/main" noGrp="1"/>
+          </p:cNvSpPr>
+          <p:nvPr/>
+        </p:nvSpPr>
+        <p:spPr>
+          <a:xfrm xmlns:a="http://schemas.openxmlformats.org/drawingml/2006/main">
+            <a:off x="514350" y="361950"/>
+            <a:ext cx="10953750" cy="590550"/>
+          </a:xfrm>
+          <a:prstGeom xmlns:a="http://schemas.openxmlformats.org/drawingml/2006/main" prst="rect">
+            <a:avLst/>
+          </a:prstGeom>
+          <a:noFill xmlns:a="http://schemas.openxmlformats.org/drawingml/2006/main"/>
+          <a:ln xmlns:a="http://schemas.openxmlformats.org/drawingml/2006/main" w="0">
+            <a:noFill/>
+            <a:prstDash val="solid"/>
+          </a:ln>
+        </p:spPr>
+        <p:txBody>
+          <a:bodyPr xmlns:a="http://schemas.openxmlformats.org/drawingml/2006/main" lIns="0" tIns="0" rIns="0" bIns="0" anchor="t">
+            <a:normAutofit fontScale="100000"/>
+          </a:bodyPr>
+          <a:lstStyle xmlns:a="http://schemas.openxmlformats.org/drawingml/2006/main"/>
+          <a:p xmlns:a="http://schemas.openxmlformats.org/drawingml/2006/main">
+            <a:pPr algn="l">
+              <a:defRPr sz="2925" b="1">
+                <a:solidFill>
+                  <a:srgbClr val="101828"/>
+                </a:solidFill>
+                <a:latin typeface="Microsoft YaHei"/>
+                <a:ea typeface="Microsoft YaHei"/>
+                <a:cs typeface="Microsoft YaHei"/>
+              </a:defRPr>
+            </a:pPr>
+            <a:r>
+              <a:rPr sz="2925" b="1">
+                <a:solidFill>
+                  <a:srgbClr val="101828"/>
+                </a:solidFill>
+                <a:latin typeface="Microsoft YaHei"/>
+                <a:ea typeface="Microsoft YaHei"/>
+                <a:cs typeface="Microsoft YaHei"/>
+              </a:rPr>
+              <a:t>比较器语义一变，二分边界就失去前提</a:t>
+            </a:r>
+          </a:p>
+        </p:txBody>
+      </p:sp>
+      <p:sp>
+        <p:nvSpPr>
+          <p:cNvPr id="3" name="">
+            <a:extLst xmlns:a="http://schemas.openxmlformats.org/drawingml/2006/main">
+              <a:ext uri="{FF2B5EF4-FFF2-40B4-BE49-F238E27FC236}">
+                <a16:creationId xmlns:a16="http://schemas.microsoft.com/office/drawing/2014/main" id="{80BA8F81-545D-481A-B5AD-BB1A7EA8EA8F}"/>
+              </a:ext>
+            </a:extLst>
+          </p:cNvPr>
+          <p:cNvSpPr>
+            <a:spLocks xmlns:a="http://schemas.openxmlformats.org/drawingml/2006/main" noGrp="1"/>
+          </p:cNvSpPr>
+          <p:nvPr/>
+        </p:nvSpPr>
+        <p:spPr>
+          <a:xfrm xmlns:a="http://schemas.openxmlformats.org/drawingml/2006/main">
+            <a:off x="11239500" y="6362700"/>
+            <a:ext cx="457200" cy="190500"/>
+          </a:xfrm>
+          <a:prstGeom xmlns:a="http://schemas.openxmlformats.org/drawingml/2006/main" prst="rect">
+            <a:avLst/>
+          </a:prstGeom>
+          <a:noFill xmlns:a="http://schemas.openxmlformats.org/drawingml/2006/main"/>
+          <a:ln xmlns:a="http://schemas.openxmlformats.org/drawingml/2006/main" w="0">
+            <a:noFill/>
+            <a:prstDash val="solid"/>
+          </a:ln>
+        </p:spPr>
+        <p:txBody>
+          <a:bodyPr xmlns:a="http://schemas.openxmlformats.org/drawingml/2006/main" lIns="0" tIns="0" rIns="0" bIns="0" anchor="t">
+            <a:normAutofit fontScale="100000"/>
+          </a:bodyPr>
+          <a:lstStyle xmlns:a="http://schemas.openxmlformats.org/drawingml/2006/main"/>
+          <a:p xmlns:a="http://schemas.openxmlformats.org/drawingml/2006/main">
+            <a:pPr algn="r">
+              <a:defRPr sz="1050" b="0">
+                <a:solidFill>
+                  <a:srgbClr val="5F6B7A"/>
+                </a:solidFill>
+                <a:latin typeface="Microsoft YaHei"/>
+                <a:ea typeface="Microsoft YaHei"/>
+                <a:cs typeface="Microsoft YaHei"/>
+              </a:defRPr>
+            </a:pPr>
+            <a:r>
+              <a:rPr sz="1050" b="0">
+                <a:solidFill>
+                  <a:srgbClr val="5F6B7A"/>
+                </a:solidFill>
+                <a:latin typeface="Microsoft YaHei"/>
+                <a:ea typeface="Microsoft YaHei"/>
+                <a:cs typeface="Microsoft YaHei"/>
+              </a:rPr>
+              <a:t>10</a:t>
+            </a:r>
+          </a:p>
+        </p:txBody>
+      </p:sp>
+      <p:sp>
+        <p:nvSpPr>
+          <p:cNvPr id="4" name="">
+            <a:extLst xmlns:a="http://schemas.openxmlformats.org/drawingml/2006/main">
+              <a:ext uri="{FF2B5EF4-FFF2-40B4-BE49-F238E27FC236}">
+                <a16:creationId xmlns:a16="http://schemas.microsoft.com/office/drawing/2014/main" id="{A1F50A37-F42B-4A1F-AEC0-2C0C1769087A}"/>
+              </a:ext>
+            </a:extLst>
+          </p:cNvPr>
+          <p:cNvSpPr>
+            <a:spLocks xmlns:a="http://schemas.openxmlformats.org/drawingml/2006/main" noGrp="1"/>
+          </p:cNvSpPr>
+          <p:nvPr/>
+        </p:nvSpPr>
+        <p:spPr>
+          <a:xfrm xmlns:a="http://schemas.openxmlformats.org/drawingml/2006/main">
+            <a:off x="685800" y="1238250"/>
+            <a:ext cx="5715000" cy="361950"/>
+          </a:xfrm>
+          <a:prstGeom xmlns:a="http://schemas.openxmlformats.org/drawingml/2006/main" prst="rect">
+            <a:avLst/>
+          </a:prstGeom>
+          <a:noFill xmlns:a="http://schemas.openxmlformats.org/drawingml/2006/main"/>
+          <a:ln xmlns:a="http://schemas.openxmlformats.org/drawingml/2006/main" w="0">
+            <a:noFill/>
+            <a:prstDash val="solid"/>
+          </a:ln>
+        </p:spPr>
+        <p:txBody>
+          <a:bodyPr xmlns:a="http://schemas.openxmlformats.org/drawingml/2006/main" lIns="0" tIns="0" rIns="0" bIns="0" anchor="t">
+            <a:normAutofit fontScale="100000"/>
+          </a:bodyPr>
+          <a:lstStyle xmlns:a="http://schemas.openxmlformats.org/drawingml/2006/main"/>
+          <a:p xmlns:a="http://schemas.openxmlformats.org/drawingml/2006/main">
+            <a:pPr algn="l">
+              <a:defRPr sz="2025" b="1">
+                <a:solidFill>
+                  <a:srgbClr val="101828"/>
+                </a:solidFill>
+                <a:latin typeface="Microsoft YaHei"/>
+                <a:ea typeface="Microsoft YaHei"/>
+                <a:cs typeface="Microsoft YaHei"/>
+              </a:defRPr>
+            </a:pPr>
+            <a:r>
+              <a:rPr sz="2025" b="1">
+                <a:solidFill>
+                  <a:srgbClr val="101828"/>
+                </a:solidFill>
+                <a:latin typeface="Microsoft YaHei"/>
+                <a:ea typeface="Microsoft YaHei"/>
+                <a:cs typeface="Microsoft YaHei"/>
+              </a:rPr>
+              <a:t>std::lower_bound / upper_bound 的前置条件</a:t>
+            </a:r>
+          </a:p>
+        </p:txBody>
+      </p:sp>
+      <p:sp>
+        <p:nvSpPr>
+          <p:cNvPr id="5" name="">
+            <a:extLst xmlns:a="http://schemas.openxmlformats.org/drawingml/2006/main">
+              <a:ext uri="{FF2B5EF4-FFF2-40B4-BE49-F238E27FC236}">
+                <a16:creationId xmlns:a16="http://schemas.microsoft.com/office/drawing/2014/main" id="{59988DE5-30D2-4FD6-968D-8575F8CEAE50}"/>
+              </a:ext>
+            </a:extLst>
+          </p:cNvPr>
+          <p:cNvSpPr>
+            <a:spLocks xmlns:a="http://schemas.openxmlformats.org/drawingml/2006/main" noGrp="1"/>
+          </p:cNvSpPr>
+          <p:nvPr/>
+        </p:nvSpPr>
+        <p:spPr>
+          <a:xfrm xmlns:a="http://schemas.openxmlformats.org/drawingml/2006/main">
+            <a:off x="685800" y="1714500"/>
+            <a:ext cx="10287000" cy="476250"/>
+          </a:xfrm>
+          <a:prstGeom xmlns:a="http://schemas.openxmlformats.org/drawingml/2006/main" prst="rect">
+            <a:avLst/>
+          </a:prstGeom>
+          <a:noFill xmlns:a="http://schemas.openxmlformats.org/drawingml/2006/main"/>
+          <a:ln xmlns:a="http://schemas.openxmlformats.org/drawingml/2006/main" w="0">
+            <a:noFill/>
+            <a:prstDash val="solid"/>
+          </a:ln>
+        </p:spPr>
+        <p:txBody>
+          <a:bodyPr xmlns:a="http://schemas.openxmlformats.org/drawingml/2006/main" lIns="0" tIns="0" rIns="0" bIns="0" anchor="t">
+            <a:normAutofit fontScale="100000"/>
+          </a:bodyPr>
+          <a:lstStyle xmlns:a="http://schemas.openxmlformats.org/drawingml/2006/main"/>
+          <a:p xmlns:a="http://schemas.openxmlformats.org/drawingml/2006/main">
+            <a:pPr algn="l">
+              <a:defRPr sz="1800" b="0">
+                <a:solidFill>
+                  <a:srgbClr val="5F6B7A"/>
+                </a:solidFill>
+                <a:latin typeface="Microsoft YaHei"/>
+                <a:ea typeface="Microsoft YaHei"/>
+                <a:cs typeface="Microsoft YaHei"/>
+              </a:defRPr>
+            </a:pPr>
+            <a:r>
+              <a:rPr sz="1800" b="0">
+                <a:solidFill>
+                  <a:srgbClr val="5F6B7A"/>
+                </a:solidFill>
+                <a:latin typeface="Microsoft YaHei"/>
+                <a:ea typeface="Microsoft YaHei"/>
+                <a:cs typeface="Microsoft YaHei"/>
+              </a:rPr>
+              <a:t>区间必须在本次传入的 comp 语义下保持分区（通常就是按同一规则有序）。</a:t>
+            </a:r>
+          </a:p>
+        </p:txBody>
+      </p:sp>
+      <p:sp>
+        <p:nvSpPr>
+          <p:cNvPr id="6" name="">
+            <a:extLst xmlns:a="http://schemas.openxmlformats.org/drawingml/2006/main">
+              <a:ext uri="{FF2B5EF4-FFF2-40B4-BE49-F238E27FC236}">
+                <a16:creationId xmlns:a16="http://schemas.microsoft.com/office/drawing/2014/main" id="{C9D15A96-FD6E-452C-8EE2-76DD55D780F6}"/>
+              </a:ext>
+            </a:extLst>
+          </p:cNvPr>
+          <p:cNvSpPr>
+            <a:spLocks xmlns:a="http://schemas.openxmlformats.org/drawingml/2006/main" noGrp="1"/>
+          </p:cNvSpPr>
+          <p:nvPr/>
+        </p:nvSpPr>
+        <p:spPr>
+          <a:xfrm xmlns:a="http://schemas.openxmlformats.org/drawingml/2006/main">
+            <a:off x="685800" y="2552700"/>
+            <a:ext cx="6762750" cy="1581150"/>
+          </a:xfrm>
+          <a:prstGeom xmlns:a="http://schemas.openxmlformats.org/drawingml/2006/main" prst="roundRect">
+            <a:avLst>
+              <a:gd name="adj" fmla="val 7229"/>
+            </a:avLst>
+          </a:prstGeom>
+          <a:solidFill xmlns:a="http://schemas.openxmlformats.org/drawingml/2006/main">
+            <a:srgbClr val="101828"/>
+          </a:solidFill>
+          <a:ln xmlns:a="http://schemas.openxmlformats.org/drawingml/2006/main" w="9525">
+            <a:solidFill>
+              <a:srgbClr val="101828"/>
+            </a:solidFill>
+            <a:prstDash val="solid"/>
+          </a:ln>
+        </p:spPr>
+      </p:sp>
+      <p:sp>
+        <p:nvSpPr>
+          <p:cNvPr id="7" name="">
+            <a:extLst xmlns:a="http://schemas.openxmlformats.org/drawingml/2006/main">
+              <a:ext uri="{FF2B5EF4-FFF2-40B4-BE49-F238E27FC236}">
+                <a16:creationId xmlns:a16="http://schemas.microsoft.com/office/drawing/2014/main" id="{8526F35D-7F45-4D0B-A767-B47D890F6265}"/>
+              </a:ext>
+            </a:extLst>
+          </p:cNvPr>
+          <p:cNvSpPr>
+            <a:spLocks xmlns:a="http://schemas.openxmlformats.org/drawingml/2006/main" noGrp="1"/>
+          </p:cNvSpPr>
+          <p:nvPr/>
+        </p:nvSpPr>
+        <p:spPr>
+          <a:xfrm xmlns:a="http://schemas.openxmlformats.org/drawingml/2006/main">
+            <a:off x="914400" y="2724150"/>
+            <a:ext cx="6305550" cy="285750"/>
+          </a:xfrm>
+          <a:prstGeom xmlns:a="http://schemas.openxmlformats.org/drawingml/2006/main" prst="rect">
+            <a:avLst/>
+          </a:prstGeom>
+          <a:noFill xmlns:a="http://schemas.openxmlformats.org/drawingml/2006/main"/>
+          <a:ln xmlns:a="http://schemas.openxmlformats.org/drawingml/2006/main" w="0">
+            <a:noFill/>
+            <a:prstDash val="solid"/>
+          </a:ln>
+        </p:spPr>
+        <p:txBody>
+          <a:bodyPr xmlns:a="http://schemas.openxmlformats.org/drawingml/2006/main" lIns="0" tIns="0" rIns="0" bIns="0" anchor="t">
+            <a:noAutofit/>
+          </a:bodyPr>
+          <a:lstStyle xmlns:a="http://schemas.openxmlformats.org/drawingml/2006/main"/>
+          <a:p xmlns:a="http://schemas.openxmlformats.org/drawingml/2006/main">
+            <a:pPr algn="l">
+              <a:defRPr sz="1350" b="0">
+                <a:solidFill>
+                  <a:srgbClr val="E6EDF7"/>
+                </a:solidFill>
+                <a:latin typeface="Consolas"/>
+                <a:ea typeface="Consolas"/>
+                <a:cs typeface="Consolas"/>
+              </a:defRPr>
+            </a:pPr>
+            <a:r>
+              <a:rPr sz="1350" b="0">
+                <a:solidFill>
+                  <a:srgbClr val="E6EDF7"/>
+                </a:solidFill>
+                <a:latin typeface="Consolas"/>
+                <a:ea typeface="Consolas"/>
+                <a:cs typeface="Consolas"/>
+              </a:rPr>
+              <a:t>vector&lt;int&gt; a{1, 3, 5, 7, 9};  // 升序</a:t>
+            </a:r>
+          </a:p>
+        </p:txBody>
+      </p:sp>
+      <p:sp>
+        <p:nvSpPr>
+          <p:cNvPr id="8" name="">
+            <a:extLst xmlns:a="http://schemas.openxmlformats.org/drawingml/2006/main">
+              <a:ext uri="{FF2B5EF4-FFF2-40B4-BE49-F238E27FC236}">
+                <a16:creationId xmlns:a16="http://schemas.microsoft.com/office/drawing/2014/main" id="{9C8081A4-8ADB-4B26-A37B-D5DDF9BA4869}"/>
+              </a:ext>
+            </a:extLst>
+          </p:cNvPr>
+          <p:cNvSpPr>
+            <a:spLocks xmlns:a="http://schemas.openxmlformats.org/drawingml/2006/main" noGrp="1"/>
+          </p:cNvSpPr>
+          <p:nvPr/>
+        </p:nvSpPr>
+        <p:spPr>
+          <a:xfrm xmlns:a="http://schemas.openxmlformats.org/drawingml/2006/main">
+            <a:off x="914400" y="3009900"/>
+            <a:ext cx="6305550" cy="285750"/>
+          </a:xfrm>
+          <a:prstGeom xmlns:a="http://schemas.openxmlformats.org/drawingml/2006/main" prst="rect">
+            <a:avLst/>
+          </a:prstGeom>
+          <a:noFill xmlns:a="http://schemas.openxmlformats.org/drawingml/2006/main"/>
+          <a:ln xmlns:a="http://schemas.openxmlformats.org/drawingml/2006/main" w="0">
+            <a:noFill/>
+            <a:prstDash val="solid"/>
+          </a:ln>
+        </p:spPr>
+        <p:txBody>
+          <a:bodyPr xmlns:a="http://schemas.openxmlformats.org/drawingml/2006/main" lIns="0" tIns="0" rIns="0" bIns="0" anchor="t">
+            <a:noAutofit/>
+          </a:bodyPr>
+          <a:lstStyle xmlns:a="http://schemas.openxmlformats.org/drawingml/2006/main"/>
+          <a:p xmlns:a="http://schemas.openxmlformats.org/drawingml/2006/main">
+            <a:pPr algn="l">
+              <a:defRPr sz="1350" b="0">
+                <a:solidFill>
+                  <a:srgbClr val="E6EDF7"/>
+                </a:solidFill>
+                <a:latin typeface="Consolas"/>
+                <a:ea typeface="Consolas"/>
+                <a:cs typeface="Consolas"/>
+              </a:defRPr>
+            </a:pPr>
+            <a:r>
+              <a:rPr sz="1350" b="0">
+                <a:solidFill>
+                  <a:srgbClr val="E6EDF7"/>
+                </a:solidFill>
+                <a:latin typeface="Consolas"/>
+                <a:ea typeface="Consolas"/>
+                <a:cs typeface="Consolas"/>
+              </a:rPr>
+              <a:t>auto it = lower_bound(a.begin(), a.end(), 5,</a:t>
+            </a:r>
+          </a:p>
+        </p:txBody>
+      </p:sp>
+      <p:sp>
+        <p:nvSpPr>
+          <p:cNvPr id="9" name="">
+            <a:extLst xmlns:a="http://schemas.openxmlformats.org/drawingml/2006/main">
+              <a:ext uri="{FF2B5EF4-FFF2-40B4-BE49-F238E27FC236}">
+                <a16:creationId xmlns:a16="http://schemas.microsoft.com/office/drawing/2014/main" id="{95D02175-7F85-41FE-9FE0-A79FF91A4487}"/>
+              </a:ext>
+            </a:extLst>
+          </p:cNvPr>
+          <p:cNvSpPr>
+            <a:spLocks xmlns:a="http://schemas.openxmlformats.org/drawingml/2006/main" noGrp="1"/>
+          </p:cNvSpPr>
+          <p:nvPr/>
+        </p:nvSpPr>
+        <p:spPr>
+          <a:xfrm xmlns:a="http://schemas.openxmlformats.org/drawingml/2006/main">
+            <a:off x="914400" y="3295650"/>
+            <a:ext cx="6305550" cy="285750"/>
+          </a:xfrm>
+          <a:prstGeom xmlns:a="http://schemas.openxmlformats.org/drawingml/2006/main" prst="rect">
+            <a:avLst/>
+          </a:prstGeom>
+          <a:noFill xmlns:a="http://schemas.openxmlformats.org/drawingml/2006/main"/>
+          <a:ln xmlns:a="http://schemas.openxmlformats.org/drawingml/2006/main" w="0">
+            <a:noFill/>
+            <a:prstDash val="solid"/>
+          </a:ln>
+        </p:spPr>
+        <p:txBody>
+          <a:bodyPr xmlns:a="http://schemas.openxmlformats.org/drawingml/2006/main" lIns="0" tIns="0" rIns="0" bIns="0" anchor="t">
+            <a:noAutofit/>
+          </a:bodyPr>
+          <a:lstStyle xmlns:a="http://schemas.openxmlformats.org/drawingml/2006/main"/>
+          <a:p xmlns:a="http://schemas.openxmlformats.org/drawingml/2006/main">
+            <a:pPr algn="l">
+              <a:defRPr sz="1350" b="0">
+                <a:solidFill>
+                  <a:srgbClr val="7DD3FC"/>
+                </a:solidFill>
+                <a:latin typeface="Consolas"/>
+                <a:ea typeface="Consolas"/>
+                <a:cs typeface="Consolas"/>
+              </a:defRPr>
+            </a:pPr>
+            <a:r>
+              <a:rPr sz="1350" b="0">
+                <a:solidFill>
+                  <a:srgbClr val="7DD3FC"/>
+                </a:solidFill>
+                <a:latin typeface="Consolas"/>
+                <a:ea typeface="Consolas"/>
+                <a:cs typeface="Consolas"/>
+              </a:rPr>
+              <a:t>  [](int x, int y){ return x &gt; y; }); // 却按降序查</a:t>
+            </a:r>
+          </a:p>
+        </p:txBody>
+      </p:sp>
+      <p:sp>
+        <p:nvSpPr>
+          <p:cNvPr id="10" name="">
+            <a:extLst xmlns:a="http://schemas.openxmlformats.org/drawingml/2006/main">
+              <a:ext uri="{FF2B5EF4-FFF2-40B4-BE49-F238E27FC236}">
+                <a16:creationId xmlns:a16="http://schemas.microsoft.com/office/drawing/2014/main" id="{16562C39-BB65-42AA-855C-7F8673E5F343}"/>
+              </a:ext>
+            </a:extLst>
+          </p:cNvPr>
+          <p:cNvSpPr>
+            <a:spLocks xmlns:a="http://schemas.openxmlformats.org/drawingml/2006/main" noGrp="1"/>
+          </p:cNvSpPr>
+          <p:nvPr/>
+        </p:nvSpPr>
+        <p:spPr>
+          <a:xfrm xmlns:a="http://schemas.openxmlformats.org/drawingml/2006/main">
+            <a:off x="7848600" y="2552700"/>
+            <a:ext cx="3390900" cy="1581150"/>
+          </a:xfrm>
+          <a:prstGeom xmlns:a="http://schemas.openxmlformats.org/drawingml/2006/main" prst="roundRect">
+            <a:avLst>
+              <a:gd name="adj" fmla="val 7229"/>
+            </a:avLst>
+          </a:prstGeom>
+          <a:solidFill xmlns:a="http://schemas.openxmlformats.org/drawingml/2006/main">
+            <a:srgbClr val="FFF1F2"/>
+          </a:solidFill>
+          <a:ln xmlns:a="http://schemas.openxmlformats.org/drawingml/2006/main" w="9525">
+            <a:solidFill>
+              <a:srgbClr val="FFC9CE"/>
+            </a:solidFill>
+            <a:prstDash val="solid"/>
+          </a:ln>
+        </p:spPr>
+      </p:sp>
+      <p:sp>
+        <p:nvSpPr>
+          <p:cNvPr id="11" name="">
+            <a:extLst xmlns:a="http://schemas.openxmlformats.org/drawingml/2006/main">
+              <a:ext uri="{FF2B5EF4-FFF2-40B4-BE49-F238E27FC236}">
+                <a16:creationId xmlns:a16="http://schemas.microsoft.com/office/drawing/2014/main" id="{ED4FA744-647F-4E1F-AD91-0F9007F9B974}"/>
+              </a:ext>
+            </a:extLst>
+          </p:cNvPr>
+          <p:cNvSpPr>
+            <a:spLocks xmlns:a="http://schemas.openxmlformats.org/drawingml/2006/main" noGrp="1"/>
+          </p:cNvSpPr>
+          <p:nvPr/>
+        </p:nvSpPr>
+        <p:spPr>
+          <a:xfrm xmlns:a="http://schemas.openxmlformats.org/drawingml/2006/main">
+            <a:off x="8096250" y="2819400"/>
+            <a:ext cx="2905125" cy="419100"/>
+          </a:xfrm>
+          <a:prstGeom xmlns:a="http://schemas.openxmlformats.org/drawingml/2006/main" prst="rect">
+            <a:avLst/>
+          </a:prstGeom>
+          <a:noFill xmlns:a="http://schemas.openxmlformats.org/drawingml/2006/main"/>
+          <a:ln xmlns:a="http://schemas.openxmlformats.org/drawingml/2006/main" w="0">
+            <a:noFill/>
+            <a:prstDash val="solid"/>
+          </a:ln>
+        </p:spPr>
+        <p:txBody>
+          <a:bodyPr xmlns:a="http://schemas.openxmlformats.org/drawingml/2006/main" lIns="0" tIns="0" rIns="0" bIns="0" anchor="t">
+            <a:normAutofit fontScale="100000"/>
+          </a:bodyPr>
+          <a:lstStyle xmlns:a="http://schemas.openxmlformats.org/drawingml/2006/main"/>
+          <a:p xmlns:a="http://schemas.openxmlformats.org/drawingml/2006/main">
+            <a:pPr algn="l">
+              <a:defRPr sz="1725" b="1">
+                <a:solidFill>
+                  <a:srgbClr val="E5484D"/>
+                </a:solidFill>
+                <a:latin typeface="Microsoft YaHei"/>
+                <a:ea typeface="Microsoft YaHei"/>
+                <a:cs typeface="Microsoft YaHei"/>
+              </a:defRPr>
+            </a:pPr>
+            <a:r>
+              <a:rPr sz="1725" b="1">
+                <a:solidFill>
+                  <a:srgbClr val="E5484D"/>
+                </a:solidFill>
+                <a:latin typeface="Microsoft YaHei"/>
+                <a:ea typeface="Microsoft YaHei"/>
+                <a:cs typeface="Microsoft YaHei"/>
+              </a:rPr>
+              <a:t>此时区间不满足前置条件</a:t>
+            </a:r>
+          </a:p>
+        </p:txBody>
+      </p:sp>
+      <p:sp>
+        <p:nvSpPr>
+          <p:cNvPr id="12" name="">
+            <a:extLst xmlns:a="http://schemas.openxmlformats.org/drawingml/2006/main">
+              <a:ext uri="{FF2B5EF4-FFF2-40B4-BE49-F238E27FC236}">
+                <a16:creationId xmlns:a16="http://schemas.microsoft.com/office/drawing/2014/main" id="{E6F77CF3-85ED-4B0E-BD39-9606C6CE1C79}"/>
+              </a:ext>
+            </a:extLst>
+          </p:cNvPr>
+          <p:cNvSpPr>
+            <a:spLocks xmlns:a="http://schemas.openxmlformats.org/drawingml/2006/main" noGrp="1"/>
+          </p:cNvSpPr>
+          <p:nvPr/>
+        </p:nvSpPr>
+        <p:spPr>
+          <a:xfrm xmlns:a="http://schemas.openxmlformats.org/drawingml/2006/main">
+            <a:off x="8096250" y="3390900"/>
+            <a:ext cx="2857500" cy="457200"/>
+          </a:xfrm>
+          <a:prstGeom xmlns:a="http://schemas.openxmlformats.org/drawingml/2006/main" prst="rect">
+            <a:avLst/>
+          </a:prstGeom>
+          <a:noFill xmlns:a="http://schemas.openxmlformats.org/drawingml/2006/main"/>
+          <a:ln xmlns:a="http://schemas.openxmlformats.org/drawingml/2006/main" w="0">
+            <a:noFill/>
+            <a:prstDash val="solid"/>
+          </a:ln>
+        </p:spPr>
+        <p:txBody>
+          <a:bodyPr xmlns:a="http://schemas.openxmlformats.org/drawingml/2006/main" lIns="0" tIns="0" rIns="0" bIns="0" anchor="t">
+            <a:normAutofit fontScale="97329"/>
+          </a:bodyPr>
+          <a:lstStyle xmlns:a="http://schemas.openxmlformats.org/drawingml/2006/main"/>
+          <a:p xmlns:a="http://schemas.openxmlformats.org/drawingml/2006/main">
+            <a:pPr algn="l">
+              <a:defRPr sz="1650" b="0">
+                <a:solidFill>
+                  <a:srgbClr val="101828"/>
+                </a:solidFill>
+                <a:latin typeface="Microsoft YaHei"/>
+                <a:ea typeface="Microsoft YaHei"/>
+                <a:cs typeface="Microsoft YaHei"/>
+              </a:defRPr>
+            </a:pPr>
+            <a:r>
+              <a:rPr sz="1650" b="0">
+                <a:solidFill>
+                  <a:srgbClr val="101828"/>
+                </a:solidFill>
+                <a:latin typeface="Microsoft YaHei"/>
+                <a:ea typeface="Microsoft YaHei"/>
+                <a:cs typeface="Microsoft YaHei"/>
+              </a:rPr>
+              <a:t>结果不受标准保证，不能依赖。</a:t>
+            </a:r>
+          </a:p>
+        </p:txBody>
+      </p:sp>
+      <p:sp>
+        <p:nvSpPr>
+          <p:cNvPr id="13" name="">
+            <a:extLst xmlns:a="http://schemas.openxmlformats.org/drawingml/2006/main">
+              <a:ext uri="{FF2B5EF4-FFF2-40B4-BE49-F238E27FC236}">
+                <a16:creationId xmlns:a16="http://schemas.microsoft.com/office/drawing/2014/main" id="{2925A657-A13D-42B2-8952-624896DD878C}"/>
+              </a:ext>
+            </a:extLst>
+          </p:cNvPr>
+          <p:cNvSpPr>
+            <a:spLocks xmlns:a="http://schemas.openxmlformats.org/drawingml/2006/main" noGrp="1"/>
+          </p:cNvSpPr>
+          <p:nvPr/>
+        </p:nvSpPr>
+        <p:spPr>
+          <a:xfrm xmlns:a="http://schemas.openxmlformats.org/drawingml/2006/main">
+            <a:off x="685800" y="4552950"/>
+            <a:ext cx="1714500" cy="323850"/>
+          </a:xfrm>
+          <a:prstGeom xmlns:a="http://schemas.openxmlformats.org/drawingml/2006/main" prst="rect">
+            <a:avLst/>
+          </a:prstGeom>
+          <a:noFill xmlns:a="http://schemas.openxmlformats.org/drawingml/2006/main"/>
+          <a:ln xmlns:a="http://schemas.openxmlformats.org/drawingml/2006/main" w="0">
+            <a:noFill/>
+            <a:prstDash val="solid"/>
+          </a:ln>
+        </p:spPr>
+        <p:txBody>
+          <a:bodyPr xmlns:a="http://schemas.openxmlformats.org/drawingml/2006/main" lIns="0" tIns="0" rIns="0" bIns="0" anchor="t">
+            <a:normAutofit fontScale="100000"/>
+          </a:bodyPr>
+          <a:lstStyle xmlns:a="http://schemas.openxmlformats.org/drawingml/2006/main"/>
+          <a:p xmlns:a="http://schemas.openxmlformats.org/drawingml/2006/main">
+            <a:pPr algn="l">
+              <a:defRPr sz="1875" b="1">
+                <a:solidFill>
+                  <a:srgbClr val="E5484D"/>
+                </a:solidFill>
+                <a:latin typeface="Microsoft YaHei"/>
+                <a:ea typeface="Microsoft YaHei"/>
+                <a:cs typeface="Microsoft YaHei"/>
+              </a:defRPr>
+            </a:pPr>
+            <a:r>
+              <a:rPr sz="1875" b="1">
+                <a:solidFill>
+                  <a:srgbClr val="E5484D"/>
+                </a:solidFill>
+                <a:latin typeface="Microsoft YaHei"/>
+                <a:ea typeface="Microsoft YaHei"/>
+                <a:cs typeface="Microsoft YaHei"/>
+              </a:rPr>
+              <a:t>可能表现</a:t>
+            </a:r>
+          </a:p>
+        </p:txBody>
+      </p:sp>
+      <p:sp>
+        <p:nvSpPr>
+          <p:cNvPr id="14" name="">
+            <a:extLst xmlns:a="http://schemas.openxmlformats.org/drawingml/2006/main">
+              <a:ext uri="{FF2B5EF4-FFF2-40B4-BE49-F238E27FC236}">
+                <a16:creationId xmlns:a16="http://schemas.microsoft.com/office/drawing/2014/main" id="{7E8A0274-134A-469D-89E2-00FEE13A9B19}"/>
+              </a:ext>
+            </a:extLst>
+          </p:cNvPr>
+          <p:cNvSpPr>
+            <a:spLocks xmlns:a="http://schemas.openxmlformats.org/drawingml/2006/main" noGrp="1"/>
+          </p:cNvSpPr>
+          <p:nvPr/>
+        </p:nvSpPr>
+        <p:spPr>
+          <a:xfrm xmlns:a="http://schemas.openxmlformats.org/drawingml/2006/main">
+            <a:off x="685800" y="5095875"/>
+            <a:ext cx="95250" cy="95250"/>
+          </a:xfrm>
+          <a:prstGeom xmlns:a="http://schemas.openxmlformats.org/drawingml/2006/main" prst="ellipse">
+            <a:avLst/>
+          </a:prstGeom>
+          <a:solidFill xmlns:a="http://schemas.openxmlformats.org/drawingml/2006/main">
+            <a:srgbClr val="2563EB"/>
+          </a:solidFill>
+          <a:ln xmlns:a="http://schemas.openxmlformats.org/drawingml/2006/main" w="0">
+            <a:solidFill>
+              <a:srgbClr val="2563EB"/>
+            </a:solidFill>
+            <a:prstDash val="solid"/>
+          </a:ln>
+        </p:spPr>
+      </p:sp>
+      <p:sp>
+        <p:nvSpPr>
+          <p:cNvPr id="15" name="">
+            <a:extLst xmlns:a="http://schemas.openxmlformats.org/drawingml/2006/main">
+              <a:ext uri="{FF2B5EF4-FFF2-40B4-BE49-F238E27FC236}">
+                <a16:creationId xmlns:a16="http://schemas.microsoft.com/office/drawing/2014/main" id="{6E7B0FDC-9C92-4F21-B862-8770736130A4}"/>
+              </a:ext>
+            </a:extLst>
+          </p:cNvPr>
+          <p:cNvSpPr>
+            <a:spLocks xmlns:a="http://schemas.openxmlformats.org/drawingml/2006/main" noGrp="1"/>
+          </p:cNvSpPr>
+          <p:nvPr/>
+        </p:nvSpPr>
+        <p:spPr>
+          <a:xfrm xmlns:a="http://schemas.openxmlformats.org/drawingml/2006/main">
+            <a:off x="914400" y="5010150"/>
+            <a:ext cx="4724400" cy="552450"/>
+          </a:xfrm>
+          <a:prstGeom xmlns:a="http://schemas.openxmlformats.org/drawingml/2006/main" prst="rect">
+            <a:avLst/>
+          </a:prstGeom>
+          <a:noFill xmlns:a="http://schemas.openxmlformats.org/drawingml/2006/main"/>
+          <a:ln xmlns:a="http://schemas.openxmlformats.org/drawingml/2006/main" w="0">
+            <a:noFill/>
+            <a:prstDash val="solid"/>
+          </a:ln>
+        </p:spPr>
+        <p:txBody>
+          <a:bodyPr xmlns:a="http://schemas.openxmlformats.org/drawingml/2006/main" lIns="0" tIns="0" rIns="0" bIns="0" anchor="t">
+            <a:normAutofit fontScale="100000"/>
+          </a:bodyPr>
+          <a:lstStyle xmlns:a="http://schemas.openxmlformats.org/drawingml/2006/main"/>
+          <a:p xmlns:a="http://schemas.openxmlformats.org/drawingml/2006/main">
+            <a:pPr algn="l">
+              <a:defRPr sz="1650" b="0">
+                <a:solidFill>
+                  <a:srgbClr val="14213D"/>
+                </a:solidFill>
+                <a:latin typeface="Microsoft YaHei"/>
+                <a:ea typeface="Microsoft YaHei"/>
+                <a:cs typeface="Microsoft YaHei"/>
+              </a:defRPr>
+            </a:pPr>
+            <a:r>
+              <a:rPr sz="1650" b="0">
+                <a:solidFill>
+                  <a:srgbClr val="14213D"/>
+                </a:solidFill>
+                <a:latin typeface="Microsoft YaHei"/>
+                <a:ea typeface="Microsoft YaHei"/>
+                <a:cs typeface="Microsoft YaHei"/>
+              </a:rPr>
+              <a:t>返回错误位置或意外的 end()</a:t>
+            </a:r>
+          </a:p>
+        </p:txBody>
+      </p:sp>
+      <p:sp>
+        <p:nvSpPr>
+          <p:cNvPr id="16" name="">
+            <a:extLst xmlns:a="http://schemas.openxmlformats.org/drawingml/2006/main">
+              <a:ext uri="{FF2B5EF4-FFF2-40B4-BE49-F238E27FC236}">
+                <a16:creationId xmlns:a16="http://schemas.microsoft.com/office/drawing/2014/main" id="{ED0C914D-E3AA-4001-BBD5-A6C9F06660B1}"/>
+              </a:ext>
+            </a:extLst>
+          </p:cNvPr>
+          <p:cNvSpPr>
+            <a:spLocks xmlns:a="http://schemas.openxmlformats.org/drawingml/2006/main" noGrp="1"/>
+          </p:cNvSpPr>
+          <p:nvPr/>
+        </p:nvSpPr>
+        <p:spPr>
+          <a:xfrm xmlns:a="http://schemas.openxmlformats.org/drawingml/2006/main">
+            <a:off x="5905500" y="5095875"/>
+            <a:ext cx="95250" cy="95250"/>
+          </a:xfrm>
+          <a:prstGeom xmlns:a="http://schemas.openxmlformats.org/drawingml/2006/main" prst="ellipse">
+            <a:avLst/>
+          </a:prstGeom>
+          <a:solidFill xmlns:a="http://schemas.openxmlformats.org/drawingml/2006/main">
+            <a:srgbClr val="2563EB"/>
+          </a:solidFill>
+          <a:ln xmlns:a="http://schemas.openxmlformats.org/drawingml/2006/main" w="0">
+            <a:solidFill>
+              <a:srgbClr val="2563EB"/>
+            </a:solidFill>
+            <a:prstDash val="solid"/>
+          </a:ln>
+        </p:spPr>
+      </p:sp>
+      <p:sp>
+        <p:nvSpPr>
+          <p:cNvPr id="17" name="">
+            <a:extLst xmlns:a="http://schemas.openxmlformats.org/drawingml/2006/main">
+              <a:ext uri="{FF2B5EF4-FFF2-40B4-BE49-F238E27FC236}">
+                <a16:creationId xmlns:a16="http://schemas.microsoft.com/office/drawing/2014/main" id="{7D748CE4-9676-4E2D-9888-9CF414A583B8}"/>
+              </a:ext>
+            </a:extLst>
+          </p:cNvPr>
+          <p:cNvSpPr>
+            <a:spLocks xmlns:a="http://schemas.openxmlformats.org/drawingml/2006/main" noGrp="1"/>
+          </p:cNvSpPr>
+          <p:nvPr/>
+        </p:nvSpPr>
+        <p:spPr>
+          <a:xfrm xmlns:a="http://schemas.openxmlformats.org/drawingml/2006/main">
+            <a:off x="6134100" y="5010150"/>
+            <a:ext cx="5105400" cy="552450"/>
+          </a:xfrm>
+          <a:prstGeom xmlns:a="http://schemas.openxmlformats.org/drawingml/2006/main" prst="rect">
+            <a:avLst/>
+          </a:prstGeom>
+          <a:noFill xmlns:a="http://schemas.openxmlformats.org/drawingml/2006/main"/>
+          <a:ln xmlns:a="http://schemas.openxmlformats.org/drawingml/2006/main" w="0">
+            <a:noFill/>
+            <a:prstDash val="solid"/>
+          </a:ln>
+        </p:spPr>
+        <p:txBody>
+          <a:bodyPr xmlns:a="http://schemas.openxmlformats.org/drawingml/2006/main" lIns="0" tIns="0" rIns="0" bIns="0" anchor="t">
+            <a:normAutofit fontScale="100000"/>
+          </a:bodyPr>
+          <a:lstStyle xmlns:a="http://schemas.openxmlformats.org/drawingml/2006/main"/>
+          <a:p xmlns:a="http://schemas.openxmlformats.org/drawingml/2006/main">
+            <a:pPr algn="l">
+              <a:defRPr sz="1650" b="0">
+                <a:solidFill>
+                  <a:srgbClr val="14213D"/>
+                </a:solidFill>
+                <a:latin typeface="Microsoft YaHei"/>
+                <a:ea typeface="Microsoft YaHei"/>
+                <a:cs typeface="Microsoft YaHei"/>
+              </a:defRPr>
+            </a:pPr>
+            <a:r>
+              <a:rPr sz="1650" b="0">
+                <a:solidFill>
+                  <a:srgbClr val="14213D"/>
+                </a:solidFill>
+                <a:latin typeface="Microsoft YaHei"/>
+                <a:ea typeface="Microsoft YaHei"/>
+                <a:cs typeface="Microsoft YaHei"/>
+              </a:rPr>
+              <a:t>不同编译器、优化级别下结果不一致</a:t>
+            </a:r>
+          </a:p>
+        </p:txBody>
+      </p:sp>
+      <p:sp>
+        <p:nvSpPr>
+          <p:cNvPr id="18" name="">
+            <a:extLst xmlns:a="http://schemas.openxmlformats.org/drawingml/2006/main">
+              <a:ext uri="{FF2B5EF4-FFF2-40B4-BE49-F238E27FC236}">
+                <a16:creationId xmlns:a16="http://schemas.microsoft.com/office/drawing/2014/main" id="{468F77CA-5917-46AF-BED1-40FF52763B86}"/>
+              </a:ext>
+            </a:extLst>
+          </p:cNvPr>
+          <p:cNvSpPr>
+            <a:spLocks xmlns:a="http://schemas.openxmlformats.org/drawingml/2006/main" noGrp="1"/>
+          </p:cNvSpPr>
+          <p:nvPr/>
+        </p:nvSpPr>
+        <p:spPr>
+          <a:xfrm xmlns:a="http://schemas.openxmlformats.org/drawingml/2006/main">
+            <a:off x="685800" y="5705475"/>
+            <a:ext cx="95250" cy="95250"/>
+          </a:xfrm>
+          <a:prstGeom xmlns:a="http://schemas.openxmlformats.org/drawingml/2006/main" prst="ellipse">
+            <a:avLst/>
+          </a:prstGeom>
+          <a:solidFill xmlns:a="http://schemas.openxmlformats.org/drawingml/2006/main">
+            <a:srgbClr val="2563EB"/>
+          </a:solidFill>
+          <a:ln xmlns:a="http://schemas.openxmlformats.org/drawingml/2006/main" w="0">
+            <a:solidFill>
+              <a:srgbClr val="2563EB"/>
+            </a:solidFill>
+            <a:prstDash val="solid"/>
+          </a:ln>
+        </p:spPr>
+      </p:sp>
+      <p:sp>
+        <p:nvSpPr>
+          <p:cNvPr id="19" name="">
+            <a:extLst xmlns:a="http://schemas.openxmlformats.org/drawingml/2006/main">
+              <a:ext uri="{FF2B5EF4-FFF2-40B4-BE49-F238E27FC236}">
+                <a16:creationId xmlns:a16="http://schemas.microsoft.com/office/drawing/2014/main" id="{09DB9185-9732-4155-86D5-B0131BA7E39D}"/>
+              </a:ext>
+            </a:extLst>
+          </p:cNvPr>
+          <p:cNvSpPr>
+            <a:spLocks xmlns:a="http://schemas.openxmlformats.org/drawingml/2006/main" noGrp="1"/>
+          </p:cNvSpPr>
+          <p:nvPr/>
+        </p:nvSpPr>
+        <p:spPr>
+          <a:xfrm xmlns:a="http://schemas.openxmlformats.org/drawingml/2006/main">
+            <a:off x="914400" y="5619750"/>
+            <a:ext cx="10058400" cy="552450"/>
+          </a:xfrm>
+          <a:prstGeom xmlns:a="http://schemas.openxmlformats.org/drawingml/2006/main" prst="rect">
+            <a:avLst/>
+          </a:prstGeom>
+          <a:noFill xmlns:a="http://schemas.openxmlformats.org/drawingml/2006/main"/>
+          <a:ln xmlns:a="http://schemas.openxmlformats.org/drawingml/2006/main" w="0">
+            <a:noFill/>
+            <a:prstDash val="solid"/>
+          </a:ln>
+        </p:spPr>
+        <p:txBody>
+          <a:bodyPr xmlns:a="http://schemas.openxmlformats.org/drawingml/2006/main" lIns="0" tIns="0" rIns="0" bIns="0" anchor="t">
+            <a:normAutofit fontScale="100000"/>
+          </a:bodyPr>
+          <a:lstStyle xmlns:a="http://schemas.openxmlformats.org/drawingml/2006/main"/>
+          <a:p xmlns:a="http://schemas.openxmlformats.org/drawingml/2006/main">
+            <a:pPr algn="l">
+              <a:defRPr sz="1650" b="0">
+                <a:solidFill>
+                  <a:srgbClr val="14213D"/>
+                </a:solidFill>
+                <a:latin typeface="Microsoft YaHei"/>
+                <a:ea typeface="Microsoft YaHei"/>
+                <a:cs typeface="Microsoft YaHei"/>
+              </a:defRPr>
+            </a:pPr>
+            <a:r>
+              <a:rPr sz="1650" b="0">
+                <a:solidFill>
+                  <a:srgbClr val="14213D"/>
+                </a:solidFill>
+                <a:latin typeface="Microsoft YaHei"/>
+                <a:ea typeface="Microsoft YaHei"/>
+                <a:cs typeface="Microsoft YaHei"/>
+              </a:rPr>
+              <a:t>若 set 自身的 Compare 不满足严格弱序，插入、查找、删除等整体都失去保证</a:t>
+            </a:r>
+          </a:p>
+        </p:txBody>
+      </p:sp>
+      <p:sp>
+        <p:nvSpPr>
+          <p:cNvPr id="20" name="">
+            <a:extLst xmlns:a="http://schemas.openxmlformats.org/drawingml/2006/main">
+              <a:ext uri="{FF2B5EF4-FFF2-40B4-BE49-F238E27FC236}">
+                <a16:creationId xmlns:a16="http://schemas.microsoft.com/office/drawing/2014/main" id="{9E6ED025-0424-4563-BAFE-B65138FCDD5D}"/>
+              </a:ext>
+            </a:extLst>
+          </p:cNvPr>
+          <p:cNvSpPr>
+            <a:spLocks xmlns:a="http://schemas.openxmlformats.org/drawingml/2006/main" noGrp="1"/>
+          </p:cNvSpPr>
+          <p:nvPr/>
+        </p:nvSpPr>
+        <p:spPr>
+          <a:xfrm xmlns:a="http://schemas.openxmlformats.org/drawingml/2006/main">
+            <a:off x="685800" y="6191250"/>
+            <a:ext cx="10477500" cy="285750"/>
+          </a:xfrm>
+          <a:prstGeom xmlns:a="http://schemas.openxmlformats.org/drawingml/2006/main" prst="rect">
+            <a:avLst/>
+          </a:prstGeom>
+          <a:noFill xmlns:a="http://schemas.openxmlformats.org/drawingml/2006/main"/>
+          <a:ln xmlns:a="http://schemas.openxmlformats.org/drawingml/2006/main" w="0">
+            <a:noFill/>
+            <a:prstDash val="solid"/>
+          </a:ln>
+        </p:spPr>
+        <p:txBody>
+          <a:bodyPr xmlns:a="http://schemas.openxmlformats.org/drawingml/2006/main" lIns="0" tIns="0" rIns="0" bIns="0" anchor="t">
+            <a:normAutofit fontScale="100000"/>
+          </a:bodyPr>
+          <a:lstStyle xmlns:a="http://schemas.openxmlformats.org/drawingml/2006/main"/>
+          <a:p xmlns:a="http://schemas.openxmlformats.org/drawingml/2006/main">
+            <a:pPr algn="l">
+              <a:defRPr sz="1800" b="1">
+                <a:solidFill>
+                  <a:srgbClr val="2563EB"/>
+                </a:solidFill>
+                <a:latin typeface="Microsoft YaHei"/>
+                <a:ea typeface="Microsoft YaHei"/>
+                <a:cs typeface="Microsoft YaHei"/>
+              </a:defRPr>
+            </a:pPr>
+            <a:r>
+              <a:rPr sz="1800" b="1">
+                <a:solidFill>
+                  <a:srgbClr val="2563EB"/>
+                </a:solidFill>
+                <a:latin typeface="Microsoft YaHei"/>
+                <a:ea typeface="Microsoft YaHei"/>
+                <a:cs typeface="Microsoft YaHei"/>
+              </a:rPr>
+              <a:t>安全规则：排序、建树、lower_bound、upper_bound 必须共享同一套严格弱序语义。</a:t>
+            </a:r>
+          </a:p>
+        </p:txBody>
+      </p:sp>
+    </p:spTree>
+    <p:extLst>
+      <p:ext uri="{BB962C8B-B14F-4D97-AF65-F5344CB8AC3E}">
+        <p14:creationId xmlns:p14="http://schemas.microsoft.com/office/powerpoint/2010/main" val="390875644"/>
+      </p:ext>
+    </p:extLst>
+  </p:cSld>
+</p:sld>
+</file>
+
+<file path=ppt/slides/slide11.xml><?xml version="1.0" encoding="utf-8"?>
+<p:sld xmlns:p="http://schemas.openxmlformats.org/presentationml/2006/main">
+  <p:cSld>
+    <p:bg>
+      <p:bgPr>
+        <a:solidFill xmlns:a="http://schemas.openxmlformats.org/drawingml/2006/main">
+          <a:srgbClr val="F7F8FA"/>
+        </a:solidFill>
+      </p:bgPr>
+    </p:bg>
+    <p:spTree>
+      <p:nvGrpSpPr>
+        <p:cNvPr id="1" name=""/>
+        <p:cNvGrpSpPr/>
+        <p:nvPr/>
+      </p:nvGrpSpPr>
+      <p:grpSpPr>
+        <a:xfrm xmlns:a="http://schemas.openxmlformats.org/drawingml/2006/main"/>
+      </p:grpSpPr>
+      <p:sp>
+        <p:nvSpPr>
+          <p:cNvPr id="25" name="">
+            <a:extLst xmlns:a="http://schemas.openxmlformats.org/drawingml/2006/main">
+              <a:ext uri="{FF2B5EF4-FFF2-40B4-BE49-F238E27FC236}">
+                <a16:creationId xmlns:a16="http://schemas.microsoft.com/office/drawing/2014/main" id="{A3EA7151-011D-489D-AE6D-AB3C2B166BE3}"/>
+              </a:ext>
+            </a:extLst>
+          </p:cNvPr>
+          <p:cNvSpPr>
+            <a:spLocks xmlns:a="http://schemas.openxmlformats.org/drawingml/2006/main" noGrp="1"/>
+          </p:cNvSpPr>
+          <p:nvPr/>
+        </p:nvSpPr>
+        <p:spPr>
+          <a:xfrm xmlns:a="http://schemas.openxmlformats.org/drawingml/2006/main">
+            <a:off x="0" y="0"/>
+            <a:ext cx="133350" cy="6858000"/>
+          </a:xfrm>
+          <a:prstGeom xmlns:a="http://schemas.openxmlformats.org/drawingml/2006/main" prst="rect">
+            <a:avLst/>
+          </a:prstGeom>
+          <a:solidFill xmlns:a="http://schemas.openxmlformats.org/drawingml/2006/main">
+            <a:srgbClr val="2563EB"/>
+          </a:solidFill>
+          <a:ln xmlns:a="http://schemas.openxmlformats.org/drawingml/2006/main" w="0">
+            <a:solidFill>
+              <a:srgbClr val="2563EB"/>
+            </a:solidFill>
+            <a:prstDash val="solid"/>
+          </a:ln>
+        </p:spPr>
+      </p:sp>
+      <p:sp>
+        <p:nvSpPr>
+          <p:cNvPr id="2" name="">
+            <a:extLst xmlns:a="http://schemas.openxmlformats.org/drawingml/2006/main">
+              <a:ext uri="{FF2B5EF4-FFF2-40B4-BE49-F238E27FC236}">
+                <a16:creationId xmlns:a16="http://schemas.microsoft.com/office/drawing/2014/main" id="{1092A2CD-0EF2-4098-8085-33BD3796F579}"/>
+              </a:ext>
+            </a:extLst>
+          </p:cNvPr>
+          <p:cNvSpPr>
+            <a:spLocks xmlns:a="http://schemas.openxmlformats.org/drawingml/2006/main" noGrp="1"/>
+          </p:cNvSpPr>
+          <p:nvPr/>
+        </p:nvSpPr>
+        <p:spPr>
+          <a:xfrm xmlns:a="http://schemas.openxmlformats.org/drawingml/2006/main">
+            <a:off x="514350" y="361950"/>
+            <a:ext cx="10953750" cy="590550"/>
+          </a:xfrm>
+          <a:prstGeom xmlns:a="http://schemas.openxmlformats.org/drawingml/2006/main" prst="rect">
+            <a:avLst/>
+          </a:prstGeom>
+          <a:noFill xmlns:a="http://schemas.openxmlformats.org/drawingml/2006/main"/>
+          <a:ln xmlns:a="http://schemas.openxmlformats.org/drawingml/2006/main" w="0">
+            <a:noFill/>
+            <a:prstDash val="solid"/>
+          </a:ln>
+        </p:spPr>
+        <p:txBody>
+          <a:bodyPr xmlns:a="http://schemas.openxmlformats.org/drawingml/2006/main" lIns="0" tIns="0" rIns="0" bIns="0" anchor="t">
+            <a:normAutofit fontScale="100000"/>
+          </a:bodyPr>
+          <a:lstStyle xmlns:a="http://schemas.openxmlformats.org/drawingml/2006/main"/>
+          <a:p xmlns:a="http://schemas.openxmlformats.org/drawingml/2006/main">
+            <a:pPr algn="l">
+              <a:defRPr sz="2925" b="1">
+                <a:solidFill>
+                  <a:srgbClr val="101828"/>
+                </a:solidFill>
+                <a:latin typeface="Microsoft YaHei"/>
+                <a:ea typeface="Microsoft YaHei"/>
+                <a:cs typeface="Microsoft YaHei"/>
+              </a:defRPr>
+            </a:pPr>
+            <a:r>
+              <a:rPr sz="2925" b="1">
+                <a:solidFill>
+                  <a:srgbClr val="101828"/>
+                </a:solidFill>
+                <a:latin typeface="Microsoft YaHei"/>
+                <a:ea typeface="Microsoft YaHei"/>
+                <a:cs typeface="Microsoft YaHei"/>
+              </a:rPr>
+              <a:t>收束：遇到 set 比较器，按这条链路作答</a:t>
+            </a:r>
+          </a:p>
+        </p:txBody>
+      </p:sp>
+      <p:sp>
+        <p:nvSpPr>
+          <p:cNvPr id="3" name="">
+            <a:extLst xmlns:a="http://schemas.openxmlformats.org/drawingml/2006/main">
+              <a:ext uri="{FF2B5EF4-FFF2-40B4-BE49-F238E27FC236}">
+                <a16:creationId xmlns:a16="http://schemas.microsoft.com/office/drawing/2014/main" id="{08F595D9-D2D9-4028-BDF4-1BF11C1F4B22}"/>
+              </a:ext>
+            </a:extLst>
+          </p:cNvPr>
+          <p:cNvSpPr>
+            <a:spLocks xmlns:a="http://schemas.openxmlformats.org/drawingml/2006/main" noGrp="1"/>
+          </p:cNvSpPr>
+          <p:nvPr/>
+        </p:nvSpPr>
+        <p:spPr>
+          <a:xfrm xmlns:a="http://schemas.openxmlformats.org/drawingml/2006/main">
+            <a:off x="11239500" y="6362700"/>
+            <a:ext cx="457200" cy="190500"/>
+          </a:xfrm>
+          <a:prstGeom xmlns:a="http://schemas.openxmlformats.org/drawingml/2006/main" prst="rect">
+            <a:avLst/>
+          </a:prstGeom>
+          <a:noFill xmlns:a="http://schemas.openxmlformats.org/drawingml/2006/main"/>
+          <a:ln xmlns:a="http://schemas.openxmlformats.org/drawingml/2006/main" w="0">
+            <a:noFill/>
+            <a:prstDash val="solid"/>
+          </a:ln>
+        </p:spPr>
+        <p:txBody>
+          <a:bodyPr xmlns:a="http://schemas.openxmlformats.org/drawingml/2006/main" lIns="0" tIns="0" rIns="0" bIns="0" anchor="t">
+            <a:normAutofit fontScale="100000"/>
+          </a:bodyPr>
+          <a:lstStyle xmlns:a="http://schemas.openxmlformats.org/drawingml/2006/main"/>
+          <a:p xmlns:a="http://schemas.openxmlformats.org/drawingml/2006/main">
+            <a:pPr algn="r">
+              <a:defRPr sz="1050" b="0">
+                <a:solidFill>
+                  <a:srgbClr val="5F6B7A"/>
+                </a:solidFill>
+                <a:latin typeface="Microsoft YaHei"/>
+                <a:ea typeface="Microsoft YaHei"/>
+                <a:cs typeface="Microsoft YaHei"/>
+              </a:defRPr>
+            </a:pPr>
+            <a:r>
+              <a:rPr sz="1050" b="0">
+                <a:solidFill>
+                  <a:srgbClr val="5F6B7A"/>
+                </a:solidFill>
+                <a:latin typeface="Microsoft YaHei"/>
+                <a:ea typeface="Microsoft YaHei"/>
+                <a:cs typeface="Microsoft YaHei"/>
+              </a:rPr>
+              <a:t>11</a:t>
+            </a:r>
+          </a:p>
+        </p:txBody>
+      </p:sp>
+      <p:sp>
+        <p:nvSpPr>
+          <p:cNvPr id="4" name="">
+            <a:extLst xmlns:a="http://schemas.openxmlformats.org/drawingml/2006/main">
+              <a:ext uri="{FF2B5EF4-FFF2-40B4-BE49-F238E27FC236}">
+                <a16:creationId xmlns:a16="http://schemas.microsoft.com/office/drawing/2014/main" id="{6BCD31E6-46CE-4390-88A9-765965A9D124}"/>
+              </a:ext>
+            </a:extLst>
+          </p:cNvPr>
+          <p:cNvSpPr>
+            <a:spLocks xmlns:a="http://schemas.openxmlformats.org/drawingml/2006/main" noGrp="1"/>
+          </p:cNvSpPr>
+          <p:nvPr/>
+        </p:nvSpPr>
+        <p:spPr>
+          <a:xfrm xmlns:a="http://schemas.openxmlformats.org/drawingml/2006/main">
+            <a:off x="685800" y="2133600"/>
+            <a:ext cx="2266950" cy="2209800"/>
+          </a:xfrm>
+          <a:prstGeom xmlns:a="http://schemas.openxmlformats.org/drawingml/2006/main" prst="roundRect">
+            <a:avLst>
+              <a:gd name="adj" fmla="val 5172"/>
+            </a:avLst>
+          </a:prstGeom>
+          <a:solidFill xmlns:a="http://schemas.openxmlformats.org/drawingml/2006/main">
+            <a:srgbClr val="FFFFFF"/>
+          </a:solidFill>
+          <a:ln xmlns:a="http://schemas.openxmlformats.org/drawingml/2006/main" w="9525">
+            <a:solidFill>
+              <a:srgbClr val="D8DEE8"/>
+            </a:solidFill>
+            <a:prstDash val="solid"/>
+          </a:ln>
+        </p:spPr>
+      </p:sp>
+      <p:sp>
+        <p:nvSpPr>
+          <p:cNvPr id="5" name="">
+            <a:extLst xmlns:a="http://schemas.openxmlformats.org/drawingml/2006/main">
+              <a:ext uri="{FF2B5EF4-FFF2-40B4-BE49-F238E27FC236}">
+                <a16:creationId xmlns:a16="http://schemas.microsoft.com/office/drawing/2014/main" id="{A7A86C8B-B472-4324-B66D-792E493BCA55}"/>
+              </a:ext>
+            </a:extLst>
+          </p:cNvPr>
+          <p:cNvSpPr>
+            <a:spLocks xmlns:a="http://schemas.openxmlformats.org/drawingml/2006/main" noGrp="1"/>
+          </p:cNvSpPr>
+          <p:nvPr/>
+        </p:nvSpPr>
+        <p:spPr>
+          <a:xfrm xmlns:a="http://schemas.openxmlformats.org/drawingml/2006/main">
+            <a:off x="895350" y="2343150"/>
+            <a:ext cx="381000" cy="333375"/>
+          </a:xfrm>
+          <a:prstGeom xmlns:a="http://schemas.openxmlformats.org/drawingml/2006/main" prst="rect">
+            <a:avLst/>
+          </a:prstGeom>
+          <a:noFill xmlns:a="http://schemas.openxmlformats.org/drawingml/2006/main"/>
+          <a:ln xmlns:a="http://schemas.openxmlformats.org/drawingml/2006/main" w="0">
+            <a:noFill/>
+            <a:prstDash val="solid"/>
+          </a:ln>
+        </p:spPr>
+        <p:txBody>
+          <a:bodyPr xmlns:a="http://schemas.openxmlformats.org/drawingml/2006/main" lIns="0" tIns="0" rIns="0" bIns="0" anchor="t">
+            <a:normAutofit fontScale="100000"/>
+          </a:bodyPr>
+          <a:lstStyle xmlns:a="http://schemas.openxmlformats.org/drawingml/2006/main"/>
+          <a:p xmlns:a="http://schemas.openxmlformats.org/drawingml/2006/main">
+            <a:pPr algn="l">
+              <a:defRPr sz="1875" b="1">
+                <a:solidFill>
+                  <a:srgbClr val="2563EB"/>
+                </a:solidFill>
+                <a:latin typeface="Microsoft YaHei"/>
+                <a:ea typeface="Microsoft YaHei"/>
+                <a:cs typeface="Microsoft YaHei"/>
+              </a:defRPr>
+            </a:pPr>
+            <a:r>
+              <a:rPr sz="1875" b="1">
+                <a:solidFill>
+                  <a:srgbClr val="2563EB"/>
+                </a:solidFill>
+                <a:latin typeface="Microsoft YaHei"/>
+                <a:ea typeface="Microsoft YaHei"/>
+                <a:cs typeface="Microsoft YaHei"/>
+              </a:rPr>
+              <a:t>1</a:t>
+            </a:r>
+          </a:p>
+        </p:txBody>
+      </p:sp>
+      <p:sp>
+        <p:nvSpPr>
+          <p:cNvPr id="6" name="">
+            <a:extLst xmlns:a="http://schemas.openxmlformats.org/drawingml/2006/main">
+              <a:ext uri="{FF2B5EF4-FFF2-40B4-BE49-F238E27FC236}">
+                <a16:creationId xmlns:a16="http://schemas.microsoft.com/office/drawing/2014/main" id="{B0271F60-9EF6-4879-9382-2E94F8403769}"/>
+              </a:ext>
+            </a:extLst>
+          </p:cNvPr>
+          <p:cNvSpPr>
+            <a:spLocks xmlns:a="http://schemas.openxmlformats.org/drawingml/2006/main" noGrp="1"/>
+          </p:cNvSpPr>
+          <p:nvPr/>
+        </p:nvSpPr>
+        <p:spPr>
+          <a:xfrm xmlns:a="http://schemas.openxmlformats.org/drawingml/2006/main">
+            <a:off x="895350" y="2800350"/>
+            <a:ext cx="1809750" cy="381000"/>
+          </a:xfrm>
+          <a:prstGeom xmlns:a="http://schemas.openxmlformats.org/drawingml/2006/main" prst="rect">
+            <a:avLst/>
+          </a:prstGeom>
+          <a:noFill xmlns:a="http://schemas.openxmlformats.org/drawingml/2006/main"/>
+          <a:ln xmlns:a="http://schemas.openxmlformats.org/drawingml/2006/main" w="0">
+            <a:noFill/>
+            <a:prstDash val="solid"/>
+          </a:ln>
+        </p:spPr>
+        <p:txBody>
+          <a:bodyPr xmlns:a="http://schemas.openxmlformats.org/drawingml/2006/main" lIns="0" tIns="0" rIns="0" bIns="0" anchor="t">
+            <a:normAutofit fontScale="100000"/>
+          </a:bodyPr>
+          <a:lstStyle xmlns:a="http://schemas.openxmlformats.org/drawingml/2006/main"/>
+          <a:p xmlns:a="http://schemas.openxmlformats.org/drawingml/2006/main">
+            <a:pPr algn="l">
+              <a:defRPr sz="2175" b="1">
+                <a:solidFill>
+                  <a:srgbClr val="101828"/>
+                </a:solidFill>
+                <a:latin typeface="Microsoft YaHei"/>
+                <a:ea typeface="Microsoft YaHei"/>
+                <a:cs typeface="Microsoft YaHei"/>
+              </a:defRPr>
+            </a:pPr>
+            <a:r>
+              <a:rPr sz="2175" b="1">
+                <a:solidFill>
+                  <a:srgbClr val="101828"/>
+                </a:solidFill>
+                <a:latin typeface="Microsoft YaHei"/>
+                <a:ea typeface="Microsoft YaHei"/>
+                <a:cs typeface="Microsoft YaHei"/>
+              </a:rPr>
+              <a:t>看声明</a:t>
+            </a:r>
+          </a:p>
+        </p:txBody>
+      </p:sp>
+      <p:sp>
+        <p:nvSpPr>
+          <p:cNvPr id="7" name="">
+            <a:extLst xmlns:a="http://schemas.openxmlformats.org/drawingml/2006/main">
+              <a:ext uri="{FF2B5EF4-FFF2-40B4-BE49-F238E27FC236}">
+                <a16:creationId xmlns:a16="http://schemas.microsoft.com/office/drawing/2014/main" id="{17467B79-E1CD-4CDF-BD59-1FCC3248BD80}"/>
+              </a:ext>
+            </a:extLst>
+          </p:cNvPr>
+          <p:cNvSpPr>
+            <a:spLocks xmlns:a="http://schemas.openxmlformats.org/drawingml/2006/main" noGrp="1"/>
+          </p:cNvSpPr>
+          <p:nvPr/>
+        </p:nvSpPr>
+        <p:spPr>
+          <a:xfrm xmlns:a="http://schemas.openxmlformats.org/drawingml/2006/main">
+            <a:off x="895350" y="3381375"/>
+            <a:ext cx="1847850" cy="666750"/>
+          </a:xfrm>
+          <a:prstGeom xmlns:a="http://schemas.openxmlformats.org/drawingml/2006/main" prst="rect">
+            <a:avLst/>
+          </a:prstGeom>
+          <a:noFill xmlns:a="http://schemas.openxmlformats.org/drawingml/2006/main"/>
+          <a:ln xmlns:a="http://schemas.openxmlformats.org/drawingml/2006/main" w="0">
+            <a:noFill/>
+            <a:prstDash val="solid"/>
+          </a:ln>
+        </p:spPr>
+        <p:txBody>
+          <a:bodyPr xmlns:a="http://schemas.openxmlformats.org/drawingml/2006/main" lIns="0" tIns="0" rIns="0" bIns="0" anchor="t">
+            <a:normAutofit fontScale="100000"/>
+          </a:bodyPr>
+          <a:lstStyle xmlns:a="http://schemas.openxmlformats.org/drawingml/2006/main"/>
+          <a:p xmlns:a="http://schemas.openxmlformats.org/drawingml/2006/main">
+            <a:pPr algn="l">
+              <a:defRPr sz="1575" b="0">
+                <a:solidFill>
+                  <a:srgbClr val="5F6B7A"/>
+                </a:solidFill>
+                <a:latin typeface="Microsoft YaHei"/>
+                <a:ea typeface="Microsoft YaHei"/>
+                <a:cs typeface="Microsoft YaHei"/>
+              </a:defRPr>
+            </a:pPr>
+            <a:r>
+              <a:rPr sz="1575" b="0">
+                <a:solidFill>
+                  <a:srgbClr val="5F6B7A"/>
+                </a:solidFill>
+                <a:latin typeface="Microsoft YaHei"/>
+                <a:ea typeface="Microsoft YaHei"/>
+                <a:cs typeface="Microsoft YaHei"/>
+              </a:rPr>
+              <a:t>T 存什么？</a:t>
+            </a:r>
+          </a:p>
+          <a:p xmlns:a="http://schemas.openxmlformats.org/drawingml/2006/main">
+            <a:pPr algn="l">
+              <a:defRPr sz="1575" b="0">
+                <a:solidFill>
+                  <a:srgbClr val="5F6B7A"/>
+                </a:solidFill>
+                <a:latin typeface="Microsoft YaHei"/>
+                <a:ea typeface="Microsoft YaHei"/>
+                <a:cs typeface="Microsoft YaHei"/>
+              </a:defRPr>
+            </a:pPr>
+            <a:r>
+              <a:rPr sz="1575" b="0">
+                <a:solidFill>
+                  <a:srgbClr val="5F6B7A"/>
+                </a:solidFill>
+                <a:latin typeface="Microsoft YaHei"/>
+                <a:ea typeface="Microsoft YaHei"/>
+                <a:cs typeface="Microsoft YaHei"/>
+              </a:rPr>
+              <a:t>Compare 是谁？</a:t>
+            </a:r>
+          </a:p>
+        </p:txBody>
+      </p:sp>
+      <p:sp>
+        <p:nvSpPr>
+          <p:cNvPr id="8" name="">
+            <a:extLst xmlns:a="http://schemas.openxmlformats.org/drawingml/2006/main">
+              <a:ext uri="{FF2B5EF4-FFF2-40B4-BE49-F238E27FC236}">
+                <a16:creationId xmlns:a16="http://schemas.microsoft.com/office/drawing/2014/main" id="{476E4310-FA73-4EDE-81D7-2D3DDEB6DF4A}"/>
+              </a:ext>
+            </a:extLst>
+          </p:cNvPr>
+          <p:cNvSpPr>
+            <a:spLocks xmlns:a="http://schemas.openxmlformats.org/drawingml/2006/main" noGrp="1"/>
+          </p:cNvSpPr>
+          <p:nvPr/>
+        </p:nvSpPr>
+        <p:spPr>
+          <a:xfrm xmlns:a="http://schemas.openxmlformats.org/drawingml/2006/main">
+            <a:off x="3057525" y="2952750"/>
+            <a:ext cx="342900" cy="342900"/>
+          </a:xfrm>
+          <a:prstGeom xmlns:a="http://schemas.openxmlformats.org/drawingml/2006/main" prst="rect">
+            <a:avLst/>
+          </a:prstGeom>
+          <a:noFill xmlns:a="http://schemas.openxmlformats.org/drawingml/2006/main"/>
+          <a:ln xmlns:a="http://schemas.openxmlformats.org/drawingml/2006/main" w="0">
+            <a:noFill/>
+            <a:prstDash val="solid"/>
+          </a:ln>
+        </p:spPr>
+        <p:txBody>
+          <a:bodyPr xmlns:a="http://schemas.openxmlformats.org/drawingml/2006/main" lIns="0" tIns="0" rIns="0" bIns="0" anchor="t">
+            <a:normAutofit fontScale="100000"/>
+          </a:bodyPr>
+          <a:lstStyle xmlns:a="http://schemas.openxmlformats.org/drawingml/2006/main"/>
+          <a:p xmlns:a="http://schemas.openxmlformats.org/drawingml/2006/main">
+            <a:pPr algn="ctr">
+              <a:defRPr sz="2100" b="1">
+                <a:solidFill>
+                  <a:srgbClr val="2563EB"/>
+                </a:solidFill>
+                <a:latin typeface="Microsoft YaHei"/>
+                <a:ea typeface="Microsoft YaHei"/>
+                <a:cs typeface="Microsoft YaHei"/>
+              </a:defRPr>
+            </a:pPr>
+            <a:r>
+              <a:rPr sz="2100" b="1">
+                <a:solidFill>
+                  <a:srgbClr val="2563EB"/>
+                </a:solidFill>
+                <a:latin typeface="Microsoft YaHei"/>
+                <a:ea typeface="Microsoft YaHei"/>
+                <a:cs typeface="Microsoft YaHei"/>
+              </a:rPr>
+              <a:t>→</a:t>
+            </a:r>
+          </a:p>
+        </p:txBody>
+      </p:sp>
+      <p:sp>
+        <p:nvSpPr>
+          <p:cNvPr id="9" name="">
+            <a:extLst xmlns:a="http://schemas.openxmlformats.org/drawingml/2006/main">
+              <a:ext uri="{FF2B5EF4-FFF2-40B4-BE49-F238E27FC236}">
+                <a16:creationId xmlns:a16="http://schemas.microsoft.com/office/drawing/2014/main" id="{2B895D47-EC79-4DB5-B704-AE0BFE3F5554}"/>
+              </a:ext>
+            </a:extLst>
+          </p:cNvPr>
+          <p:cNvSpPr>
+            <a:spLocks xmlns:a="http://schemas.openxmlformats.org/drawingml/2006/main" noGrp="1"/>
+          </p:cNvSpPr>
+          <p:nvPr/>
+        </p:nvSpPr>
+        <p:spPr>
+          <a:xfrm xmlns:a="http://schemas.openxmlformats.org/drawingml/2006/main">
+            <a:off x="3505200" y="2133600"/>
+            <a:ext cx="2266950" cy="2209800"/>
+          </a:xfrm>
+          <a:prstGeom xmlns:a="http://schemas.openxmlformats.org/drawingml/2006/main" prst="roundRect">
+            <a:avLst>
+              <a:gd name="adj" fmla="val 5172"/>
+            </a:avLst>
+          </a:prstGeom>
+          <a:solidFill xmlns:a="http://schemas.openxmlformats.org/drawingml/2006/main">
+            <a:srgbClr val="FFFFFF"/>
+          </a:solidFill>
+          <a:ln xmlns:a="http://schemas.openxmlformats.org/drawingml/2006/main" w="9525">
+            <a:solidFill>
+              <a:srgbClr val="D8DEE8"/>
+            </a:solidFill>
+            <a:prstDash val="solid"/>
+          </a:ln>
+        </p:spPr>
+      </p:sp>
+      <p:sp>
+        <p:nvSpPr>
+          <p:cNvPr id="10" name="">
+            <a:extLst xmlns:a="http://schemas.openxmlformats.org/drawingml/2006/main">
+              <a:ext uri="{FF2B5EF4-FFF2-40B4-BE49-F238E27FC236}">
+                <a16:creationId xmlns:a16="http://schemas.microsoft.com/office/drawing/2014/main" id="{4594771D-6EF9-4B48-9F81-8118557A925B}"/>
+              </a:ext>
+            </a:extLst>
+          </p:cNvPr>
+          <p:cNvSpPr>
+            <a:spLocks xmlns:a="http://schemas.openxmlformats.org/drawingml/2006/main" noGrp="1"/>
+          </p:cNvSpPr>
+          <p:nvPr/>
+        </p:nvSpPr>
+        <p:spPr>
+          <a:xfrm xmlns:a="http://schemas.openxmlformats.org/drawingml/2006/main">
+            <a:off x="3714750" y="2343150"/>
+            <a:ext cx="381000" cy="333375"/>
+          </a:xfrm>
+          <a:prstGeom xmlns:a="http://schemas.openxmlformats.org/drawingml/2006/main" prst="rect">
+            <a:avLst/>
+          </a:prstGeom>
+          <a:noFill xmlns:a="http://schemas.openxmlformats.org/drawingml/2006/main"/>
+          <a:ln xmlns:a="http://schemas.openxmlformats.org/drawingml/2006/main" w="0">
+            <a:noFill/>
+            <a:prstDash val="solid"/>
+          </a:ln>
+        </p:spPr>
+        <p:txBody>
+          <a:bodyPr xmlns:a="http://schemas.openxmlformats.org/drawingml/2006/main" lIns="0" tIns="0" rIns="0" bIns="0" anchor="t">
+            <a:normAutofit fontScale="100000"/>
+          </a:bodyPr>
+          <a:lstStyle xmlns:a="http://schemas.openxmlformats.org/drawingml/2006/main"/>
+          <a:p xmlns:a="http://schemas.openxmlformats.org/drawingml/2006/main">
+            <a:pPr algn="l">
+              <a:defRPr sz="1875" b="1">
+                <a:solidFill>
+                  <a:srgbClr val="2563EB"/>
+                </a:solidFill>
+                <a:latin typeface="Microsoft YaHei"/>
+                <a:ea typeface="Microsoft YaHei"/>
+                <a:cs typeface="Microsoft YaHei"/>
+              </a:defRPr>
+            </a:pPr>
+            <a:r>
+              <a:rPr sz="1875" b="1">
+                <a:solidFill>
+                  <a:srgbClr val="2563EB"/>
+                </a:solidFill>
+                <a:latin typeface="Microsoft YaHei"/>
+                <a:ea typeface="Microsoft YaHei"/>
+                <a:cs typeface="Microsoft YaHei"/>
+              </a:rPr>
+              <a:t>2</a:t>
+            </a:r>
+          </a:p>
+        </p:txBody>
+      </p:sp>
+      <p:sp>
+        <p:nvSpPr>
+          <p:cNvPr id="11" name="">
+            <a:extLst xmlns:a="http://schemas.openxmlformats.org/drawingml/2006/main">
+              <a:ext uri="{FF2B5EF4-FFF2-40B4-BE49-F238E27FC236}">
+                <a16:creationId xmlns:a16="http://schemas.microsoft.com/office/drawing/2014/main" id="{829A24F4-8F72-4EB9-A5E0-7E58775F7EC8}"/>
+              </a:ext>
+            </a:extLst>
+          </p:cNvPr>
+          <p:cNvSpPr>
+            <a:spLocks xmlns:a="http://schemas.openxmlformats.org/drawingml/2006/main" noGrp="1"/>
+          </p:cNvSpPr>
+          <p:nvPr/>
+        </p:nvSpPr>
+        <p:spPr>
+          <a:xfrm xmlns:a="http://schemas.openxmlformats.org/drawingml/2006/main">
+            <a:off x="3714750" y="2800350"/>
+            <a:ext cx="1809750" cy="381000"/>
+          </a:xfrm>
+          <a:prstGeom xmlns:a="http://schemas.openxmlformats.org/drawingml/2006/main" prst="rect">
+            <a:avLst/>
+          </a:prstGeom>
+          <a:noFill xmlns:a="http://schemas.openxmlformats.org/drawingml/2006/main"/>
+          <a:ln xmlns:a="http://schemas.openxmlformats.org/drawingml/2006/main" w="0">
+            <a:noFill/>
+            <a:prstDash val="solid"/>
+          </a:ln>
+        </p:spPr>
+        <p:txBody>
+          <a:bodyPr xmlns:a="http://schemas.openxmlformats.org/drawingml/2006/main" lIns="0" tIns="0" rIns="0" bIns="0" anchor="t">
+            <a:normAutofit fontScale="100000"/>
+          </a:bodyPr>
+          <a:lstStyle xmlns:a="http://schemas.openxmlformats.org/drawingml/2006/main"/>
+          <a:p xmlns:a="http://schemas.openxmlformats.org/drawingml/2006/main">
+            <a:pPr algn="l">
+              <a:defRPr sz="2175" b="1">
+                <a:solidFill>
+                  <a:srgbClr val="101828"/>
+                </a:solidFill>
+                <a:latin typeface="Microsoft YaHei"/>
+                <a:ea typeface="Microsoft YaHei"/>
+                <a:cs typeface="Microsoft YaHei"/>
+              </a:defRPr>
+            </a:pPr>
+            <a:r>
+              <a:rPr sz="2175" b="1">
+                <a:solidFill>
+                  <a:srgbClr val="101828"/>
+                </a:solidFill>
+                <a:latin typeface="Microsoft YaHei"/>
+                <a:ea typeface="Microsoft YaHei"/>
+                <a:cs typeface="Microsoft YaHei"/>
+              </a:rPr>
+              <a:t>读语义</a:t>
+            </a:r>
+          </a:p>
+        </p:txBody>
+      </p:sp>
+      <p:sp>
+        <p:nvSpPr>
+          <p:cNvPr id="12" name="">
+            <a:extLst xmlns:a="http://schemas.openxmlformats.org/drawingml/2006/main">
+              <a:ext uri="{FF2B5EF4-FFF2-40B4-BE49-F238E27FC236}">
+                <a16:creationId xmlns:a16="http://schemas.microsoft.com/office/drawing/2014/main" id="{419958CF-4AD6-4110-B435-72D7FC76BE2C}"/>
+              </a:ext>
+            </a:extLst>
+          </p:cNvPr>
+          <p:cNvSpPr>
+            <a:spLocks xmlns:a="http://schemas.openxmlformats.org/drawingml/2006/main" noGrp="1"/>
+          </p:cNvSpPr>
+          <p:nvPr/>
+        </p:nvSpPr>
+        <p:spPr>
+          <a:xfrm xmlns:a="http://schemas.openxmlformats.org/drawingml/2006/main">
+            <a:off x="3714750" y="3381375"/>
+            <a:ext cx="1847850" cy="666750"/>
+          </a:xfrm>
+          <a:prstGeom xmlns:a="http://schemas.openxmlformats.org/drawingml/2006/main" prst="rect">
+            <a:avLst/>
+          </a:prstGeom>
+          <a:noFill xmlns:a="http://schemas.openxmlformats.org/drawingml/2006/main"/>
+          <a:ln xmlns:a="http://schemas.openxmlformats.org/drawingml/2006/main" w="0">
+            <a:noFill/>
+            <a:prstDash val="solid"/>
+          </a:ln>
+        </p:spPr>
+        <p:txBody>
+          <a:bodyPr xmlns:a="http://schemas.openxmlformats.org/drawingml/2006/main" lIns="0" tIns="0" rIns="0" bIns="0" anchor="t">
+            <a:normAutofit fontScale="100000"/>
+          </a:bodyPr>
+          <a:lstStyle xmlns:a="http://schemas.openxmlformats.org/drawingml/2006/main"/>
+          <a:p xmlns:a="http://schemas.openxmlformats.org/drawingml/2006/main">
+            <a:pPr algn="l">
+              <a:defRPr sz="1575" b="0">
+                <a:solidFill>
+                  <a:srgbClr val="5F6B7A"/>
+                </a:solidFill>
+                <a:latin typeface="Microsoft YaHei"/>
+                <a:ea typeface="Microsoft YaHei"/>
+                <a:cs typeface="Microsoft YaHei"/>
+              </a:defRPr>
+            </a:pPr>
+            <a:r>
+              <a:rPr sz="1575" b="0">
+                <a:solidFill>
+                  <a:srgbClr val="5F6B7A"/>
+                </a:solidFill>
+                <a:latin typeface="Microsoft YaHei"/>
+                <a:ea typeface="Microsoft YaHei"/>
+                <a:cs typeface="Microsoft YaHei"/>
+              </a:rPr>
+              <a:t>true 是否表示</a:t>
+            </a:r>
+          </a:p>
+          <a:p xmlns:a="http://schemas.openxmlformats.org/drawingml/2006/main">
+            <a:pPr algn="l">
+              <a:defRPr sz="1575" b="0">
+                <a:solidFill>
+                  <a:srgbClr val="5F6B7A"/>
+                </a:solidFill>
+                <a:latin typeface="Microsoft YaHei"/>
+                <a:ea typeface="Microsoft YaHei"/>
+                <a:cs typeface="Microsoft YaHei"/>
+              </a:defRPr>
+            </a:pPr>
+            <a:r>
+              <a:rPr sz="1575" b="0">
+                <a:solidFill>
+                  <a:srgbClr val="5F6B7A"/>
+                </a:solidFill>
+                <a:latin typeface="Microsoft YaHei"/>
+                <a:ea typeface="Microsoft YaHei"/>
+                <a:cs typeface="Microsoft YaHei"/>
+              </a:rPr>
+              <a:t>严格排在前？</a:t>
+            </a:r>
+          </a:p>
+        </p:txBody>
+      </p:sp>
+      <p:sp>
+        <p:nvSpPr>
+          <p:cNvPr id="13" name="">
+            <a:extLst xmlns:a="http://schemas.openxmlformats.org/drawingml/2006/main">
+              <a:ext uri="{FF2B5EF4-FFF2-40B4-BE49-F238E27FC236}">
+                <a16:creationId xmlns:a16="http://schemas.microsoft.com/office/drawing/2014/main" id="{E826E5AC-A5D4-404F-9C96-AFA0A993F669}"/>
+              </a:ext>
+            </a:extLst>
+          </p:cNvPr>
+          <p:cNvSpPr>
+            <a:spLocks xmlns:a="http://schemas.openxmlformats.org/drawingml/2006/main" noGrp="1"/>
+          </p:cNvSpPr>
+          <p:nvPr/>
+        </p:nvSpPr>
+        <p:spPr>
+          <a:xfrm xmlns:a="http://schemas.openxmlformats.org/drawingml/2006/main">
+            <a:off x="5876925" y="2952750"/>
+            <a:ext cx="342900" cy="342900"/>
+          </a:xfrm>
+          <a:prstGeom xmlns:a="http://schemas.openxmlformats.org/drawingml/2006/main" prst="rect">
+            <a:avLst/>
+          </a:prstGeom>
+          <a:noFill xmlns:a="http://schemas.openxmlformats.org/drawingml/2006/main"/>
+          <a:ln xmlns:a="http://schemas.openxmlformats.org/drawingml/2006/main" w="0">
+            <a:noFill/>
+            <a:prstDash val="solid"/>
+          </a:ln>
+        </p:spPr>
+        <p:txBody>
+          <a:bodyPr xmlns:a="http://schemas.openxmlformats.org/drawingml/2006/main" lIns="0" tIns="0" rIns="0" bIns="0" anchor="t">
+            <a:normAutofit fontScale="100000"/>
+          </a:bodyPr>
+          <a:lstStyle xmlns:a="http://schemas.openxmlformats.org/drawingml/2006/main"/>
+          <a:p xmlns:a="http://schemas.openxmlformats.org/drawingml/2006/main">
+            <a:pPr algn="ctr">
+              <a:defRPr sz="2100" b="1">
+                <a:solidFill>
+                  <a:srgbClr val="2563EB"/>
+                </a:solidFill>
+                <a:latin typeface="Microsoft YaHei"/>
+                <a:ea typeface="Microsoft YaHei"/>
+                <a:cs typeface="Microsoft YaHei"/>
+              </a:defRPr>
+            </a:pPr>
+            <a:r>
+              <a:rPr sz="2100" b="1">
+                <a:solidFill>
+                  <a:srgbClr val="2563EB"/>
+                </a:solidFill>
+                <a:latin typeface="Microsoft YaHei"/>
+                <a:ea typeface="Microsoft YaHei"/>
+                <a:cs typeface="Microsoft YaHei"/>
+              </a:rPr>
+              <a:t>→</a:t>
+            </a:r>
+          </a:p>
+        </p:txBody>
+      </p:sp>
+      <p:sp>
+        <p:nvSpPr>
+          <p:cNvPr id="14" name="">
+            <a:extLst xmlns:a="http://schemas.openxmlformats.org/drawingml/2006/main">
+              <a:ext uri="{FF2B5EF4-FFF2-40B4-BE49-F238E27FC236}">
+                <a16:creationId xmlns:a16="http://schemas.microsoft.com/office/drawing/2014/main" id="{7BB10176-5FA6-4FBC-8493-1ACC38D018BB}"/>
+              </a:ext>
+            </a:extLst>
+          </p:cNvPr>
+          <p:cNvSpPr>
+            <a:spLocks xmlns:a="http://schemas.openxmlformats.org/drawingml/2006/main" noGrp="1"/>
+          </p:cNvSpPr>
+          <p:nvPr/>
+        </p:nvSpPr>
+        <p:spPr>
+          <a:xfrm xmlns:a="http://schemas.openxmlformats.org/drawingml/2006/main">
+            <a:off x="6324600" y="2133600"/>
+            <a:ext cx="2266950" cy="2209800"/>
+          </a:xfrm>
+          <a:prstGeom xmlns:a="http://schemas.openxmlformats.org/drawingml/2006/main" prst="roundRect">
+            <a:avLst>
+              <a:gd name="adj" fmla="val 5172"/>
+            </a:avLst>
+          </a:prstGeom>
+          <a:solidFill xmlns:a="http://schemas.openxmlformats.org/drawingml/2006/main">
+            <a:srgbClr val="EAF1FF"/>
+          </a:solidFill>
+          <a:ln xmlns:a="http://schemas.openxmlformats.org/drawingml/2006/main" w="9525">
+            <a:solidFill>
+              <a:srgbClr val="8FB3FF"/>
+            </a:solidFill>
+            <a:prstDash val="solid"/>
+          </a:ln>
+        </p:spPr>
+      </p:sp>
+      <p:sp>
+        <p:nvSpPr>
+          <p:cNvPr id="15" name="">
+            <a:extLst xmlns:a="http://schemas.openxmlformats.org/drawingml/2006/main">
+              <a:ext uri="{FF2B5EF4-FFF2-40B4-BE49-F238E27FC236}">
+                <a16:creationId xmlns:a16="http://schemas.microsoft.com/office/drawing/2014/main" id="{E1FE24F4-972B-44FA-890B-8966266E3585}"/>
+              </a:ext>
+            </a:extLst>
+          </p:cNvPr>
+          <p:cNvSpPr>
+            <a:spLocks xmlns:a="http://schemas.openxmlformats.org/drawingml/2006/main" noGrp="1"/>
+          </p:cNvSpPr>
+          <p:nvPr/>
+        </p:nvSpPr>
+        <p:spPr>
+          <a:xfrm xmlns:a="http://schemas.openxmlformats.org/drawingml/2006/main">
+            <a:off x="6534150" y="2343150"/>
+            <a:ext cx="381000" cy="333375"/>
+          </a:xfrm>
+          <a:prstGeom xmlns:a="http://schemas.openxmlformats.org/drawingml/2006/main" prst="rect">
+            <a:avLst/>
+          </a:prstGeom>
+          <a:noFill xmlns:a="http://schemas.openxmlformats.org/drawingml/2006/main"/>
+          <a:ln xmlns:a="http://schemas.openxmlformats.org/drawingml/2006/main" w="0">
+            <a:noFill/>
+            <a:prstDash val="solid"/>
+          </a:ln>
+        </p:spPr>
+        <p:txBody>
+          <a:bodyPr xmlns:a="http://schemas.openxmlformats.org/drawingml/2006/main" lIns="0" tIns="0" rIns="0" bIns="0" anchor="t">
+            <a:normAutofit fontScale="100000"/>
+          </a:bodyPr>
+          <a:lstStyle xmlns:a="http://schemas.openxmlformats.org/drawingml/2006/main"/>
+          <a:p xmlns:a="http://schemas.openxmlformats.org/drawingml/2006/main">
+            <a:pPr algn="l">
+              <a:defRPr sz="1875" b="1">
+                <a:solidFill>
+                  <a:srgbClr val="2563EB"/>
+                </a:solidFill>
+                <a:latin typeface="Microsoft YaHei"/>
+                <a:ea typeface="Microsoft YaHei"/>
+                <a:cs typeface="Microsoft YaHei"/>
+              </a:defRPr>
+            </a:pPr>
+            <a:r>
+              <a:rPr sz="1875" b="1">
+                <a:solidFill>
+                  <a:srgbClr val="2563EB"/>
+                </a:solidFill>
+                <a:latin typeface="Microsoft YaHei"/>
+                <a:ea typeface="Microsoft YaHei"/>
+                <a:cs typeface="Microsoft YaHei"/>
+              </a:rPr>
+              <a:t>3</a:t>
+            </a:r>
+          </a:p>
+        </p:txBody>
+      </p:sp>
+      <p:sp>
+        <p:nvSpPr>
+          <p:cNvPr id="16" name="">
+            <a:extLst xmlns:a="http://schemas.openxmlformats.org/drawingml/2006/main">
+              <a:ext uri="{FF2B5EF4-FFF2-40B4-BE49-F238E27FC236}">
+                <a16:creationId xmlns:a16="http://schemas.microsoft.com/office/drawing/2014/main" id="{3939A9BC-AC5F-497C-AB84-523E1848F114}"/>
+              </a:ext>
+            </a:extLst>
+          </p:cNvPr>
+          <p:cNvSpPr>
+            <a:spLocks xmlns:a="http://schemas.openxmlformats.org/drawingml/2006/main" noGrp="1"/>
+          </p:cNvSpPr>
+          <p:nvPr/>
+        </p:nvSpPr>
+        <p:spPr>
+          <a:xfrm xmlns:a="http://schemas.openxmlformats.org/drawingml/2006/main">
+            <a:off x="6534150" y="2800350"/>
+            <a:ext cx="1809750" cy="381000"/>
+          </a:xfrm>
+          <a:prstGeom xmlns:a="http://schemas.openxmlformats.org/drawingml/2006/main" prst="rect">
+            <a:avLst/>
+          </a:prstGeom>
+          <a:noFill xmlns:a="http://schemas.openxmlformats.org/drawingml/2006/main"/>
+          <a:ln xmlns:a="http://schemas.openxmlformats.org/drawingml/2006/main" w="0">
+            <a:noFill/>
+            <a:prstDash val="solid"/>
+          </a:ln>
+        </p:spPr>
+        <p:txBody>
+          <a:bodyPr xmlns:a="http://schemas.openxmlformats.org/drawingml/2006/main" lIns="0" tIns="0" rIns="0" bIns="0" anchor="t">
+            <a:normAutofit fontScale="100000"/>
+          </a:bodyPr>
+          <a:lstStyle xmlns:a="http://schemas.openxmlformats.org/drawingml/2006/main"/>
+          <a:p xmlns:a="http://schemas.openxmlformats.org/drawingml/2006/main">
+            <a:pPr algn="l">
+              <a:defRPr sz="2175" b="1">
+                <a:solidFill>
+                  <a:srgbClr val="101828"/>
+                </a:solidFill>
+                <a:latin typeface="Microsoft YaHei"/>
+                <a:ea typeface="Microsoft YaHei"/>
+                <a:cs typeface="Microsoft YaHei"/>
+              </a:defRPr>
+            </a:pPr>
+            <a:r>
+              <a:rPr sz="2175" b="1">
+                <a:solidFill>
+                  <a:srgbClr val="101828"/>
+                </a:solidFill>
+                <a:latin typeface="Microsoft YaHei"/>
+                <a:ea typeface="Microsoft YaHei"/>
+                <a:cs typeface="Microsoft YaHei"/>
+              </a:rPr>
+              <a:t>验性质</a:t>
+            </a:r>
+          </a:p>
+        </p:txBody>
+      </p:sp>
+      <p:sp>
+        <p:nvSpPr>
+          <p:cNvPr id="17" name="">
+            <a:extLst xmlns:a="http://schemas.openxmlformats.org/drawingml/2006/main">
+              <a:ext uri="{FF2B5EF4-FFF2-40B4-BE49-F238E27FC236}">
+                <a16:creationId xmlns:a16="http://schemas.microsoft.com/office/drawing/2014/main" id="{A95FA615-3FB7-4891-B79C-7B9070B66AA4}"/>
+              </a:ext>
+            </a:extLst>
+          </p:cNvPr>
+          <p:cNvSpPr>
+            <a:spLocks xmlns:a="http://schemas.openxmlformats.org/drawingml/2006/main" noGrp="1"/>
+          </p:cNvSpPr>
+          <p:nvPr/>
+        </p:nvSpPr>
+        <p:spPr>
+          <a:xfrm xmlns:a="http://schemas.openxmlformats.org/drawingml/2006/main">
+            <a:off x="6534150" y="3381375"/>
+            <a:ext cx="1847850" cy="666750"/>
+          </a:xfrm>
+          <a:prstGeom xmlns:a="http://schemas.openxmlformats.org/drawingml/2006/main" prst="rect">
+            <a:avLst/>
+          </a:prstGeom>
+          <a:noFill xmlns:a="http://schemas.openxmlformats.org/drawingml/2006/main"/>
+          <a:ln xmlns:a="http://schemas.openxmlformats.org/drawingml/2006/main" w="0">
+            <a:noFill/>
+            <a:prstDash val="solid"/>
+          </a:ln>
+        </p:spPr>
+        <p:txBody>
+          <a:bodyPr xmlns:a="http://schemas.openxmlformats.org/drawingml/2006/main" lIns="0" tIns="0" rIns="0" bIns="0" anchor="t">
+            <a:normAutofit fontScale="100000"/>
+          </a:bodyPr>
+          <a:lstStyle xmlns:a="http://schemas.openxmlformats.org/drawingml/2006/main"/>
+          <a:p xmlns:a="http://schemas.openxmlformats.org/drawingml/2006/main">
+            <a:pPr algn="l">
+              <a:defRPr sz="1575" b="0">
+                <a:solidFill>
+                  <a:srgbClr val="5F6B7A"/>
+                </a:solidFill>
+                <a:latin typeface="Microsoft YaHei"/>
+                <a:ea typeface="Microsoft YaHei"/>
+                <a:cs typeface="Microsoft YaHei"/>
+              </a:defRPr>
+            </a:pPr>
+            <a:r>
+              <a:rPr sz="1575" b="0">
+                <a:solidFill>
+                  <a:srgbClr val="5F6B7A"/>
+                </a:solidFill>
+                <a:latin typeface="Microsoft YaHei"/>
+                <a:ea typeface="Microsoft YaHei"/>
+                <a:cs typeface="Microsoft YaHei"/>
+              </a:rPr>
+              <a:t>非自反、非对称、</a:t>
+            </a:r>
+          </a:p>
+          <a:p xmlns:a="http://schemas.openxmlformats.org/drawingml/2006/main">
+            <a:pPr algn="l">
+              <a:defRPr sz="1575" b="0">
+                <a:solidFill>
+                  <a:srgbClr val="5F6B7A"/>
+                </a:solidFill>
+                <a:latin typeface="Microsoft YaHei"/>
+                <a:ea typeface="Microsoft YaHei"/>
+                <a:cs typeface="Microsoft YaHei"/>
+              </a:defRPr>
+            </a:pPr>
+            <a:r>
+              <a:rPr sz="1575" b="0">
+                <a:solidFill>
+                  <a:srgbClr val="5F6B7A"/>
+                </a:solidFill>
+                <a:latin typeface="Microsoft YaHei"/>
+                <a:ea typeface="Microsoft YaHei"/>
+                <a:cs typeface="Microsoft YaHei"/>
+              </a:rPr>
+              <a:t>传递、等价传递</a:t>
+            </a:r>
+          </a:p>
+        </p:txBody>
+      </p:sp>
+      <p:sp>
+        <p:nvSpPr>
+          <p:cNvPr id="18" name="">
+            <a:extLst xmlns:a="http://schemas.openxmlformats.org/drawingml/2006/main">
+              <a:ext uri="{FF2B5EF4-FFF2-40B4-BE49-F238E27FC236}">
+                <a16:creationId xmlns:a16="http://schemas.microsoft.com/office/drawing/2014/main" id="{B4BCC09B-4C26-4FAF-9FD8-FF517A8569F9}"/>
+              </a:ext>
+            </a:extLst>
+          </p:cNvPr>
+          <p:cNvSpPr>
+            <a:spLocks xmlns:a="http://schemas.openxmlformats.org/drawingml/2006/main" noGrp="1"/>
+          </p:cNvSpPr>
+          <p:nvPr/>
+        </p:nvSpPr>
+        <p:spPr>
+          <a:xfrm xmlns:a="http://schemas.openxmlformats.org/drawingml/2006/main">
+            <a:off x="8696325" y="2952750"/>
+            <a:ext cx="342900" cy="342900"/>
+          </a:xfrm>
+          <a:prstGeom xmlns:a="http://schemas.openxmlformats.org/drawingml/2006/main" prst="rect">
+            <a:avLst/>
+          </a:prstGeom>
+          <a:noFill xmlns:a="http://schemas.openxmlformats.org/drawingml/2006/main"/>
+          <a:ln xmlns:a="http://schemas.openxmlformats.org/drawingml/2006/main" w="0">
+            <a:noFill/>
+            <a:prstDash val="solid"/>
+          </a:ln>
+        </p:spPr>
+        <p:txBody>
+          <a:bodyPr xmlns:a="http://schemas.openxmlformats.org/drawingml/2006/main" lIns="0" tIns="0" rIns="0" bIns="0" anchor="t">
+            <a:normAutofit fontScale="100000"/>
+          </a:bodyPr>
+          <a:lstStyle xmlns:a="http://schemas.openxmlformats.org/drawingml/2006/main"/>
+          <a:p xmlns:a="http://schemas.openxmlformats.org/drawingml/2006/main">
+            <a:pPr algn="ctr">
+              <a:defRPr sz="2100" b="1">
+                <a:solidFill>
+                  <a:srgbClr val="2563EB"/>
+                </a:solidFill>
+                <a:latin typeface="Microsoft YaHei"/>
+                <a:ea typeface="Microsoft YaHei"/>
+                <a:cs typeface="Microsoft YaHei"/>
+              </a:defRPr>
+            </a:pPr>
+            <a:r>
+              <a:rPr sz="2100" b="1">
+                <a:solidFill>
+                  <a:srgbClr val="2563EB"/>
+                </a:solidFill>
+                <a:latin typeface="Microsoft YaHei"/>
+                <a:ea typeface="Microsoft YaHei"/>
+                <a:cs typeface="Microsoft YaHei"/>
+              </a:rPr>
+              <a:t>→</a:t>
+            </a:r>
+          </a:p>
+        </p:txBody>
+      </p:sp>
+      <p:sp>
+        <p:nvSpPr>
+          <p:cNvPr id="19" name="">
+            <a:extLst xmlns:a="http://schemas.openxmlformats.org/drawingml/2006/main">
+              <a:ext uri="{FF2B5EF4-FFF2-40B4-BE49-F238E27FC236}">
+                <a16:creationId xmlns:a16="http://schemas.microsoft.com/office/drawing/2014/main" id="{4D31B0CF-7CAB-418C-8D56-6FEB57DD6174}"/>
+              </a:ext>
+            </a:extLst>
+          </p:cNvPr>
+          <p:cNvSpPr>
+            <a:spLocks xmlns:a="http://schemas.openxmlformats.org/drawingml/2006/main" noGrp="1"/>
+          </p:cNvSpPr>
+          <p:nvPr/>
+        </p:nvSpPr>
+        <p:spPr>
+          <a:xfrm xmlns:a="http://schemas.openxmlformats.org/drawingml/2006/main">
+            <a:off x="9144000" y="2133600"/>
+            <a:ext cx="2266950" cy="2209800"/>
+          </a:xfrm>
+          <a:prstGeom xmlns:a="http://schemas.openxmlformats.org/drawingml/2006/main" prst="roundRect">
+            <a:avLst>
+              <a:gd name="adj" fmla="val 5172"/>
+            </a:avLst>
+          </a:prstGeom>
+          <a:solidFill xmlns:a="http://schemas.openxmlformats.org/drawingml/2006/main">
+            <a:srgbClr val="FFFFFF"/>
+          </a:solidFill>
+          <a:ln xmlns:a="http://schemas.openxmlformats.org/drawingml/2006/main" w="9525">
+            <a:solidFill>
+              <a:srgbClr val="D8DEE8"/>
+            </a:solidFill>
+            <a:prstDash val="solid"/>
+          </a:ln>
+        </p:spPr>
+      </p:sp>
+      <p:sp>
+        <p:nvSpPr>
+          <p:cNvPr id="20" name="">
+            <a:extLst xmlns:a="http://schemas.openxmlformats.org/drawingml/2006/main">
+              <a:ext uri="{FF2B5EF4-FFF2-40B4-BE49-F238E27FC236}">
+                <a16:creationId xmlns:a16="http://schemas.microsoft.com/office/drawing/2014/main" id="{F0661280-E6E7-4BF6-846A-5C665E1B2A89}"/>
+              </a:ext>
+            </a:extLst>
+          </p:cNvPr>
+          <p:cNvSpPr>
+            <a:spLocks xmlns:a="http://schemas.openxmlformats.org/drawingml/2006/main" noGrp="1"/>
+          </p:cNvSpPr>
+          <p:nvPr/>
+        </p:nvSpPr>
+        <p:spPr>
+          <a:xfrm xmlns:a="http://schemas.openxmlformats.org/drawingml/2006/main">
+            <a:off x="9353550" y="2343150"/>
+            <a:ext cx="381000" cy="333375"/>
+          </a:xfrm>
+          <a:prstGeom xmlns:a="http://schemas.openxmlformats.org/drawingml/2006/main" prst="rect">
+            <a:avLst/>
+          </a:prstGeom>
+          <a:noFill xmlns:a="http://schemas.openxmlformats.org/drawingml/2006/main"/>
+          <a:ln xmlns:a="http://schemas.openxmlformats.org/drawingml/2006/main" w="0">
+            <a:noFill/>
+            <a:prstDash val="solid"/>
+          </a:ln>
+        </p:spPr>
+        <p:txBody>
+          <a:bodyPr xmlns:a="http://schemas.openxmlformats.org/drawingml/2006/main" lIns="0" tIns="0" rIns="0" bIns="0" anchor="t">
+            <a:normAutofit fontScale="100000"/>
+          </a:bodyPr>
+          <a:lstStyle xmlns:a="http://schemas.openxmlformats.org/drawingml/2006/main"/>
+          <a:p xmlns:a="http://schemas.openxmlformats.org/drawingml/2006/main">
+            <a:pPr algn="l">
+              <a:defRPr sz="1875" b="1">
+                <a:solidFill>
+                  <a:srgbClr val="2563EB"/>
+                </a:solidFill>
+                <a:latin typeface="Microsoft YaHei"/>
+                <a:ea typeface="Microsoft YaHei"/>
+                <a:cs typeface="Microsoft YaHei"/>
+              </a:defRPr>
+            </a:pPr>
+            <a:r>
+              <a:rPr sz="1875" b="1">
+                <a:solidFill>
+                  <a:srgbClr val="2563EB"/>
+                </a:solidFill>
+                <a:latin typeface="Microsoft YaHei"/>
+                <a:ea typeface="Microsoft YaHei"/>
+                <a:cs typeface="Microsoft YaHei"/>
+              </a:rPr>
+              <a:t>4</a:t>
+            </a:r>
+          </a:p>
+        </p:txBody>
+      </p:sp>
+      <p:sp>
+        <p:nvSpPr>
+          <p:cNvPr id="21" name="">
+            <a:extLst xmlns:a="http://schemas.openxmlformats.org/drawingml/2006/main">
+              <a:ext uri="{FF2B5EF4-FFF2-40B4-BE49-F238E27FC236}">
+                <a16:creationId xmlns:a16="http://schemas.microsoft.com/office/drawing/2014/main" id="{B6733C16-A21A-45A1-9FAC-634BD857A907}"/>
+              </a:ext>
+            </a:extLst>
+          </p:cNvPr>
+          <p:cNvSpPr>
+            <a:spLocks xmlns:a="http://schemas.openxmlformats.org/drawingml/2006/main" noGrp="1"/>
+          </p:cNvSpPr>
+          <p:nvPr/>
+        </p:nvSpPr>
+        <p:spPr>
+          <a:xfrm xmlns:a="http://schemas.openxmlformats.org/drawingml/2006/main">
+            <a:off x="9353550" y="2800350"/>
+            <a:ext cx="1809750" cy="381000"/>
+          </a:xfrm>
+          <a:prstGeom xmlns:a="http://schemas.openxmlformats.org/drawingml/2006/main" prst="rect">
+            <a:avLst/>
+          </a:prstGeom>
+          <a:noFill xmlns:a="http://schemas.openxmlformats.org/drawingml/2006/main"/>
+          <a:ln xmlns:a="http://schemas.openxmlformats.org/drawingml/2006/main" w="0">
+            <a:noFill/>
+            <a:prstDash val="solid"/>
+          </a:ln>
+        </p:spPr>
+        <p:txBody>
+          <a:bodyPr xmlns:a="http://schemas.openxmlformats.org/drawingml/2006/main" lIns="0" tIns="0" rIns="0" bIns="0" anchor="t">
+            <a:normAutofit fontScale="100000"/>
+          </a:bodyPr>
+          <a:lstStyle xmlns:a="http://schemas.openxmlformats.org/drawingml/2006/main"/>
+          <a:p xmlns:a="http://schemas.openxmlformats.org/drawingml/2006/main">
+            <a:pPr algn="l">
+              <a:defRPr sz="2175" b="1">
+                <a:solidFill>
+                  <a:srgbClr val="101828"/>
+                </a:solidFill>
+                <a:latin typeface="Microsoft YaHei"/>
+                <a:ea typeface="Microsoft YaHei"/>
+                <a:cs typeface="Microsoft YaHei"/>
+              </a:defRPr>
+            </a:pPr>
+            <a:r>
+              <a:rPr sz="2175" b="1">
+                <a:solidFill>
+                  <a:srgbClr val="101828"/>
+                </a:solidFill>
+                <a:latin typeface="Microsoft YaHei"/>
+                <a:ea typeface="Microsoft YaHei"/>
+                <a:cs typeface="Microsoft YaHei"/>
+              </a:rPr>
+              <a:t>推结果</a:t>
+            </a:r>
+          </a:p>
+        </p:txBody>
+      </p:sp>
+      <p:sp>
+        <p:nvSpPr>
+          <p:cNvPr id="22" name="">
+            <a:extLst xmlns:a="http://schemas.openxmlformats.org/drawingml/2006/main">
+              <a:ext uri="{FF2B5EF4-FFF2-40B4-BE49-F238E27FC236}">
+                <a16:creationId xmlns:a16="http://schemas.microsoft.com/office/drawing/2014/main" id="{F77F9DD9-CF01-4BC4-A689-2A9E717A9A38}"/>
+              </a:ext>
+            </a:extLst>
+          </p:cNvPr>
+          <p:cNvSpPr>
+            <a:spLocks xmlns:a="http://schemas.openxmlformats.org/drawingml/2006/main" noGrp="1"/>
+          </p:cNvSpPr>
+          <p:nvPr/>
+        </p:nvSpPr>
+        <p:spPr>
+          <a:xfrm xmlns:a="http://schemas.openxmlformats.org/drawingml/2006/main">
+            <a:off x="9353550" y="3381375"/>
+            <a:ext cx="1847850" cy="666750"/>
+          </a:xfrm>
+          <a:prstGeom xmlns:a="http://schemas.openxmlformats.org/drawingml/2006/main" prst="rect">
+            <a:avLst/>
+          </a:prstGeom>
+          <a:noFill xmlns:a="http://schemas.openxmlformats.org/drawingml/2006/main"/>
+          <a:ln xmlns:a="http://schemas.openxmlformats.org/drawingml/2006/main" w="0">
+            <a:noFill/>
+            <a:prstDash val="solid"/>
+          </a:ln>
+        </p:spPr>
+        <p:txBody>
+          <a:bodyPr xmlns:a="http://schemas.openxmlformats.org/drawingml/2006/main" lIns="0" tIns="0" rIns="0" bIns="0" anchor="t">
+            <a:normAutofit fontScale="100000"/>
+          </a:bodyPr>
+          <a:lstStyle xmlns:a="http://schemas.openxmlformats.org/drawingml/2006/main"/>
+          <a:p xmlns:a="http://schemas.openxmlformats.org/drawingml/2006/main">
+            <a:pPr algn="l">
+              <a:defRPr sz="1575" b="0">
+                <a:solidFill>
+                  <a:srgbClr val="5F6B7A"/>
+                </a:solidFill>
+                <a:latin typeface="Microsoft YaHei"/>
+                <a:ea typeface="Microsoft YaHei"/>
+                <a:cs typeface="Microsoft YaHei"/>
+              </a:defRPr>
+            </a:pPr>
+            <a:r>
+              <a:rPr sz="1575" b="0">
+                <a:solidFill>
+                  <a:srgbClr val="5F6B7A"/>
+                </a:solidFill>
+                <a:latin typeface="Microsoft YaHei"/>
+                <a:ea typeface="Microsoft YaHei"/>
+                <a:cs typeface="Microsoft YaHei"/>
+              </a:rPr>
+              <a:t>顺序、去重、</a:t>
+            </a:r>
+          </a:p>
+          <a:p xmlns:a="http://schemas.openxmlformats.org/drawingml/2006/main">
+            <a:pPr algn="l">
+              <a:defRPr sz="1575" b="0">
+                <a:solidFill>
+                  <a:srgbClr val="5F6B7A"/>
+                </a:solidFill>
+                <a:latin typeface="Microsoft YaHei"/>
+                <a:ea typeface="Microsoft YaHei"/>
+                <a:cs typeface="Microsoft YaHei"/>
+              </a:defRPr>
+            </a:pPr>
+            <a:r>
+              <a:rPr sz="1575" b="0">
+                <a:solidFill>
+                  <a:srgbClr val="5F6B7A"/>
+                </a:solidFill>
+                <a:latin typeface="Microsoft YaHei"/>
+                <a:ea typeface="Microsoft YaHei"/>
+                <a:cs typeface="Microsoft YaHei"/>
+              </a:rPr>
+              <a:t>查找边界</a:t>
+            </a:r>
+          </a:p>
+        </p:txBody>
+      </p:sp>
+      <p:sp>
+        <p:nvSpPr>
+          <p:cNvPr id="23" name="">
+            <a:extLst xmlns:a="http://schemas.openxmlformats.org/drawingml/2006/main">
+              <a:ext uri="{FF2B5EF4-FFF2-40B4-BE49-F238E27FC236}">
+                <a16:creationId xmlns:a16="http://schemas.microsoft.com/office/drawing/2014/main" id="{5DA2A965-4C71-4566-B8AB-118C615F2D9E}"/>
+              </a:ext>
+            </a:extLst>
+          </p:cNvPr>
+          <p:cNvSpPr>
+            <a:spLocks xmlns:a="http://schemas.openxmlformats.org/drawingml/2006/main" noGrp="1"/>
+          </p:cNvSpPr>
+          <p:nvPr/>
+        </p:nvSpPr>
+        <p:spPr>
+          <a:xfrm xmlns:a="http://schemas.openxmlformats.org/drawingml/2006/main">
+            <a:off x="685800" y="4972050"/>
+            <a:ext cx="1905000" cy="342900"/>
+          </a:xfrm>
+          <a:prstGeom xmlns:a="http://schemas.openxmlformats.org/drawingml/2006/main" prst="rect">
+            <a:avLst/>
+          </a:prstGeom>
+          <a:noFill xmlns:a="http://schemas.openxmlformats.org/drawingml/2006/main"/>
+          <a:ln xmlns:a="http://schemas.openxmlformats.org/drawingml/2006/main" w="0">
+            <a:noFill/>
+            <a:prstDash val="solid"/>
+          </a:ln>
+        </p:spPr>
+        <p:txBody>
+          <a:bodyPr xmlns:a="http://schemas.openxmlformats.org/drawingml/2006/main" lIns="0" tIns="0" rIns="0" bIns="0" anchor="t">
+            <a:normAutofit fontScale="100000"/>
+          </a:bodyPr>
+          <a:lstStyle xmlns:a="http://schemas.openxmlformats.org/drawingml/2006/main"/>
+          <a:p xmlns:a="http://schemas.openxmlformats.org/drawingml/2006/main">
+            <a:pPr algn="l">
+              <a:defRPr sz="1875" b="1">
+                <a:solidFill>
+                  <a:srgbClr val="2563EB"/>
+                </a:solidFill>
+                <a:latin typeface="Microsoft YaHei"/>
+                <a:ea typeface="Microsoft YaHei"/>
+                <a:cs typeface="Microsoft YaHei"/>
+              </a:defRPr>
+            </a:pPr>
+            <a:r>
+              <a:rPr sz="1875" b="1">
+                <a:solidFill>
+                  <a:srgbClr val="2563EB"/>
+                </a:solidFill>
+                <a:latin typeface="Microsoft YaHei"/>
+                <a:ea typeface="Microsoft YaHei"/>
+                <a:cs typeface="Microsoft YaHei"/>
+              </a:rPr>
+              <a:t>一句话记忆</a:t>
+            </a:r>
+          </a:p>
+        </p:txBody>
+      </p:sp>
+      <p:sp>
+        <p:nvSpPr>
+          <p:cNvPr id="24" name="">
+            <a:extLst xmlns:a="http://schemas.openxmlformats.org/drawingml/2006/main">
+              <a:ext uri="{FF2B5EF4-FFF2-40B4-BE49-F238E27FC236}">
+                <a16:creationId xmlns:a16="http://schemas.microsoft.com/office/drawing/2014/main" id="{EA5C52DF-9D1A-4374-8B8A-4953AAA60F5C}"/>
+              </a:ext>
+            </a:extLst>
+          </p:cNvPr>
+          <p:cNvSpPr>
+            <a:spLocks xmlns:a="http://schemas.openxmlformats.org/drawingml/2006/main" noGrp="1"/>
+          </p:cNvSpPr>
+          <p:nvPr/>
+        </p:nvSpPr>
+        <p:spPr>
+          <a:xfrm xmlns:a="http://schemas.openxmlformats.org/drawingml/2006/main">
+            <a:off x="685800" y="5429250"/>
+            <a:ext cx="10477500" cy="552450"/>
+          </a:xfrm>
+          <a:prstGeom xmlns:a="http://schemas.openxmlformats.org/drawingml/2006/main" prst="rect">
+            <a:avLst/>
+          </a:prstGeom>
+          <a:noFill xmlns:a="http://schemas.openxmlformats.org/drawingml/2006/main"/>
+          <a:ln xmlns:a="http://schemas.openxmlformats.org/drawingml/2006/main" w="0">
+            <a:noFill/>
+            <a:prstDash val="solid"/>
+          </a:ln>
+        </p:spPr>
+        <p:txBody>
+          <a:bodyPr xmlns:a="http://schemas.openxmlformats.org/drawingml/2006/main" lIns="0" tIns="0" rIns="0" bIns="0" anchor="t">
+            <a:normAutofit fontScale="100000"/>
+          </a:bodyPr>
+          <a:lstStyle xmlns:a="http://schemas.openxmlformats.org/drawingml/2006/main"/>
+          <a:p xmlns:a="http://schemas.openxmlformats.org/drawingml/2006/main">
+            <a:pPr algn="l">
+              <a:defRPr sz="2250" b="1">
+                <a:solidFill>
+                  <a:srgbClr val="101828"/>
+                </a:solidFill>
+                <a:latin typeface="Microsoft YaHei"/>
+                <a:ea typeface="Microsoft YaHei"/>
+                <a:cs typeface="Microsoft YaHei"/>
+              </a:defRPr>
+            </a:pPr>
+            <a:r>
+              <a:rPr sz="2250" b="1">
+                <a:solidFill>
+                  <a:srgbClr val="101828"/>
+                </a:solidFill>
+                <a:latin typeface="Microsoft YaHei"/>
+                <a:ea typeface="Microsoft YaHei"/>
+                <a:cs typeface="Microsoft YaHei"/>
+              </a:rPr>
+              <a:t>set 用比较器建立“严格弱序”；不可区分的元素，就是 set 眼中的同一个键。</a:t>
+            </a:r>
+          </a:p>
+        </p:txBody>
+      </p:sp>
+    </p:spTree>
+    <p:extLst>
+      <p:ext uri="{BB962C8B-B14F-4D97-AF65-F5344CB8AC3E}">
+        <p14:creationId xmlns:p14="http://schemas.microsoft.com/office/powerpoint/2010/main" val="1714500778"/>
       </p:ext>
     </p:extLst>
   </p:cSld>
@@ -1913,7 +4553,7 @@
           <p:cNvPr id="22" name="">
             <a:extLst xmlns:a="http://schemas.openxmlformats.org/drawingml/2006/main">
               <a:ext uri="{FF2B5EF4-FFF2-40B4-BE49-F238E27FC236}">
-                <a16:creationId xmlns:a16="http://schemas.microsoft.com/office/drawing/2014/main" id="{892029B4-D64F-4AD0-A743-9DC76AD2E8BA}"/>
+                <a16:creationId xmlns:a16="http://schemas.microsoft.com/office/drawing/2014/main" id="{01E98DDA-3993-425B-8925-FC0DAC2BF9AD}"/>
               </a:ext>
             </a:extLst>
           </p:cNvPr>
@@ -1946,7 +4586,7 @@
           <p:cNvPr id="2" name="">
             <a:extLst xmlns:a="http://schemas.openxmlformats.org/drawingml/2006/main">
               <a:ext uri="{FF2B5EF4-FFF2-40B4-BE49-F238E27FC236}">
-                <a16:creationId xmlns:a16="http://schemas.microsoft.com/office/drawing/2014/main" id="{CA2FEDAA-D54E-4B25-A057-80233D96B157}"/>
+                <a16:creationId xmlns:a16="http://schemas.microsoft.com/office/drawing/2014/main" id="{CBB99BEA-2D47-4F8F-AC4E-E25899657F4F}"/>
               </a:ext>
             </a:extLst>
           </p:cNvPr>
@@ -2004,7 +4644,7 @@
           <p:cNvPr id="3" name="">
             <a:extLst xmlns:a="http://schemas.openxmlformats.org/drawingml/2006/main">
               <a:ext uri="{FF2B5EF4-FFF2-40B4-BE49-F238E27FC236}">
-                <a16:creationId xmlns:a16="http://schemas.microsoft.com/office/drawing/2014/main" id="{DFBF6F95-89D7-42C9-BDEE-5771B8FAB317}"/>
+                <a16:creationId xmlns:a16="http://schemas.microsoft.com/office/drawing/2014/main" id="{12E57AFE-73DB-4258-AFA9-EEAE5D39E815}"/>
               </a:ext>
             </a:extLst>
           </p:cNvPr>
@@ -2062,7 +4702,7 @@
           <p:cNvPr id="4" name="">
             <a:extLst xmlns:a="http://schemas.openxmlformats.org/drawingml/2006/main">
               <a:ext uri="{FF2B5EF4-FFF2-40B4-BE49-F238E27FC236}">
-                <a16:creationId xmlns:a16="http://schemas.microsoft.com/office/drawing/2014/main" id="{27CC940C-8852-4474-AB91-604A41B6BE71}"/>
+                <a16:creationId xmlns:a16="http://schemas.microsoft.com/office/drawing/2014/main" id="{640FB970-DBF4-4074-BEE6-1FA535FD0813}"/>
               </a:ext>
             </a:extLst>
           </p:cNvPr>
@@ -2120,7 +4760,7 @@
           <p:cNvPr id="5" name="">
             <a:extLst xmlns:a="http://schemas.openxmlformats.org/drawingml/2006/main">
               <a:ext uri="{FF2B5EF4-FFF2-40B4-BE49-F238E27FC236}">
-                <a16:creationId xmlns:a16="http://schemas.microsoft.com/office/drawing/2014/main" id="{35E149BF-2951-4F62-BC56-5E94CCBCB63A}"/>
+                <a16:creationId xmlns:a16="http://schemas.microsoft.com/office/drawing/2014/main" id="{A79EBDE4-2D66-4D9B-8DF2-31AB63DF1EE6}"/>
               </a:ext>
             </a:extLst>
           </p:cNvPr>
@@ -2178,7 +4818,7 @@
           <p:cNvPr id="6" name="">
             <a:extLst xmlns:a="http://schemas.openxmlformats.org/drawingml/2006/main">
               <a:ext uri="{FF2B5EF4-FFF2-40B4-BE49-F238E27FC236}">
-                <a16:creationId xmlns:a16="http://schemas.microsoft.com/office/drawing/2014/main" id="{30DFB7C8-A112-4E8A-B062-76952C1C7A23}"/>
+                <a16:creationId xmlns:a16="http://schemas.microsoft.com/office/drawing/2014/main" id="{E7E574F7-EAC3-46DB-893C-85D2A4AC84D0}"/>
               </a:ext>
             </a:extLst>
           </p:cNvPr>
@@ -2236,7 +4876,7 @@
           <p:cNvPr id="7" name="">
             <a:extLst xmlns:a="http://schemas.openxmlformats.org/drawingml/2006/main">
               <a:ext uri="{FF2B5EF4-FFF2-40B4-BE49-F238E27FC236}">
-                <a16:creationId xmlns:a16="http://schemas.microsoft.com/office/drawing/2014/main" id="{16AF4897-37B1-420A-BB04-339E11071AC4}"/>
+                <a16:creationId xmlns:a16="http://schemas.microsoft.com/office/drawing/2014/main" id="{F16FBBC0-DC8B-478C-AC36-CAC2D7F60D9B}"/>
               </a:ext>
             </a:extLst>
           </p:cNvPr>
@@ -2294,7 +4934,7 @@
           <p:cNvPr id="8" name="">
             <a:extLst xmlns:a="http://schemas.openxmlformats.org/drawingml/2006/main">
               <a:ext uri="{FF2B5EF4-FFF2-40B4-BE49-F238E27FC236}">
-                <a16:creationId xmlns:a16="http://schemas.microsoft.com/office/drawing/2014/main" id="{92ED852E-5A0B-42E1-9B52-C87FB0E34E94}"/>
+                <a16:creationId xmlns:a16="http://schemas.microsoft.com/office/drawing/2014/main" id="{A2143748-409D-4155-83CB-956FE4674864}"/>
               </a:ext>
             </a:extLst>
           </p:cNvPr>
@@ -2352,7 +4992,7 @@
           <p:cNvPr id="9" name="">
             <a:extLst xmlns:a="http://schemas.openxmlformats.org/drawingml/2006/main">
               <a:ext uri="{FF2B5EF4-FFF2-40B4-BE49-F238E27FC236}">
-                <a16:creationId xmlns:a16="http://schemas.microsoft.com/office/drawing/2014/main" id="{F2A1A13A-08D2-447E-927F-68F0CF9718B8}"/>
+                <a16:creationId xmlns:a16="http://schemas.microsoft.com/office/drawing/2014/main" id="{DF90DEDF-ACBB-4ED8-8A1B-FFA247FAB4D2}"/>
               </a:ext>
             </a:extLst>
           </p:cNvPr>
@@ -2387,7 +5027,7 @@
           <p:cNvPr id="10" name="">
             <a:extLst xmlns:a="http://schemas.openxmlformats.org/drawingml/2006/main">
               <a:ext uri="{FF2B5EF4-FFF2-40B4-BE49-F238E27FC236}">
-                <a16:creationId xmlns:a16="http://schemas.microsoft.com/office/drawing/2014/main" id="{38CE9884-DCFB-457C-B61A-E48B6D3397A6}"/>
+                <a16:creationId xmlns:a16="http://schemas.microsoft.com/office/drawing/2014/main" id="{78FB6ED7-3B31-4DC9-BADB-20BD4C68C1F7}"/>
               </a:ext>
             </a:extLst>
           </p:cNvPr>
@@ -2422,7 +5062,7 @@
           <p:cNvPr id="11" name="">
             <a:extLst xmlns:a="http://schemas.openxmlformats.org/drawingml/2006/main">
               <a:ext uri="{FF2B5EF4-FFF2-40B4-BE49-F238E27FC236}">
-                <a16:creationId xmlns:a16="http://schemas.microsoft.com/office/drawing/2014/main" id="{DB7B9DCE-ABF8-4355-82D7-DC257588966E}"/>
+                <a16:creationId xmlns:a16="http://schemas.microsoft.com/office/drawing/2014/main" id="{B84954E7-EC4C-4CB5-82C2-CD8665D4E0D5}"/>
               </a:ext>
             </a:extLst>
           </p:cNvPr>
@@ -2480,7 +5120,7 @@
           <p:cNvPr id="12" name="">
             <a:extLst xmlns:a="http://schemas.openxmlformats.org/drawingml/2006/main">
               <a:ext uri="{FF2B5EF4-FFF2-40B4-BE49-F238E27FC236}">
-                <a16:creationId xmlns:a16="http://schemas.microsoft.com/office/drawing/2014/main" id="{B14C2637-7393-4393-9352-E45B6A1EFC6A}"/>
+                <a16:creationId xmlns:a16="http://schemas.microsoft.com/office/drawing/2014/main" id="{F8D4A8A9-694F-4172-82DF-BBBBD7B40D17}"/>
               </a:ext>
             </a:extLst>
           </p:cNvPr>
@@ -2513,7 +5153,7 @@
           <p:cNvPr id="13" name="">
             <a:extLst xmlns:a="http://schemas.openxmlformats.org/drawingml/2006/main">
               <a:ext uri="{FF2B5EF4-FFF2-40B4-BE49-F238E27FC236}">
-                <a16:creationId xmlns:a16="http://schemas.microsoft.com/office/drawing/2014/main" id="{B1947F76-08C2-4631-9FD8-06E336F62743}"/>
+                <a16:creationId xmlns:a16="http://schemas.microsoft.com/office/drawing/2014/main" id="{C1E810AC-B80F-4F11-B6A2-399415F0FF30}"/>
               </a:ext>
             </a:extLst>
           </p:cNvPr>
@@ -2571,7 +5211,7 @@
           <p:cNvPr id="14" name="">
             <a:extLst xmlns:a="http://schemas.openxmlformats.org/drawingml/2006/main">
               <a:ext uri="{FF2B5EF4-FFF2-40B4-BE49-F238E27FC236}">
-                <a16:creationId xmlns:a16="http://schemas.microsoft.com/office/drawing/2014/main" id="{86E9B5A5-43C2-4E32-B5D1-B03AADA8F360}"/>
+                <a16:creationId xmlns:a16="http://schemas.microsoft.com/office/drawing/2014/main" id="{473B93A0-CC73-47F9-99BE-4586CC6629DA}"/>
               </a:ext>
             </a:extLst>
           </p:cNvPr>
@@ -2604,7 +5244,7 @@
           <p:cNvPr id="15" name="">
             <a:extLst xmlns:a="http://schemas.openxmlformats.org/drawingml/2006/main">
               <a:ext uri="{FF2B5EF4-FFF2-40B4-BE49-F238E27FC236}">
-                <a16:creationId xmlns:a16="http://schemas.microsoft.com/office/drawing/2014/main" id="{BA761DBD-EC9A-4EB1-B998-20DAD7BE5604}"/>
+                <a16:creationId xmlns:a16="http://schemas.microsoft.com/office/drawing/2014/main" id="{7FCFE047-F10F-46E1-BACB-47D605A46C4A}"/>
               </a:ext>
             </a:extLst>
           </p:cNvPr>
@@ -2662,7 +5302,7 @@
           <p:cNvPr id="16" name="">
             <a:extLst xmlns:a="http://schemas.openxmlformats.org/drawingml/2006/main">
               <a:ext uri="{FF2B5EF4-FFF2-40B4-BE49-F238E27FC236}">
-                <a16:creationId xmlns:a16="http://schemas.microsoft.com/office/drawing/2014/main" id="{87191DC8-6830-4356-8EEC-7F205A9CC39E}"/>
+                <a16:creationId xmlns:a16="http://schemas.microsoft.com/office/drawing/2014/main" id="{CDC3943E-569C-4289-9483-8750904F5ACD}"/>
               </a:ext>
             </a:extLst>
           </p:cNvPr>
@@ -2720,7 +5360,7 @@
           <p:cNvPr id="17" name="">
             <a:extLst xmlns:a="http://schemas.openxmlformats.org/drawingml/2006/main">
               <a:ext uri="{FF2B5EF4-FFF2-40B4-BE49-F238E27FC236}">
-                <a16:creationId xmlns:a16="http://schemas.microsoft.com/office/drawing/2014/main" id="{9E794F75-877E-44E3-966B-537E26CAF1B1}"/>
+                <a16:creationId xmlns:a16="http://schemas.microsoft.com/office/drawing/2014/main" id="{BEE56EDB-B4D5-42E0-B2E2-44E10471EFBB}"/>
               </a:ext>
             </a:extLst>
           </p:cNvPr>
@@ -2753,7 +5393,7 @@
           <p:cNvPr id="18" name="">
             <a:extLst xmlns:a="http://schemas.openxmlformats.org/drawingml/2006/main">
               <a:ext uri="{FF2B5EF4-FFF2-40B4-BE49-F238E27FC236}">
-                <a16:creationId xmlns:a16="http://schemas.microsoft.com/office/drawing/2014/main" id="{5D7B736B-B5BB-4FAC-A7D4-908B0598FBAC}"/>
+                <a16:creationId xmlns:a16="http://schemas.microsoft.com/office/drawing/2014/main" id="{7DFCAB01-8D68-4A89-B973-4B96587C3753}"/>
               </a:ext>
             </a:extLst>
           </p:cNvPr>
@@ -2811,7 +5451,7 @@
           <p:cNvPr id="19" name="">
             <a:extLst xmlns:a="http://schemas.openxmlformats.org/drawingml/2006/main">
               <a:ext uri="{FF2B5EF4-FFF2-40B4-BE49-F238E27FC236}">
-                <a16:creationId xmlns:a16="http://schemas.microsoft.com/office/drawing/2014/main" id="{1013E51A-E92B-4878-9847-978A1FA133F3}"/>
+                <a16:creationId xmlns:a16="http://schemas.microsoft.com/office/drawing/2014/main" id="{9ACDEEEC-149B-48BA-B1F1-E808DE910863}"/>
               </a:ext>
             </a:extLst>
           </p:cNvPr>
@@ -2844,7 +5484,7 @@
           <p:cNvPr id="20" name="">
             <a:extLst xmlns:a="http://schemas.openxmlformats.org/drawingml/2006/main">
               <a:ext uri="{FF2B5EF4-FFF2-40B4-BE49-F238E27FC236}">
-                <a16:creationId xmlns:a16="http://schemas.microsoft.com/office/drawing/2014/main" id="{0B239208-BDEE-47DE-8312-641921BD0C6D}"/>
+                <a16:creationId xmlns:a16="http://schemas.microsoft.com/office/drawing/2014/main" id="{5E572A1A-896A-46A1-8A26-77ABE62E4C2D}"/>
               </a:ext>
             </a:extLst>
           </p:cNvPr>
@@ -2902,7 +5542,7 @@
           <p:cNvPr id="21" name="">
             <a:extLst xmlns:a="http://schemas.openxmlformats.org/drawingml/2006/main">
               <a:ext uri="{FF2B5EF4-FFF2-40B4-BE49-F238E27FC236}">
-                <a16:creationId xmlns:a16="http://schemas.microsoft.com/office/drawing/2014/main" id="{37AF33A2-7898-458C-BB63-ACA617F71F6C}"/>
+                <a16:creationId xmlns:a16="http://schemas.microsoft.com/office/drawing/2014/main" id="{3D196810-F235-4FBA-B886-C730E03F418F}"/>
               </a:ext>
             </a:extLst>
           </p:cNvPr>
@@ -2958,7 +5598,7 @@
     </p:spTree>
     <p:extLst>
       <p:ext uri="{BB962C8B-B14F-4D97-AF65-F5344CB8AC3E}">
-        <p14:creationId xmlns:p14="http://schemas.microsoft.com/office/powerpoint/2010/main" val="1060768709"/>
+        <p14:creationId xmlns:p14="http://schemas.microsoft.com/office/powerpoint/2010/main" val="2101912246"/>
       </p:ext>
     </p:extLst>
   </p:cSld>
@@ -2989,7 +5629,7 @@
           <p:cNvPr id="13" name="">
             <a:extLst xmlns:a="http://schemas.openxmlformats.org/drawingml/2006/main">
               <a:ext uri="{FF2B5EF4-FFF2-40B4-BE49-F238E27FC236}">
-                <a16:creationId xmlns:a16="http://schemas.microsoft.com/office/drawing/2014/main" id="{B275539B-FABC-414F-A749-2B5B71304258}"/>
+                <a16:creationId xmlns:a16="http://schemas.microsoft.com/office/drawing/2014/main" id="{5EC2C9AE-B349-49F1-B2C5-8DA1C3A8C6D1}"/>
               </a:ext>
             </a:extLst>
           </p:cNvPr>
@@ -3022,7 +5662,7 @@
           <p:cNvPr id="2" name="">
             <a:extLst xmlns:a="http://schemas.openxmlformats.org/drawingml/2006/main">
               <a:ext uri="{FF2B5EF4-FFF2-40B4-BE49-F238E27FC236}">
-                <a16:creationId xmlns:a16="http://schemas.microsoft.com/office/drawing/2014/main" id="{5CA80324-8A09-4E91-9ECD-E241332E2890}"/>
+                <a16:creationId xmlns:a16="http://schemas.microsoft.com/office/drawing/2014/main" id="{2CD6C964-5232-4BD7-AF40-C5E64F3E9895}"/>
               </a:ext>
             </a:extLst>
           </p:cNvPr>
@@ -3080,7 +5720,7 @@
           <p:cNvPr id="3" name="">
             <a:extLst xmlns:a="http://schemas.openxmlformats.org/drawingml/2006/main">
               <a:ext uri="{FF2B5EF4-FFF2-40B4-BE49-F238E27FC236}">
-                <a16:creationId xmlns:a16="http://schemas.microsoft.com/office/drawing/2014/main" id="{CDCABB10-4E5F-46F2-ABFA-0F8B495419A7}"/>
+                <a16:creationId xmlns:a16="http://schemas.microsoft.com/office/drawing/2014/main" id="{15D124DA-C4A8-4A6E-9E8B-66D4EB190FC7}"/>
               </a:ext>
             </a:extLst>
           </p:cNvPr>
@@ -3138,7 +5778,7 @@
           <p:cNvPr id="4" name="">
             <a:extLst xmlns:a="http://schemas.openxmlformats.org/drawingml/2006/main">
               <a:ext uri="{FF2B5EF4-FFF2-40B4-BE49-F238E27FC236}">
-                <a16:creationId xmlns:a16="http://schemas.microsoft.com/office/drawing/2014/main" id="{8426AF48-94BB-4AA0-8F28-64554DF38339}"/>
+                <a16:creationId xmlns:a16="http://schemas.microsoft.com/office/drawing/2014/main" id="{F9C9D065-F68E-476A-B85B-603524CBC24E}"/>
               </a:ext>
             </a:extLst>
           </p:cNvPr>
@@ -3196,7 +5836,7 @@
           <p:cNvPr id="5" name="">
             <a:extLst xmlns:a="http://schemas.openxmlformats.org/drawingml/2006/main">
               <a:ext uri="{FF2B5EF4-FFF2-40B4-BE49-F238E27FC236}">
-                <a16:creationId xmlns:a16="http://schemas.microsoft.com/office/drawing/2014/main" id="{4F0E7881-CF98-4EDE-916B-BA5CE2482204}"/>
+                <a16:creationId xmlns:a16="http://schemas.microsoft.com/office/drawing/2014/main" id="{E09B77C2-9A1E-441A-B8B7-CC4D79E769D1}"/>
               </a:ext>
             </a:extLst>
           </p:cNvPr>
@@ -3254,7 +5894,7 @@
           <p:cNvPr id="6" name="">
             <a:extLst xmlns:a="http://schemas.openxmlformats.org/drawingml/2006/main">
               <a:ext uri="{FF2B5EF4-FFF2-40B4-BE49-F238E27FC236}">
-                <a16:creationId xmlns:a16="http://schemas.microsoft.com/office/drawing/2014/main" id="{A5C3F6EF-EDE9-41A7-96EB-214FB6D3DEA6}"/>
+                <a16:creationId xmlns:a16="http://schemas.microsoft.com/office/drawing/2014/main" id="{2B01C52F-F0A3-4505-ADF2-494B7A7A304A}"/>
               </a:ext>
             </a:extLst>
           </p:cNvPr>
@@ -3289,7 +5929,7 @@
           <p:cNvPr id="7" name="">
             <a:extLst xmlns:a="http://schemas.openxmlformats.org/drawingml/2006/main">
               <a:ext uri="{FF2B5EF4-FFF2-40B4-BE49-F238E27FC236}">
-                <a16:creationId xmlns:a16="http://schemas.microsoft.com/office/drawing/2014/main" id="{6ADC26CC-A859-440D-A9B2-75B2182D9780}"/>
+                <a16:creationId xmlns:a16="http://schemas.microsoft.com/office/drawing/2014/main" id="{84FB2017-426A-449A-9BE4-CE17E564EF42}"/>
               </a:ext>
             </a:extLst>
           </p:cNvPr>
@@ -3347,7 +5987,7 @@
           <p:cNvPr id="8" name="">
             <a:extLst xmlns:a="http://schemas.openxmlformats.org/drawingml/2006/main">
               <a:ext uri="{FF2B5EF4-FFF2-40B4-BE49-F238E27FC236}">
-                <a16:creationId xmlns:a16="http://schemas.microsoft.com/office/drawing/2014/main" id="{94825B12-C7DB-4BF6-B5C2-ACA3BA8C5D05}"/>
+                <a16:creationId xmlns:a16="http://schemas.microsoft.com/office/drawing/2014/main" id="{0259CE09-0F8A-4756-A3A4-ADE84E19B09E}"/>
               </a:ext>
             </a:extLst>
           </p:cNvPr>
@@ -3405,7 +6045,7 @@
           <p:cNvPr id="9" name="">
             <a:extLst xmlns:a="http://schemas.openxmlformats.org/drawingml/2006/main">
               <a:ext uri="{FF2B5EF4-FFF2-40B4-BE49-F238E27FC236}">
-                <a16:creationId xmlns:a16="http://schemas.microsoft.com/office/drawing/2014/main" id="{B1E09ADB-C782-4672-B1C8-B8F02611F248}"/>
+                <a16:creationId xmlns:a16="http://schemas.microsoft.com/office/drawing/2014/main" id="{417D1EB0-8AD7-443C-B8C1-B6C0FD5DEBF0}"/>
               </a:ext>
             </a:extLst>
           </p:cNvPr>
@@ -3440,7 +6080,7 @@
           <p:cNvPr id="10" name="">
             <a:extLst xmlns:a="http://schemas.openxmlformats.org/drawingml/2006/main">
               <a:ext uri="{FF2B5EF4-FFF2-40B4-BE49-F238E27FC236}">
-                <a16:creationId xmlns:a16="http://schemas.microsoft.com/office/drawing/2014/main" id="{4E5D93A9-F1BD-4079-8CBE-0DF218DB3546}"/>
+                <a16:creationId xmlns:a16="http://schemas.microsoft.com/office/drawing/2014/main" id="{BE21F51D-19A1-4F2B-B3D9-59886AFC51DD}"/>
               </a:ext>
             </a:extLst>
           </p:cNvPr>
@@ -3498,7 +6138,7 @@
           <p:cNvPr id="11" name="">
             <a:extLst xmlns:a="http://schemas.openxmlformats.org/drawingml/2006/main">
               <a:ext uri="{FF2B5EF4-FFF2-40B4-BE49-F238E27FC236}">
-                <a16:creationId xmlns:a16="http://schemas.microsoft.com/office/drawing/2014/main" id="{DA021A12-B7EE-4C6A-8569-3A9F895A75C2}"/>
+                <a16:creationId xmlns:a16="http://schemas.microsoft.com/office/drawing/2014/main" id="{35C2EDB6-64D1-4035-A831-5A456A82EE39}"/>
               </a:ext>
             </a:extLst>
           </p:cNvPr>
@@ -3556,7 +6196,7 @@
           <p:cNvPr id="12" name="">
             <a:extLst xmlns:a="http://schemas.openxmlformats.org/drawingml/2006/main">
               <a:ext uri="{FF2B5EF4-FFF2-40B4-BE49-F238E27FC236}">
-                <a16:creationId xmlns:a16="http://schemas.microsoft.com/office/drawing/2014/main" id="{E6B7BA2F-6676-4483-B3C2-CFC64D9191CC}"/>
+                <a16:creationId xmlns:a16="http://schemas.microsoft.com/office/drawing/2014/main" id="{754EF73F-36C3-4CEC-976E-858E829C9C95}"/>
               </a:ext>
             </a:extLst>
           </p:cNvPr>
@@ -3612,7 +6252,7 @@
     </p:spTree>
     <p:extLst>
       <p:ext uri="{BB962C8B-B14F-4D97-AF65-F5344CB8AC3E}">
-        <p14:creationId xmlns:p14="http://schemas.microsoft.com/office/powerpoint/2010/main" val="1681854841"/>
+        <p14:creationId xmlns:p14="http://schemas.microsoft.com/office/powerpoint/2010/main" val="2051343685"/>
       </p:ext>
     </p:extLst>
   </p:cSld>
@@ -3643,7 +6283,7 @@
           <p:cNvPr id="16" name="">
             <a:extLst xmlns:a="http://schemas.openxmlformats.org/drawingml/2006/main">
               <a:ext uri="{FF2B5EF4-FFF2-40B4-BE49-F238E27FC236}">
-                <a16:creationId xmlns:a16="http://schemas.microsoft.com/office/drawing/2014/main" id="{7483B682-CE4C-47ED-B6A2-42EFB817B383}"/>
+                <a16:creationId xmlns:a16="http://schemas.microsoft.com/office/drawing/2014/main" id="{A6E2940A-AF0C-4C92-B326-DF686AE49631}"/>
               </a:ext>
             </a:extLst>
           </p:cNvPr>
@@ -3676,7 +6316,7 @@
           <p:cNvPr id="2" name="">
             <a:extLst xmlns:a="http://schemas.openxmlformats.org/drawingml/2006/main">
               <a:ext uri="{FF2B5EF4-FFF2-40B4-BE49-F238E27FC236}">
-                <a16:creationId xmlns:a16="http://schemas.microsoft.com/office/drawing/2014/main" id="{72E30336-358D-46BC-880C-DC668279F5B4}"/>
+                <a16:creationId xmlns:a16="http://schemas.microsoft.com/office/drawing/2014/main" id="{A0BAD356-3EC0-4232-A5F8-0DCC2FB0E97E}"/>
               </a:ext>
             </a:extLst>
           </p:cNvPr>
@@ -3734,7 +6374,7 @@
           <p:cNvPr id="3" name="">
             <a:extLst xmlns:a="http://schemas.openxmlformats.org/drawingml/2006/main">
               <a:ext uri="{FF2B5EF4-FFF2-40B4-BE49-F238E27FC236}">
-                <a16:creationId xmlns:a16="http://schemas.microsoft.com/office/drawing/2014/main" id="{CCAA4FF8-B161-471D-8365-C674E1E2B086}"/>
+                <a16:creationId xmlns:a16="http://schemas.microsoft.com/office/drawing/2014/main" id="{B23B7F39-5018-4DFB-AB12-EDF1A5FC378C}"/>
               </a:ext>
             </a:extLst>
           </p:cNvPr>
@@ -3792,7 +6432,7 @@
           <p:cNvPr id="4" name="">
             <a:extLst xmlns:a="http://schemas.openxmlformats.org/drawingml/2006/main">
               <a:ext uri="{FF2B5EF4-FFF2-40B4-BE49-F238E27FC236}">
-                <a16:creationId xmlns:a16="http://schemas.microsoft.com/office/drawing/2014/main" id="{F6908FBE-75DD-480C-B07A-BB59A3A37C2B}"/>
+                <a16:creationId xmlns:a16="http://schemas.microsoft.com/office/drawing/2014/main" id="{01963696-B6BD-42E3-8D7A-830F1640CE34}"/>
               </a:ext>
             </a:extLst>
           </p:cNvPr>
@@ -3850,7 +6490,7 @@
           <p:cNvPr id="5" name="">
             <a:extLst xmlns:a="http://schemas.openxmlformats.org/drawingml/2006/main">
               <a:ext uri="{FF2B5EF4-FFF2-40B4-BE49-F238E27FC236}">
-                <a16:creationId xmlns:a16="http://schemas.microsoft.com/office/drawing/2014/main" id="{030905D0-ABC9-4279-8BE1-C0D98656CF89}"/>
+                <a16:creationId xmlns:a16="http://schemas.microsoft.com/office/drawing/2014/main" id="{4DF23C6A-042A-4E99-8810-E8D52C5EF4E5}"/>
               </a:ext>
             </a:extLst>
           </p:cNvPr>
@@ -3908,7 +6548,7 @@
           <p:cNvPr id="6" name="">
             <a:extLst xmlns:a="http://schemas.openxmlformats.org/drawingml/2006/main">
               <a:ext uri="{FF2B5EF4-FFF2-40B4-BE49-F238E27FC236}">
-                <a16:creationId xmlns:a16="http://schemas.microsoft.com/office/drawing/2014/main" id="{91C1D612-B053-4E38-AB2C-055F6D7E8D6C}"/>
+                <a16:creationId xmlns:a16="http://schemas.microsoft.com/office/drawing/2014/main" id="{65F6B37D-0920-41ED-B6CE-CAA5E70EECB7}"/>
               </a:ext>
             </a:extLst>
           </p:cNvPr>
@@ -3966,7 +6606,7 @@
           <p:cNvPr id="7" name="">
             <a:extLst xmlns:a="http://schemas.openxmlformats.org/drawingml/2006/main">
               <a:ext uri="{FF2B5EF4-FFF2-40B4-BE49-F238E27FC236}">
-                <a16:creationId xmlns:a16="http://schemas.microsoft.com/office/drawing/2014/main" id="{33564214-3BE9-44DB-93E1-C3295FC1283A}"/>
+                <a16:creationId xmlns:a16="http://schemas.microsoft.com/office/drawing/2014/main" id="{75E0D169-D61D-42D3-9F49-B58CE238684B}"/>
               </a:ext>
             </a:extLst>
           </p:cNvPr>
@@ -4024,7 +6664,7 @@
           <p:cNvPr id="8" name="">
             <a:extLst xmlns:a="http://schemas.openxmlformats.org/drawingml/2006/main">
               <a:ext uri="{FF2B5EF4-FFF2-40B4-BE49-F238E27FC236}">
-                <a16:creationId xmlns:a16="http://schemas.microsoft.com/office/drawing/2014/main" id="{D012690A-D922-4878-8572-AA80F2469549}"/>
+                <a16:creationId xmlns:a16="http://schemas.microsoft.com/office/drawing/2014/main" id="{0EB572A6-DC17-4AD4-AE7A-212CB00A3698}"/>
               </a:ext>
             </a:extLst>
           </p:cNvPr>
@@ -4082,7 +6722,7 @@
           <p:cNvPr id="9" name="">
             <a:extLst xmlns:a="http://schemas.openxmlformats.org/drawingml/2006/main">
               <a:ext uri="{FF2B5EF4-FFF2-40B4-BE49-F238E27FC236}">
-                <a16:creationId xmlns:a16="http://schemas.microsoft.com/office/drawing/2014/main" id="{ED572779-8E4A-4129-975D-86BAB888FE12}"/>
+                <a16:creationId xmlns:a16="http://schemas.microsoft.com/office/drawing/2014/main" id="{057A4785-B463-49D7-88DB-87321B307941}"/>
               </a:ext>
             </a:extLst>
           </p:cNvPr>
@@ -4140,7 +6780,7 @@
           <p:cNvPr id="10" name="">
             <a:extLst xmlns:a="http://schemas.openxmlformats.org/drawingml/2006/main">
               <a:ext uri="{FF2B5EF4-FFF2-40B4-BE49-F238E27FC236}">
-                <a16:creationId xmlns:a16="http://schemas.microsoft.com/office/drawing/2014/main" id="{E0ACD156-22D1-4C1D-AC89-4303242DC546}"/>
+                <a16:creationId xmlns:a16="http://schemas.microsoft.com/office/drawing/2014/main" id="{469AD1F7-521C-481B-A2C0-390AAA667AAF}"/>
               </a:ext>
             </a:extLst>
           </p:cNvPr>
@@ -4198,7 +6838,7 @@
           <p:cNvPr id="11" name="">
             <a:extLst xmlns:a="http://schemas.openxmlformats.org/drawingml/2006/main">
               <a:ext uri="{FF2B5EF4-FFF2-40B4-BE49-F238E27FC236}">
-                <a16:creationId xmlns:a16="http://schemas.microsoft.com/office/drawing/2014/main" id="{423A5032-D2E1-4A51-BC55-9A76F5E3337C}"/>
+                <a16:creationId xmlns:a16="http://schemas.microsoft.com/office/drawing/2014/main" id="{35631964-0906-4F70-9ACB-1BC311947D2F}"/>
               </a:ext>
             </a:extLst>
           </p:cNvPr>
@@ -4256,7 +6896,7 @@
           <p:cNvPr id="12" name="">
             <a:extLst xmlns:a="http://schemas.openxmlformats.org/drawingml/2006/main">
               <a:ext uri="{FF2B5EF4-FFF2-40B4-BE49-F238E27FC236}">
-                <a16:creationId xmlns:a16="http://schemas.microsoft.com/office/drawing/2014/main" id="{07C79D20-8205-4EEF-B860-2608D5A73B39}"/>
+                <a16:creationId xmlns:a16="http://schemas.microsoft.com/office/drawing/2014/main" id="{AB8D5C7A-C041-4349-960C-6E8DA13BD927}"/>
               </a:ext>
             </a:extLst>
           </p:cNvPr>
@@ -4314,7 +6954,7 @@
           <p:cNvPr id="13" name="">
             <a:extLst xmlns:a="http://schemas.openxmlformats.org/drawingml/2006/main">
               <a:ext uri="{FF2B5EF4-FFF2-40B4-BE49-F238E27FC236}">
-                <a16:creationId xmlns:a16="http://schemas.microsoft.com/office/drawing/2014/main" id="{210F3A2D-6387-4250-BEA4-2C2178050182}"/>
+                <a16:creationId xmlns:a16="http://schemas.microsoft.com/office/drawing/2014/main" id="{549BC818-2E90-4D66-B4CB-EF6BB5ED780C}"/>
               </a:ext>
             </a:extLst>
           </p:cNvPr>
@@ -4372,7 +7012,7 @@
           <p:cNvPr id="14" name="">
             <a:extLst xmlns:a="http://schemas.openxmlformats.org/drawingml/2006/main">
               <a:ext uri="{FF2B5EF4-FFF2-40B4-BE49-F238E27FC236}">
-                <a16:creationId xmlns:a16="http://schemas.microsoft.com/office/drawing/2014/main" id="{E23E8FAD-EDC4-4AE8-8D5F-6638D060DEAE}"/>
+                <a16:creationId xmlns:a16="http://schemas.microsoft.com/office/drawing/2014/main" id="{AF16981C-D263-401A-890D-702CF2197766}"/>
               </a:ext>
             </a:extLst>
           </p:cNvPr>
@@ -4430,7 +7070,7 @@
           <p:cNvPr id="15" name="">
             <a:extLst xmlns:a="http://schemas.openxmlformats.org/drawingml/2006/main">
               <a:ext uri="{FF2B5EF4-FFF2-40B4-BE49-F238E27FC236}">
-                <a16:creationId xmlns:a16="http://schemas.microsoft.com/office/drawing/2014/main" id="{7295AD36-CBB9-447D-A641-F88FD3CC022C}"/>
+                <a16:creationId xmlns:a16="http://schemas.microsoft.com/office/drawing/2014/main" id="{817F5CAD-D228-4F82-A18D-DFFA65AED938}"/>
               </a:ext>
             </a:extLst>
           </p:cNvPr>
@@ -4486,7 +7126,7 @@
     </p:spTree>
     <p:extLst>
       <p:ext uri="{BB962C8B-B14F-4D97-AF65-F5344CB8AC3E}">
-        <p14:creationId xmlns:p14="http://schemas.microsoft.com/office/powerpoint/2010/main" val="1390750227"/>
+        <p14:creationId xmlns:p14="http://schemas.microsoft.com/office/powerpoint/2010/main" val="1626203598"/>
       </p:ext>
     </p:extLst>
   </p:cSld>
@@ -4517,7 +7157,7 @@
           <p:cNvPr id="17" name="">
             <a:extLst xmlns:a="http://schemas.openxmlformats.org/drawingml/2006/main">
               <a:ext uri="{FF2B5EF4-FFF2-40B4-BE49-F238E27FC236}">
-                <a16:creationId xmlns:a16="http://schemas.microsoft.com/office/drawing/2014/main" id="{83B33EF6-3D03-41CF-ACC4-8F516A40AAB0}"/>
+                <a16:creationId xmlns:a16="http://schemas.microsoft.com/office/drawing/2014/main" id="{708DD480-5562-4413-BCB1-8ACE1BC8BDE2}"/>
               </a:ext>
             </a:extLst>
           </p:cNvPr>
@@ -4550,7 +7190,7 @@
           <p:cNvPr id="2" name="">
             <a:extLst xmlns:a="http://schemas.openxmlformats.org/drawingml/2006/main">
               <a:ext uri="{FF2B5EF4-FFF2-40B4-BE49-F238E27FC236}">
-                <a16:creationId xmlns:a16="http://schemas.microsoft.com/office/drawing/2014/main" id="{F11E0BF0-ECEA-43AD-8A6E-25A6A7CC1C84}"/>
+                <a16:creationId xmlns:a16="http://schemas.microsoft.com/office/drawing/2014/main" id="{B3B517F4-F0E8-404D-B578-5EBF72DC963C}"/>
               </a:ext>
             </a:extLst>
           </p:cNvPr>
@@ -4608,7 +7248,7 @@
           <p:cNvPr id="3" name="">
             <a:extLst xmlns:a="http://schemas.openxmlformats.org/drawingml/2006/main">
               <a:ext uri="{FF2B5EF4-FFF2-40B4-BE49-F238E27FC236}">
-                <a16:creationId xmlns:a16="http://schemas.microsoft.com/office/drawing/2014/main" id="{9421FAA1-BAF0-4879-A63A-2E5904DA195E}"/>
+                <a16:creationId xmlns:a16="http://schemas.microsoft.com/office/drawing/2014/main" id="{C29DD153-85D2-4B70-82AC-5C83ECD57F12}"/>
               </a:ext>
             </a:extLst>
           </p:cNvPr>
@@ -4666,7 +7306,7 @@
           <p:cNvPr id="4" name="">
             <a:extLst xmlns:a="http://schemas.openxmlformats.org/drawingml/2006/main">
               <a:ext uri="{FF2B5EF4-FFF2-40B4-BE49-F238E27FC236}">
-                <a16:creationId xmlns:a16="http://schemas.microsoft.com/office/drawing/2014/main" id="{38ACAFC1-DAD7-4A90-870E-B605673BFF8E}"/>
+                <a16:creationId xmlns:a16="http://schemas.microsoft.com/office/drawing/2014/main" id="{C0E09578-0EF9-49AB-8D3A-FA526FA7B233}"/>
               </a:ext>
             </a:extLst>
           </p:cNvPr>
@@ -4701,7 +7341,7 @@
           <p:cNvPr id="5" name="">
             <a:extLst xmlns:a="http://schemas.openxmlformats.org/drawingml/2006/main">
               <a:ext uri="{FF2B5EF4-FFF2-40B4-BE49-F238E27FC236}">
-                <a16:creationId xmlns:a16="http://schemas.microsoft.com/office/drawing/2014/main" id="{B942200F-9CFC-4767-8A7C-11C079A8E141}"/>
+                <a16:creationId xmlns:a16="http://schemas.microsoft.com/office/drawing/2014/main" id="{999A6E40-A360-41B0-8752-647985360822}"/>
               </a:ext>
             </a:extLst>
           </p:cNvPr>
@@ -4759,7 +7399,7 @@
           <p:cNvPr id="6" name="">
             <a:extLst xmlns:a="http://schemas.openxmlformats.org/drawingml/2006/main">
               <a:ext uri="{FF2B5EF4-FFF2-40B4-BE49-F238E27FC236}">
-                <a16:creationId xmlns:a16="http://schemas.microsoft.com/office/drawing/2014/main" id="{48D40790-70B3-4B90-ABFE-5852C059276B}"/>
+                <a16:creationId xmlns:a16="http://schemas.microsoft.com/office/drawing/2014/main" id="{7DF04DB5-26AC-4146-977C-4BDCC7D16F00}"/>
               </a:ext>
             </a:extLst>
           </p:cNvPr>
@@ -4817,7 +7457,7 @@
           <p:cNvPr id="7" name="">
             <a:extLst xmlns:a="http://schemas.openxmlformats.org/drawingml/2006/main">
               <a:ext uri="{FF2B5EF4-FFF2-40B4-BE49-F238E27FC236}">
-                <a16:creationId xmlns:a16="http://schemas.microsoft.com/office/drawing/2014/main" id="{2B36C147-006B-495B-AEDD-CD486FCFECC5}"/>
+                <a16:creationId xmlns:a16="http://schemas.microsoft.com/office/drawing/2014/main" id="{A196F995-B978-4CE5-A437-B49DE6F92D3C}"/>
               </a:ext>
             </a:extLst>
           </p:cNvPr>
@@ -4875,7 +7515,7 @@
           <p:cNvPr id="8" name="">
             <a:extLst xmlns:a="http://schemas.openxmlformats.org/drawingml/2006/main">
               <a:ext uri="{FF2B5EF4-FFF2-40B4-BE49-F238E27FC236}">
-                <a16:creationId xmlns:a16="http://schemas.microsoft.com/office/drawing/2014/main" id="{2247B997-59DA-4E7A-B996-7B9E76270AA5}"/>
+                <a16:creationId xmlns:a16="http://schemas.microsoft.com/office/drawing/2014/main" id="{C9B3B262-62EF-4516-A0EB-27E1F43F5CA1}"/>
               </a:ext>
             </a:extLst>
           </p:cNvPr>
@@ -4933,7 +7573,7 @@
           <p:cNvPr id="9" name="">
             <a:extLst xmlns:a="http://schemas.openxmlformats.org/drawingml/2006/main">
               <a:ext uri="{FF2B5EF4-FFF2-40B4-BE49-F238E27FC236}">
-                <a16:creationId xmlns:a16="http://schemas.microsoft.com/office/drawing/2014/main" id="{CE101CA9-912B-4F56-91A9-E5927EB5499F}"/>
+                <a16:creationId xmlns:a16="http://schemas.microsoft.com/office/drawing/2014/main" id="{7DD64087-D7EE-4348-8F4B-DF94EE595257}"/>
               </a:ext>
             </a:extLst>
           </p:cNvPr>
@@ -4991,7 +7631,7 @@
           <p:cNvPr id="10" name="">
             <a:extLst xmlns:a="http://schemas.openxmlformats.org/drawingml/2006/main">
               <a:ext uri="{FF2B5EF4-FFF2-40B4-BE49-F238E27FC236}">
-                <a16:creationId xmlns:a16="http://schemas.microsoft.com/office/drawing/2014/main" id="{63E27786-F547-42CB-8583-247183BAC301}"/>
+                <a16:creationId xmlns:a16="http://schemas.microsoft.com/office/drawing/2014/main" id="{74F4619B-A761-42B5-90F9-818ECAA9EAB3}"/>
               </a:ext>
             </a:extLst>
           </p:cNvPr>
@@ -5049,7 +7689,7 @@
           <p:cNvPr id="11" name="">
             <a:extLst xmlns:a="http://schemas.openxmlformats.org/drawingml/2006/main">
               <a:ext uri="{FF2B5EF4-FFF2-40B4-BE49-F238E27FC236}">
-                <a16:creationId xmlns:a16="http://schemas.microsoft.com/office/drawing/2014/main" id="{E6EF4BC9-0295-4ABF-BA6F-604F1B74D0F4}"/>
+                <a16:creationId xmlns:a16="http://schemas.microsoft.com/office/drawing/2014/main" id="{01A3F2E1-63AC-4513-A867-C74FD9A531E2}"/>
               </a:ext>
             </a:extLst>
           </p:cNvPr>
@@ -5107,7 +7747,7 @@
           <p:cNvPr id="12" name="">
             <a:extLst xmlns:a="http://schemas.openxmlformats.org/drawingml/2006/main">
               <a:ext uri="{FF2B5EF4-FFF2-40B4-BE49-F238E27FC236}">
-                <a16:creationId xmlns:a16="http://schemas.microsoft.com/office/drawing/2014/main" id="{4EE334B2-E370-49CD-9456-6B2A69B9D777}"/>
+                <a16:creationId xmlns:a16="http://schemas.microsoft.com/office/drawing/2014/main" id="{23949730-C7A9-4FFD-8E23-A899C1DADB2E}"/>
               </a:ext>
             </a:extLst>
           </p:cNvPr>
@@ -5165,7 +7805,7 @@
           <p:cNvPr id="13" name="">
             <a:extLst xmlns:a="http://schemas.openxmlformats.org/drawingml/2006/main">
               <a:ext uri="{FF2B5EF4-FFF2-40B4-BE49-F238E27FC236}">
-                <a16:creationId xmlns:a16="http://schemas.microsoft.com/office/drawing/2014/main" id="{E11B54D0-B666-46F4-BEE0-870E33EA384C}"/>
+                <a16:creationId xmlns:a16="http://schemas.microsoft.com/office/drawing/2014/main" id="{4AF16347-2D7C-4FFB-A4C2-59D50FEE21DB}"/>
               </a:ext>
             </a:extLst>
           </p:cNvPr>
@@ -5200,7 +7840,7 @@
           <p:cNvPr id="14" name="">
             <a:extLst xmlns:a="http://schemas.openxmlformats.org/drawingml/2006/main">
               <a:ext uri="{FF2B5EF4-FFF2-40B4-BE49-F238E27FC236}">
-                <a16:creationId xmlns:a16="http://schemas.microsoft.com/office/drawing/2014/main" id="{B499754B-C6CA-4174-B982-7C455563DD8B}"/>
+                <a16:creationId xmlns:a16="http://schemas.microsoft.com/office/drawing/2014/main" id="{A2C57BDF-5DE4-46BA-B3BB-0B16E6933D1C}"/>
               </a:ext>
             </a:extLst>
           </p:cNvPr>
@@ -5258,7 +7898,7 @@
           <p:cNvPr id="15" name="">
             <a:extLst xmlns:a="http://schemas.openxmlformats.org/drawingml/2006/main">
               <a:ext uri="{FF2B5EF4-FFF2-40B4-BE49-F238E27FC236}">
-                <a16:creationId xmlns:a16="http://schemas.microsoft.com/office/drawing/2014/main" id="{BBF73F3D-8525-4618-9B46-8C06C5110AB8}"/>
+                <a16:creationId xmlns:a16="http://schemas.microsoft.com/office/drawing/2014/main" id="{0676E333-F7F9-4D87-AC71-83696F702435}"/>
               </a:ext>
             </a:extLst>
           </p:cNvPr>
@@ -5316,7 +7956,7 @@
           <p:cNvPr id="16" name="">
             <a:extLst xmlns:a="http://schemas.openxmlformats.org/drawingml/2006/main">
               <a:ext uri="{FF2B5EF4-FFF2-40B4-BE49-F238E27FC236}">
-                <a16:creationId xmlns:a16="http://schemas.microsoft.com/office/drawing/2014/main" id="{EB7020F6-3ABC-47C9-874D-CC2B0250C222}"/>
+                <a16:creationId xmlns:a16="http://schemas.microsoft.com/office/drawing/2014/main" id="{0601F418-B2C9-482F-A37F-3575662107B2}"/>
               </a:ext>
             </a:extLst>
           </p:cNvPr>
@@ -5372,7 +8012,7 @@
     </p:spTree>
     <p:extLst>
       <p:ext uri="{BB962C8B-B14F-4D97-AF65-F5344CB8AC3E}">
-        <p14:creationId xmlns:p14="http://schemas.microsoft.com/office/powerpoint/2010/main" val="1199418338"/>
+        <p14:creationId xmlns:p14="http://schemas.microsoft.com/office/powerpoint/2010/main" val="1375503254"/>
       </p:ext>
     </p:extLst>
   </p:cSld>
@@ -5403,7 +8043,7 @@
           <p:cNvPr id="23" name="">
             <a:extLst xmlns:a="http://schemas.openxmlformats.org/drawingml/2006/main">
               <a:ext uri="{FF2B5EF4-FFF2-40B4-BE49-F238E27FC236}">
-                <a16:creationId xmlns:a16="http://schemas.microsoft.com/office/drawing/2014/main" id="{EE28F03E-82E0-4DB5-9C2D-39DA1BEFC135}"/>
+                <a16:creationId xmlns:a16="http://schemas.microsoft.com/office/drawing/2014/main" id="{1B1670F3-9DAE-49CB-BC0C-8F56286CEF54}"/>
               </a:ext>
             </a:extLst>
           </p:cNvPr>
@@ -5436,7 +8076,7 @@
           <p:cNvPr id="2" name="">
             <a:extLst xmlns:a="http://schemas.openxmlformats.org/drawingml/2006/main">
               <a:ext uri="{FF2B5EF4-FFF2-40B4-BE49-F238E27FC236}">
-                <a16:creationId xmlns:a16="http://schemas.microsoft.com/office/drawing/2014/main" id="{1430E60F-F761-4ECC-85EC-178D7A1F05F4}"/>
+                <a16:creationId xmlns:a16="http://schemas.microsoft.com/office/drawing/2014/main" id="{DF13E8E5-7047-474A-8863-F6387CBCCF82}"/>
               </a:ext>
             </a:extLst>
           </p:cNvPr>
@@ -5494,7 +8134,7 @@
           <p:cNvPr id="3" name="">
             <a:extLst xmlns:a="http://schemas.openxmlformats.org/drawingml/2006/main">
               <a:ext uri="{FF2B5EF4-FFF2-40B4-BE49-F238E27FC236}">
-                <a16:creationId xmlns:a16="http://schemas.microsoft.com/office/drawing/2014/main" id="{C93AC612-B9AF-4122-BB1A-2D5098F1E46E}"/>
+                <a16:creationId xmlns:a16="http://schemas.microsoft.com/office/drawing/2014/main" id="{6EF317A4-EC37-4BC8-B5BE-D6C0C1ADD8BD}"/>
               </a:ext>
             </a:extLst>
           </p:cNvPr>
@@ -5552,7 +8192,7 @@
           <p:cNvPr id="4" name="">
             <a:extLst xmlns:a="http://schemas.openxmlformats.org/drawingml/2006/main">
               <a:ext uri="{FF2B5EF4-FFF2-40B4-BE49-F238E27FC236}">
-                <a16:creationId xmlns:a16="http://schemas.microsoft.com/office/drawing/2014/main" id="{E90A26AF-687B-48B3-A9FD-68EFE41EBC9A}"/>
+                <a16:creationId xmlns:a16="http://schemas.microsoft.com/office/drawing/2014/main" id="{09143CAC-791C-4AB8-BCE8-7E0E13BA09DE}"/>
               </a:ext>
             </a:extLst>
           </p:cNvPr>
@@ -5610,7 +8250,7 @@
           <p:cNvPr id="5" name="">
             <a:extLst xmlns:a="http://schemas.openxmlformats.org/drawingml/2006/main">
               <a:ext uri="{FF2B5EF4-FFF2-40B4-BE49-F238E27FC236}">
-                <a16:creationId xmlns:a16="http://schemas.microsoft.com/office/drawing/2014/main" id="{353D77D6-8489-4941-B083-4A0B60B67886}"/>
+                <a16:creationId xmlns:a16="http://schemas.microsoft.com/office/drawing/2014/main" id="{089B08ED-3559-4311-BCA5-1292BA19AAD0}"/>
               </a:ext>
             </a:extLst>
           </p:cNvPr>
@@ -5645,7 +8285,7 @@
           <p:cNvPr id="6" name="">
             <a:extLst xmlns:a="http://schemas.openxmlformats.org/drawingml/2006/main">
               <a:ext uri="{FF2B5EF4-FFF2-40B4-BE49-F238E27FC236}">
-                <a16:creationId xmlns:a16="http://schemas.microsoft.com/office/drawing/2014/main" id="{1AF7AA68-DFEB-47E5-928C-7D47434D2EF1}"/>
+                <a16:creationId xmlns:a16="http://schemas.microsoft.com/office/drawing/2014/main" id="{073D30C4-C42A-4292-BE26-ADC882D2AFD4}"/>
               </a:ext>
             </a:extLst>
           </p:cNvPr>
@@ -5703,7 +8343,7 @@
           <p:cNvPr id="7" name="">
             <a:extLst xmlns:a="http://schemas.openxmlformats.org/drawingml/2006/main">
               <a:ext uri="{FF2B5EF4-FFF2-40B4-BE49-F238E27FC236}">
-                <a16:creationId xmlns:a16="http://schemas.microsoft.com/office/drawing/2014/main" id="{8080B8A6-1DF1-492C-8B96-2AEFC14EE003}"/>
+                <a16:creationId xmlns:a16="http://schemas.microsoft.com/office/drawing/2014/main" id="{80A29E82-F27E-4BBC-9AFC-389516A7E217}"/>
               </a:ext>
             </a:extLst>
           </p:cNvPr>
@@ -5761,7 +8401,7 @@
           <p:cNvPr id="8" name="">
             <a:extLst xmlns:a="http://schemas.openxmlformats.org/drawingml/2006/main">
               <a:ext uri="{FF2B5EF4-FFF2-40B4-BE49-F238E27FC236}">
-                <a16:creationId xmlns:a16="http://schemas.microsoft.com/office/drawing/2014/main" id="{FBE9B5E0-C4A5-41BC-B029-D0F883A6FB4A}"/>
+                <a16:creationId xmlns:a16="http://schemas.microsoft.com/office/drawing/2014/main" id="{0F108B8B-DA39-43DD-B269-91ABC4B0ED4C}"/>
               </a:ext>
             </a:extLst>
           </p:cNvPr>
@@ -5819,7 +8459,7 @@
           <p:cNvPr id="9" name="">
             <a:extLst xmlns:a="http://schemas.openxmlformats.org/drawingml/2006/main">
               <a:ext uri="{FF2B5EF4-FFF2-40B4-BE49-F238E27FC236}">
-                <a16:creationId xmlns:a16="http://schemas.microsoft.com/office/drawing/2014/main" id="{895D5E34-D301-4B26-9B52-14849B7AD579}"/>
+                <a16:creationId xmlns:a16="http://schemas.microsoft.com/office/drawing/2014/main" id="{E891CAA6-092C-43BC-B6D6-1129D2D0D2CF}"/>
               </a:ext>
             </a:extLst>
           </p:cNvPr>
@@ -5877,7 +8517,7 @@
           <p:cNvPr id="10" name="">
             <a:extLst xmlns:a="http://schemas.openxmlformats.org/drawingml/2006/main">
               <a:ext uri="{FF2B5EF4-FFF2-40B4-BE49-F238E27FC236}">
-                <a16:creationId xmlns:a16="http://schemas.microsoft.com/office/drawing/2014/main" id="{9414EB63-EBC9-4507-AE17-A8B6A641A0DC}"/>
+                <a16:creationId xmlns:a16="http://schemas.microsoft.com/office/drawing/2014/main" id="{52D811E4-F519-477B-951B-130F36297CD0}"/>
               </a:ext>
             </a:extLst>
           </p:cNvPr>
@@ -5935,7 +8575,7 @@
           <p:cNvPr id="11" name="">
             <a:extLst xmlns:a="http://schemas.openxmlformats.org/drawingml/2006/main">
               <a:ext uri="{FF2B5EF4-FFF2-40B4-BE49-F238E27FC236}">
-                <a16:creationId xmlns:a16="http://schemas.microsoft.com/office/drawing/2014/main" id="{35E5D1FB-69AB-4D97-8436-10AF8F21A5B0}"/>
+                <a16:creationId xmlns:a16="http://schemas.microsoft.com/office/drawing/2014/main" id="{E8121E0F-801E-4079-AD25-2F1C0C7DBC32}"/>
               </a:ext>
             </a:extLst>
           </p:cNvPr>
@@ -5993,7 +8633,7 @@
           <p:cNvPr id="12" name="">
             <a:extLst xmlns:a="http://schemas.openxmlformats.org/drawingml/2006/main">
               <a:ext uri="{FF2B5EF4-FFF2-40B4-BE49-F238E27FC236}">
-                <a16:creationId xmlns:a16="http://schemas.microsoft.com/office/drawing/2014/main" id="{1C1C1B1F-CC28-4164-A289-B62F2407239A}"/>
+                <a16:creationId xmlns:a16="http://schemas.microsoft.com/office/drawing/2014/main" id="{8955927A-2BA0-449E-9A63-6F5A0FD329BB}"/>
               </a:ext>
             </a:extLst>
           </p:cNvPr>
@@ -6051,7 +8691,7 @@
           <p:cNvPr id="13" name="">
             <a:extLst xmlns:a="http://schemas.openxmlformats.org/drawingml/2006/main">
               <a:ext uri="{FF2B5EF4-FFF2-40B4-BE49-F238E27FC236}">
-                <a16:creationId xmlns:a16="http://schemas.microsoft.com/office/drawing/2014/main" id="{0D85B503-4697-4B86-97E3-9FD82BD580C4}"/>
+                <a16:creationId xmlns:a16="http://schemas.microsoft.com/office/drawing/2014/main" id="{BE4547B1-34F5-451D-9A80-08BF6925E5E6}"/>
               </a:ext>
             </a:extLst>
           </p:cNvPr>
@@ -6109,7 +8749,7 @@
           <p:cNvPr id="14" name="">
             <a:extLst xmlns:a="http://schemas.openxmlformats.org/drawingml/2006/main">
               <a:ext uri="{FF2B5EF4-FFF2-40B4-BE49-F238E27FC236}">
-                <a16:creationId xmlns:a16="http://schemas.microsoft.com/office/drawing/2014/main" id="{F588A840-A2F6-4E71-8762-607E2E6D3145}"/>
+                <a16:creationId xmlns:a16="http://schemas.microsoft.com/office/drawing/2014/main" id="{DD1C1E94-C096-492E-8D0A-3BEE71B499ED}"/>
               </a:ext>
             </a:extLst>
           </p:cNvPr>
@@ -6144,7 +8784,7 @@
           <p:cNvPr id="15" name="">
             <a:extLst xmlns:a="http://schemas.openxmlformats.org/drawingml/2006/main">
               <a:ext uri="{FF2B5EF4-FFF2-40B4-BE49-F238E27FC236}">
-                <a16:creationId xmlns:a16="http://schemas.microsoft.com/office/drawing/2014/main" id="{30EC5EFC-B148-4C5C-A331-D447D6FA0F0E}"/>
+                <a16:creationId xmlns:a16="http://schemas.microsoft.com/office/drawing/2014/main" id="{81DC97D3-573F-44D2-9DF1-95AC78D871B0}"/>
               </a:ext>
             </a:extLst>
           </p:cNvPr>
@@ -6202,7 +8842,7 @@
           <p:cNvPr id="16" name="">
             <a:extLst xmlns:a="http://schemas.openxmlformats.org/drawingml/2006/main">
               <a:ext uri="{FF2B5EF4-FFF2-40B4-BE49-F238E27FC236}">
-                <a16:creationId xmlns:a16="http://schemas.microsoft.com/office/drawing/2014/main" id="{A20C974B-2D4F-46FB-8341-40F31E402B0C}"/>
+                <a16:creationId xmlns:a16="http://schemas.microsoft.com/office/drawing/2014/main" id="{7F39A3E8-B754-4147-87D4-8F6CE114E745}"/>
               </a:ext>
             </a:extLst>
           </p:cNvPr>
@@ -6235,7 +8875,7 @@
           <p:cNvPr id="17" name="">
             <a:extLst xmlns:a="http://schemas.openxmlformats.org/drawingml/2006/main">
               <a:ext uri="{FF2B5EF4-FFF2-40B4-BE49-F238E27FC236}">
-                <a16:creationId xmlns:a16="http://schemas.microsoft.com/office/drawing/2014/main" id="{89456378-FECD-4F29-A3E4-1736218178F5}"/>
+                <a16:creationId xmlns:a16="http://schemas.microsoft.com/office/drawing/2014/main" id="{908C141F-5716-403E-A2A1-CCBAF27AA922}"/>
               </a:ext>
             </a:extLst>
           </p:cNvPr>
@@ -6293,7 +8933,7 @@
           <p:cNvPr id="18" name="">
             <a:extLst xmlns:a="http://schemas.openxmlformats.org/drawingml/2006/main">
               <a:ext uri="{FF2B5EF4-FFF2-40B4-BE49-F238E27FC236}">
-                <a16:creationId xmlns:a16="http://schemas.microsoft.com/office/drawing/2014/main" id="{F571D8D8-D979-45F9-9C01-7956DB56DE71}"/>
+                <a16:creationId xmlns:a16="http://schemas.microsoft.com/office/drawing/2014/main" id="{418C2A73-A596-4F30-8BE1-1F1FEFFDE4B7}"/>
               </a:ext>
             </a:extLst>
           </p:cNvPr>
@@ -6326,7 +8966,7 @@
           <p:cNvPr id="19" name="">
             <a:extLst xmlns:a="http://schemas.openxmlformats.org/drawingml/2006/main">
               <a:ext uri="{FF2B5EF4-FFF2-40B4-BE49-F238E27FC236}">
-                <a16:creationId xmlns:a16="http://schemas.microsoft.com/office/drawing/2014/main" id="{F652FABE-012B-4B55-B142-E3220691DD7A}"/>
+                <a16:creationId xmlns:a16="http://schemas.microsoft.com/office/drawing/2014/main" id="{751361E9-7D6C-4C8C-8674-79C724079439}"/>
               </a:ext>
             </a:extLst>
           </p:cNvPr>
@@ -6384,7 +9024,7 @@
           <p:cNvPr id="20" name="">
             <a:extLst xmlns:a="http://schemas.openxmlformats.org/drawingml/2006/main">
               <a:ext uri="{FF2B5EF4-FFF2-40B4-BE49-F238E27FC236}">
-                <a16:creationId xmlns:a16="http://schemas.microsoft.com/office/drawing/2014/main" id="{87EC1654-932B-4D6E-AEC8-EDE6619D9E3F}"/>
+                <a16:creationId xmlns:a16="http://schemas.microsoft.com/office/drawing/2014/main" id="{A158FFB8-C156-4414-B4B3-25CC32D90279}"/>
               </a:ext>
             </a:extLst>
           </p:cNvPr>
@@ -6417,7 +9057,7 @@
           <p:cNvPr id="21" name="">
             <a:extLst xmlns:a="http://schemas.openxmlformats.org/drawingml/2006/main">
               <a:ext uri="{FF2B5EF4-FFF2-40B4-BE49-F238E27FC236}">
-                <a16:creationId xmlns:a16="http://schemas.microsoft.com/office/drawing/2014/main" id="{BBFAFFE3-66B1-4E00-AC89-6F85C64E8235}"/>
+                <a16:creationId xmlns:a16="http://schemas.microsoft.com/office/drawing/2014/main" id="{B4385138-6A0E-4BF4-93BE-C6BD05ECF510}"/>
               </a:ext>
             </a:extLst>
           </p:cNvPr>
@@ -6475,7 +9115,7 @@
           <p:cNvPr id="22" name="">
             <a:extLst xmlns:a="http://schemas.openxmlformats.org/drawingml/2006/main">
               <a:ext uri="{FF2B5EF4-FFF2-40B4-BE49-F238E27FC236}">
-                <a16:creationId xmlns:a16="http://schemas.microsoft.com/office/drawing/2014/main" id="{145C70DA-1CA6-49D5-BCE1-F7CC80FAABFD}"/>
+                <a16:creationId xmlns:a16="http://schemas.microsoft.com/office/drawing/2014/main" id="{ACD84513-48E7-4E7B-BA17-11F64211255F}"/>
               </a:ext>
             </a:extLst>
           </p:cNvPr>
@@ -6531,7 +9171,7 @@
     </p:spTree>
     <p:extLst>
       <p:ext uri="{BB962C8B-B14F-4D97-AF65-F5344CB8AC3E}">
-        <p14:creationId xmlns:p14="http://schemas.microsoft.com/office/powerpoint/2010/main" val="2081276882"/>
+        <p14:creationId xmlns:p14="http://schemas.microsoft.com/office/powerpoint/2010/main" val="626798632"/>
       </p:ext>
     </p:extLst>
   </p:cSld>
@@ -6562,7 +9202,7 @@
           <p:cNvPr id="30" name="">
             <a:extLst xmlns:a="http://schemas.openxmlformats.org/drawingml/2006/main">
               <a:ext uri="{FF2B5EF4-FFF2-40B4-BE49-F238E27FC236}">
-                <a16:creationId xmlns:a16="http://schemas.microsoft.com/office/drawing/2014/main" id="{336A9E4F-F73F-4AA3-AB9C-D50C0B678BE9}"/>
+                <a16:creationId xmlns:a16="http://schemas.microsoft.com/office/drawing/2014/main" id="{D23C28FE-A147-4E61-AF03-5F99FB1003BC}"/>
               </a:ext>
             </a:extLst>
           </p:cNvPr>
@@ -6595,7 +9235,7 @@
           <p:cNvPr id="2" name="">
             <a:extLst xmlns:a="http://schemas.openxmlformats.org/drawingml/2006/main">
               <a:ext uri="{FF2B5EF4-FFF2-40B4-BE49-F238E27FC236}">
-                <a16:creationId xmlns:a16="http://schemas.microsoft.com/office/drawing/2014/main" id="{F1B72E3A-6209-4A54-80A4-287B120D662E}"/>
+                <a16:creationId xmlns:a16="http://schemas.microsoft.com/office/drawing/2014/main" id="{0859EB82-448C-4151-9CBC-7D51063D6E10}"/>
               </a:ext>
             </a:extLst>
           </p:cNvPr>
@@ -6653,7 +9293,7 @@
           <p:cNvPr id="3" name="">
             <a:extLst xmlns:a="http://schemas.openxmlformats.org/drawingml/2006/main">
               <a:ext uri="{FF2B5EF4-FFF2-40B4-BE49-F238E27FC236}">
-                <a16:creationId xmlns:a16="http://schemas.microsoft.com/office/drawing/2014/main" id="{F7C459AD-E890-4849-9E74-4CE50FBBACA5}"/>
+                <a16:creationId xmlns:a16="http://schemas.microsoft.com/office/drawing/2014/main" id="{35BC8C0C-01B9-4431-BBD6-E5CC40ECCDF9}"/>
               </a:ext>
             </a:extLst>
           </p:cNvPr>
@@ -6711,7 +9351,7 @@
           <p:cNvPr id="4" name="">
             <a:extLst xmlns:a="http://schemas.openxmlformats.org/drawingml/2006/main">
               <a:ext uri="{FF2B5EF4-FFF2-40B4-BE49-F238E27FC236}">
-                <a16:creationId xmlns:a16="http://schemas.microsoft.com/office/drawing/2014/main" id="{D03F0762-EB00-464D-BC25-BDCBF995B99A}"/>
+                <a16:creationId xmlns:a16="http://schemas.microsoft.com/office/drawing/2014/main" id="{303B103F-66C5-4108-B30D-DFE717CB2E31}"/>
               </a:ext>
             </a:extLst>
           </p:cNvPr>
@@ -6746,7 +9386,7 @@
           <p:cNvPr id="5" name="">
             <a:extLst xmlns:a="http://schemas.openxmlformats.org/drawingml/2006/main">
               <a:ext uri="{FF2B5EF4-FFF2-40B4-BE49-F238E27FC236}">
-                <a16:creationId xmlns:a16="http://schemas.microsoft.com/office/drawing/2014/main" id="{A1DF4F80-C440-4B8F-99C0-683CDC3FA910}"/>
+                <a16:creationId xmlns:a16="http://schemas.microsoft.com/office/drawing/2014/main" id="{6C4A8C39-F4B1-4B0F-9973-7EF5D7B44A0E}"/>
               </a:ext>
             </a:extLst>
           </p:cNvPr>
@@ -6804,7 +9444,7 @@
           <p:cNvPr id="6" name="">
             <a:extLst xmlns:a="http://schemas.openxmlformats.org/drawingml/2006/main">
               <a:ext uri="{FF2B5EF4-FFF2-40B4-BE49-F238E27FC236}">
-                <a16:creationId xmlns:a16="http://schemas.microsoft.com/office/drawing/2014/main" id="{B65BE008-2D30-4E6F-B6A3-9D37A6C42DC1}"/>
+                <a16:creationId xmlns:a16="http://schemas.microsoft.com/office/drawing/2014/main" id="{13931C50-80F5-48E8-9374-EB0170E0AEBD}"/>
               </a:ext>
             </a:extLst>
           </p:cNvPr>
@@ -6862,7 +9502,7 @@
           <p:cNvPr id="7" name="">
             <a:extLst xmlns:a="http://schemas.openxmlformats.org/drawingml/2006/main">
               <a:ext uri="{FF2B5EF4-FFF2-40B4-BE49-F238E27FC236}">
-                <a16:creationId xmlns:a16="http://schemas.microsoft.com/office/drawing/2014/main" id="{176E162F-2733-4A99-BBE5-BCAB76180A94}"/>
+                <a16:creationId xmlns:a16="http://schemas.microsoft.com/office/drawing/2014/main" id="{17A61CE5-F237-4986-AB9E-33989C2486BF}"/>
               </a:ext>
             </a:extLst>
           </p:cNvPr>
@@ -6920,7 +9560,7 @@
           <p:cNvPr id="8" name="">
             <a:extLst xmlns:a="http://schemas.openxmlformats.org/drawingml/2006/main">
               <a:ext uri="{FF2B5EF4-FFF2-40B4-BE49-F238E27FC236}">
-                <a16:creationId xmlns:a16="http://schemas.microsoft.com/office/drawing/2014/main" id="{E1EA667F-B6F2-433F-8C50-CB05812A0DA9}"/>
+                <a16:creationId xmlns:a16="http://schemas.microsoft.com/office/drawing/2014/main" id="{3128097F-20EF-426B-B5A2-35064771FC04}"/>
               </a:ext>
             </a:extLst>
           </p:cNvPr>
@@ -6978,7 +9618,7 @@
           <p:cNvPr id="9" name="">
             <a:extLst xmlns:a="http://schemas.openxmlformats.org/drawingml/2006/main">
               <a:ext uri="{FF2B5EF4-FFF2-40B4-BE49-F238E27FC236}">
-                <a16:creationId xmlns:a16="http://schemas.microsoft.com/office/drawing/2014/main" id="{17E6F658-0BDC-4563-8490-2BFEF50C921A}"/>
+                <a16:creationId xmlns:a16="http://schemas.microsoft.com/office/drawing/2014/main" id="{D88CE963-3B1D-481B-8F3C-16B47EDB083C}"/>
               </a:ext>
             </a:extLst>
           </p:cNvPr>
@@ -7036,7 +9676,7 @@
           <p:cNvPr id="10" name="">
             <a:extLst xmlns:a="http://schemas.openxmlformats.org/drawingml/2006/main">
               <a:ext uri="{FF2B5EF4-FFF2-40B4-BE49-F238E27FC236}">
-                <a16:creationId xmlns:a16="http://schemas.microsoft.com/office/drawing/2014/main" id="{73AB5476-BEB8-45ED-A7D0-A1A54B22A182}"/>
+                <a16:creationId xmlns:a16="http://schemas.microsoft.com/office/drawing/2014/main" id="{DB3FBF32-BD20-45D7-944A-5C148F61C5CE}"/>
               </a:ext>
             </a:extLst>
           </p:cNvPr>
@@ -7094,7 +9734,7 @@
           <p:cNvPr id="11" name="">
             <a:extLst xmlns:a="http://schemas.openxmlformats.org/drawingml/2006/main">
               <a:ext uri="{FF2B5EF4-FFF2-40B4-BE49-F238E27FC236}">
-                <a16:creationId xmlns:a16="http://schemas.microsoft.com/office/drawing/2014/main" id="{FE24D57E-B131-4C7C-AF43-E7AC79C993E1}"/>
+                <a16:creationId xmlns:a16="http://schemas.microsoft.com/office/drawing/2014/main" id="{ECC68F91-4C6F-4B11-A017-04644FF6DE71}"/>
               </a:ext>
             </a:extLst>
           </p:cNvPr>
@@ -7152,7 +9792,7 @@
           <p:cNvPr id="12" name="">
             <a:extLst xmlns:a="http://schemas.openxmlformats.org/drawingml/2006/main">
               <a:ext uri="{FF2B5EF4-FFF2-40B4-BE49-F238E27FC236}">
-                <a16:creationId xmlns:a16="http://schemas.microsoft.com/office/drawing/2014/main" id="{33873F6F-884D-4A0A-8C35-3EA05E872927}"/>
+                <a16:creationId xmlns:a16="http://schemas.microsoft.com/office/drawing/2014/main" id="{4355E1F8-0BE4-474C-8C62-BCDE3168EF6C}"/>
               </a:ext>
             </a:extLst>
           </p:cNvPr>
@@ -7210,7 +9850,7 @@
           <p:cNvPr id="13" name="">
             <a:extLst xmlns:a="http://schemas.openxmlformats.org/drawingml/2006/main">
               <a:ext uri="{FF2B5EF4-FFF2-40B4-BE49-F238E27FC236}">
-                <a16:creationId xmlns:a16="http://schemas.microsoft.com/office/drawing/2014/main" id="{5D158A52-6930-44EA-8F2D-06F950B7EF8E}"/>
+                <a16:creationId xmlns:a16="http://schemas.microsoft.com/office/drawing/2014/main" id="{2DB6A2D2-293E-427C-A737-6261C7389088}"/>
               </a:ext>
             </a:extLst>
           </p:cNvPr>
@@ -7268,7 +9908,7 @@
           <p:cNvPr id="14" name="">
             <a:extLst xmlns:a="http://schemas.openxmlformats.org/drawingml/2006/main">
               <a:ext uri="{FF2B5EF4-FFF2-40B4-BE49-F238E27FC236}">
-                <a16:creationId xmlns:a16="http://schemas.microsoft.com/office/drawing/2014/main" id="{EC41558D-2D91-40B8-B4CD-0A25F5DBDD6A}"/>
+                <a16:creationId xmlns:a16="http://schemas.microsoft.com/office/drawing/2014/main" id="{65E5DB68-1BBD-4573-9D7F-F207A5AA6CA2}"/>
               </a:ext>
             </a:extLst>
           </p:cNvPr>
@@ -7326,7 +9966,7 @@
           <p:cNvPr id="15" name="">
             <a:extLst xmlns:a="http://schemas.openxmlformats.org/drawingml/2006/main">
               <a:ext uri="{FF2B5EF4-FFF2-40B4-BE49-F238E27FC236}">
-                <a16:creationId xmlns:a16="http://schemas.microsoft.com/office/drawing/2014/main" id="{F57F7974-1253-469E-A5A1-4D49DBDB2EB3}"/>
+                <a16:creationId xmlns:a16="http://schemas.microsoft.com/office/drawing/2014/main" id="{2A4FA848-683D-4FA1-A0EC-A1297FFC857F}"/>
               </a:ext>
             </a:extLst>
           </p:cNvPr>
@@ -7384,7 +10024,7 @@
           <p:cNvPr id="16" name="">
             <a:extLst xmlns:a="http://schemas.openxmlformats.org/drawingml/2006/main">
               <a:ext uri="{FF2B5EF4-FFF2-40B4-BE49-F238E27FC236}">
-                <a16:creationId xmlns:a16="http://schemas.microsoft.com/office/drawing/2014/main" id="{223DDBEF-FA3C-405D-9B6B-332F84EADE9F}"/>
+                <a16:creationId xmlns:a16="http://schemas.microsoft.com/office/drawing/2014/main" id="{2A405480-10D2-49EC-A28C-1FDB6A54810B}"/>
               </a:ext>
             </a:extLst>
           </p:cNvPr>
@@ -7442,7 +10082,7 @@
           <p:cNvPr id="17" name="">
             <a:extLst xmlns:a="http://schemas.openxmlformats.org/drawingml/2006/main">
               <a:ext uri="{FF2B5EF4-FFF2-40B4-BE49-F238E27FC236}">
-                <a16:creationId xmlns:a16="http://schemas.microsoft.com/office/drawing/2014/main" id="{4875E642-6458-47F4-B21B-C5A17F52E567}"/>
+                <a16:creationId xmlns:a16="http://schemas.microsoft.com/office/drawing/2014/main" id="{F3D4092E-25FA-4143-9A9A-FD1B5DF6D6AC}"/>
               </a:ext>
             </a:extLst>
           </p:cNvPr>
@@ -7500,7 +10140,7 @@
           <p:cNvPr id="18" name="">
             <a:extLst xmlns:a="http://schemas.openxmlformats.org/drawingml/2006/main">
               <a:ext uri="{FF2B5EF4-FFF2-40B4-BE49-F238E27FC236}">
-                <a16:creationId xmlns:a16="http://schemas.microsoft.com/office/drawing/2014/main" id="{5ED4274F-B28E-4A05-AD50-F7F54993C025}"/>
+                <a16:creationId xmlns:a16="http://schemas.microsoft.com/office/drawing/2014/main" id="{C1EA9E50-7FDB-47D1-B342-8FBD143048A3}"/>
               </a:ext>
             </a:extLst>
           </p:cNvPr>
@@ -7558,7 +10198,7 @@
           <p:cNvPr id="19" name="">
             <a:extLst xmlns:a="http://schemas.openxmlformats.org/drawingml/2006/main">
               <a:ext uri="{FF2B5EF4-FFF2-40B4-BE49-F238E27FC236}">
-                <a16:creationId xmlns:a16="http://schemas.microsoft.com/office/drawing/2014/main" id="{2B828A92-32EB-4E42-AEC8-CDEC7B028CCE}"/>
+                <a16:creationId xmlns:a16="http://schemas.microsoft.com/office/drawing/2014/main" id="{BDA5FCC7-8E29-43C7-A465-4FF09EEF9878}"/>
               </a:ext>
             </a:extLst>
           </p:cNvPr>
@@ -7616,7 +10256,7 @@
           <p:cNvPr id="20" name="">
             <a:extLst xmlns:a="http://schemas.openxmlformats.org/drawingml/2006/main">
               <a:ext uri="{FF2B5EF4-FFF2-40B4-BE49-F238E27FC236}">
-                <a16:creationId xmlns:a16="http://schemas.microsoft.com/office/drawing/2014/main" id="{53CB8797-6081-41D4-ABDA-E9D7EC18B981}"/>
+                <a16:creationId xmlns:a16="http://schemas.microsoft.com/office/drawing/2014/main" id="{FD5C31BD-DF00-4642-9E9A-EF1664EA4BBC}"/>
               </a:ext>
             </a:extLst>
           </p:cNvPr>
@@ -7674,7 +10314,7 @@
           <p:cNvPr id="21" name="">
             <a:extLst xmlns:a="http://schemas.openxmlformats.org/drawingml/2006/main">
               <a:ext uri="{FF2B5EF4-FFF2-40B4-BE49-F238E27FC236}">
-                <a16:creationId xmlns:a16="http://schemas.microsoft.com/office/drawing/2014/main" id="{9EC49DF2-7D71-43E1-A9FA-413783E0E040}"/>
+                <a16:creationId xmlns:a16="http://schemas.microsoft.com/office/drawing/2014/main" id="{80DB1D39-E7A6-47E3-AE2C-88973163B47D}"/>
               </a:ext>
             </a:extLst>
           </p:cNvPr>
@@ -7732,7 +10372,7 @@
           <p:cNvPr id="22" name="">
             <a:extLst xmlns:a="http://schemas.openxmlformats.org/drawingml/2006/main">
               <a:ext uri="{FF2B5EF4-FFF2-40B4-BE49-F238E27FC236}">
-                <a16:creationId xmlns:a16="http://schemas.microsoft.com/office/drawing/2014/main" id="{1262B0A9-5665-40BF-B229-90B983B3FE68}"/>
+                <a16:creationId xmlns:a16="http://schemas.microsoft.com/office/drawing/2014/main" id="{E0A06D6A-53CC-4C11-A984-31DD234C205F}"/>
               </a:ext>
             </a:extLst>
           </p:cNvPr>
@@ -7790,7 +10430,7 @@
           <p:cNvPr id="23" name="">
             <a:extLst xmlns:a="http://schemas.openxmlformats.org/drawingml/2006/main">
               <a:ext uri="{FF2B5EF4-FFF2-40B4-BE49-F238E27FC236}">
-                <a16:creationId xmlns:a16="http://schemas.microsoft.com/office/drawing/2014/main" id="{17B5DFAC-47A7-4B6F-A843-068490C04ED1}"/>
+                <a16:creationId xmlns:a16="http://schemas.microsoft.com/office/drawing/2014/main" id="{0398A380-A0D2-439E-B3CB-CF734B9C5703}"/>
               </a:ext>
             </a:extLst>
           </p:cNvPr>
@@ -7848,7 +10488,7 @@
           <p:cNvPr id="24" name="">
             <a:extLst xmlns:a="http://schemas.openxmlformats.org/drawingml/2006/main">
               <a:ext uri="{FF2B5EF4-FFF2-40B4-BE49-F238E27FC236}">
-                <a16:creationId xmlns:a16="http://schemas.microsoft.com/office/drawing/2014/main" id="{F50389CD-F07D-42DE-BBD5-3492FDF5EEB1}"/>
+                <a16:creationId xmlns:a16="http://schemas.microsoft.com/office/drawing/2014/main" id="{AC622A41-4670-43B6-ADC3-6166D428D556}"/>
               </a:ext>
             </a:extLst>
           </p:cNvPr>
@@ -7906,7 +10546,7 @@
           <p:cNvPr id="25" name="">
             <a:extLst xmlns:a="http://schemas.openxmlformats.org/drawingml/2006/main">
               <a:ext uri="{FF2B5EF4-FFF2-40B4-BE49-F238E27FC236}">
-                <a16:creationId xmlns:a16="http://schemas.microsoft.com/office/drawing/2014/main" id="{D0050560-3EB9-44A8-8E3F-8ECF77DCA43E}"/>
+                <a16:creationId xmlns:a16="http://schemas.microsoft.com/office/drawing/2014/main" id="{85F30BAC-8714-474B-BD56-152A5C73859C}"/>
               </a:ext>
             </a:extLst>
           </p:cNvPr>
@@ -7964,7 +10604,7 @@
           <p:cNvPr id="26" name="">
             <a:extLst xmlns:a="http://schemas.openxmlformats.org/drawingml/2006/main">
               <a:ext uri="{FF2B5EF4-FFF2-40B4-BE49-F238E27FC236}">
-                <a16:creationId xmlns:a16="http://schemas.microsoft.com/office/drawing/2014/main" id="{EB908E98-D073-434E-B180-0653D2371CB8}"/>
+                <a16:creationId xmlns:a16="http://schemas.microsoft.com/office/drawing/2014/main" id="{435D8FC1-7783-49BD-AAF9-D72D97CF7E9E}"/>
               </a:ext>
             </a:extLst>
           </p:cNvPr>
@@ -8068,7 +10708,7 @@
           <p:cNvPr id="27" name="">
             <a:extLst xmlns:a="http://schemas.openxmlformats.org/drawingml/2006/main">
               <a:ext uri="{FF2B5EF4-FFF2-40B4-BE49-F238E27FC236}">
-                <a16:creationId xmlns:a16="http://schemas.microsoft.com/office/drawing/2014/main" id="{34DC5A7D-842C-4565-97B4-7ED2CA66C678}"/>
+                <a16:creationId xmlns:a16="http://schemas.microsoft.com/office/drawing/2014/main" id="{902DC3A6-73C7-47DD-9215-CEB5DE33A763}"/>
               </a:ext>
             </a:extLst>
           </p:cNvPr>
@@ -8103,7 +10743,7 @@
           <p:cNvPr id="28" name="">
             <a:extLst xmlns:a="http://schemas.openxmlformats.org/drawingml/2006/main">
               <a:ext uri="{FF2B5EF4-FFF2-40B4-BE49-F238E27FC236}">
-                <a16:creationId xmlns:a16="http://schemas.microsoft.com/office/drawing/2014/main" id="{0477DBCB-1123-40CF-99EF-7A8FD4A738F3}"/>
+                <a16:creationId xmlns:a16="http://schemas.microsoft.com/office/drawing/2014/main" id="{85697041-0E22-4424-96D5-AADFDAB731F1}"/>
               </a:ext>
             </a:extLst>
           </p:cNvPr>
@@ -8161,7 +10801,7 @@
           <p:cNvPr id="29" name="">
             <a:extLst xmlns:a="http://schemas.openxmlformats.org/drawingml/2006/main">
               <a:ext uri="{FF2B5EF4-FFF2-40B4-BE49-F238E27FC236}">
-                <a16:creationId xmlns:a16="http://schemas.microsoft.com/office/drawing/2014/main" id="{D168EB48-66B2-487A-87C5-E48026C199C8}"/>
+                <a16:creationId xmlns:a16="http://schemas.microsoft.com/office/drawing/2014/main" id="{0E1E2F9E-CC37-4412-84C2-7174AFF42162}"/>
               </a:ext>
             </a:extLst>
           </p:cNvPr>
@@ -8217,7 +10857,7 @@
     </p:spTree>
     <p:extLst>
       <p:ext uri="{BB962C8B-B14F-4D97-AF65-F5344CB8AC3E}">
-        <p14:creationId xmlns:p14="http://schemas.microsoft.com/office/powerpoint/2010/main" val="553331510"/>
+        <p14:creationId xmlns:p14="http://schemas.microsoft.com/office/powerpoint/2010/main" val="1052718739"/>
       </p:ext>
     </p:extLst>
   </p:cSld>
@@ -8245,10 +10885,10 @@
       </p:grpSpPr>
       <p:sp>
         <p:nvSpPr>
-          <p:cNvPr id="25" name="">
-            <a:extLst xmlns:a="http://schemas.openxmlformats.org/drawingml/2006/main">
-              <a:ext uri="{FF2B5EF4-FFF2-40B4-BE49-F238E27FC236}">
-                <a16:creationId xmlns:a16="http://schemas.microsoft.com/office/drawing/2014/main" id="{BA35ADDF-587F-4FAC-9000-036F8AF4B234}"/>
+          <p:cNvPr id="27" name="">
+            <a:extLst xmlns:a="http://schemas.openxmlformats.org/drawingml/2006/main">
+              <a:ext uri="{FF2B5EF4-FFF2-40B4-BE49-F238E27FC236}">
+                <a16:creationId xmlns:a16="http://schemas.microsoft.com/office/drawing/2014/main" id="{CB4DF0D9-B641-4458-816B-B3595BE306DE}"/>
               </a:ext>
             </a:extLst>
           </p:cNvPr>
@@ -8281,7 +10921,7 @@
           <p:cNvPr id="2" name="">
             <a:extLst xmlns:a="http://schemas.openxmlformats.org/drawingml/2006/main">
               <a:ext uri="{FF2B5EF4-FFF2-40B4-BE49-F238E27FC236}">
-                <a16:creationId xmlns:a16="http://schemas.microsoft.com/office/drawing/2014/main" id="{402E5AF5-05B3-4D20-BD18-C12FE224C404}"/>
+                <a16:creationId xmlns:a16="http://schemas.microsoft.com/office/drawing/2014/main" id="{25AAC42D-25DD-4DDD-B288-060C01D61AD5}"/>
               </a:ext>
             </a:extLst>
           </p:cNvPr>
@@ -8329,7 +10969,7 @@
                 <a:ea typeface="Microsoft YaHei"/>
                 <a:cs typeface="Microsoft YaHei"/>
               </a:rPr>
-              <a:t>收束：遇到 set 比较器，按这条链路作答</a:t>
+              <a:t>lower_bound 与 upper_bound：找的是两个不同边界</a:t>
             </a:r>
           </a:p>
         </p:txBody>
@@ -8339,7 +10979,7 @@
           <p:cNvPr id="3" name="">
             <a:extLst xmlns:a="http://schemas.openxmlformats.org/drawingml/2006/main">
               <a:ext uri="{FF2B5EF4-FFF2-40B4-BE49-F238E27FC236}">
-                <a16:creationId xmlns:a16="http://schemas.microsoft.com/office/drawing/2014/main" id="{6BBDA6ED-DD22-46AE-B0F1-11C86ECEB121}"/>
+                <a16:creationId xmlns:a16="http://schemas.microsoft.com/office/drawing/2014/main" id="{35679C18-CD1D-47B0-8ABD-D7CA9F3F2B25}"/>
               </a:ext>
             </a:extLst>
           </p:cNvPr>
@@ -8397,23 +11037,81 @@
           <p:cNvPr id="4" name="">
             <a:extLst xmlns:a="http://schemas.openxmlformats.org/drawingml/2006/main">
               <a:ext uri="{FF2B5EF4-FFF2-40B4-BE49-F238E27FC236}">
-                <a16:creationId xmlns:a16="http://schemas.microsoft.com/office/drawing/2014/main" id="{AA0FAD5F-DF29-470D-ABB1-651B8B16EC8E}"/>
-              </a:ext>
-            </a:extLst>
-          </p:cNvPr>
-          <p:cNvSpPr>
-            <a:spLocks xmlns:a="http://schemas.openxmlformats.org/drawingml/2006/main" noGrp="1"/>
-          </p:cNvSpPr>
-          <p:nvPr/>
-        </p:nvSpPr>
-        <p:spPr>
-          <a:xfrm xmlns:a="http://schemas.openxmlformats.org/drawingml/2006/main">
-            <a:off x="685800" y="2133600"/>
-            <a:ext cx="2266950" cy="2209800"/>
+                <a16:creationId xmlns:a16="http://schemas.microsoft.com/office/drawing/2014/main" id="{A77E91A0-C184-498C-8AC0-488C23F7264E}"/>
+              </a:ext>
+            </a:extLst>
+          </p:cNvPr>
+          <p:cNvSpPr>
+            <a:spLocks xmlns:a="http://schemas.openxmlformats.org/drawingml/2006/main" noGrp="1"/>
+          </p:cNvSpPr>
+          <p:nvPr/>
+        </p:nvSpPr>
+        <p:spPr>
+          <a:xfrm xmlns:a="http://schemas.openxmlformats.org/drawingml/2006/main">
+            <a:off x="685800" y="1352550"/>
+            <a:ext cx="1714500" cy="342900"/>
+          </a:xfrm>
+          <a:prstGeom xmlns:a="http://schemas.openxmlformats.org/drawingml/2006/main" prst="rect">
+            <a:avLst/>
+          </a:prstGeom>
+          <a:noFill xmlns:a="http://schemas.openxmlformats.org/drawingml/2006/main"/>
+          <a:ln xmlns:a="http://schemas.openxmlformats.org/drawingml/2006/main" w="0">
+            <a:noFill/>
+            <a:prstDash val="solid"/>
+          </a:ln>
+        </p:spPr>
+        <p:txBody>
+          <a:bodyPr xmlns:a="http://schemas.openxmlformats.org/drawingml/2006/main" lIns="0" tIns="0" rIns="0" bIns="0" anchor="t">
+            <a:normAutofit fontScale="100000"/>
+          </a:bodyPr>
+          <a:lstStyle xmlns:a="http://schemas.openxmlformats.org/drawingml/2006/main"/>
+          <a:p xmlns:a="http://schemas.openxmlformats.org/drawingml/2006/main">
+            <a:pPr algn="l">
+              <a:defRPr sz="1875" b="1">
+                <a:solidFill>
+                  <a:srgbClr val="5F6B7A"/>
+                </a:solidFill>
+                <a:latin typeface="Microsoft YaHei"/>
+                <a:ea typeface="Microsoft YaHei"/>
+                <a:cs typeface="Microsoft YaHei"/>
+              </a:defRPr>
+            </a:pPr>
+            <a:r>
+              <a:rPr sz="1875" b="1">
+                <a:solidFill>
+                  <a:srgbClr val="5F6B7A"/>
+                </a:solidFill>
+                <a:latin typeface="Microsoft YaHei"/>
+                <a:ea typeface="Microsoft YaHei"/>
+                <a:cs typeface="Microsoft YaHei"/>
+              </a:rPr>
+              <a:t>有序序列：</a:t>
+            </a:r>
+          </a:p>
+        </p:txBody>
+      </p:sp>
+      <p:sp>
+        <p:nvSpPr>
+          <p:cNvPr id="5" name="">
+            <a:extLst xmlns:a="http://schemas.openxmlformats.org/drawingml/2006/main">
+              <a:ext uri="{FF2B5EF4-FFF2-40B4-BE49-F238E27FC236}">
+                <a16:creationId xmlns:a16="http://schemas.microsoft.com/office/drawing/2014/main" id="{EAB96493-1A64-4D24-81EF-53558F6185AE}"/>
+              </a:ext>
+            </a:extLst>
+          </p:cNvPr>
+          <p:cNvSpPr>
+            <a:spLocks xmlns:a="http://schemas.openxmlformats.org/drawingml/2006/main" noGrp="1"/>
+          </p:cNvSpPr>
+          <p:nvPr/>
+        </p:nvSpPr>
+        <p:spPr>
+          <a:xfrm xmlns:a="http://schemas.openxmlformats.org/drawingml/2006/main">
+            <a:off x="2857500" y="1219200"/>
+            <a:ext cx="781050" cy="685800"/>
           </a:xfrm>
           <a:prstGeom xmlns:a="http://schemas.openxmlformats.org/drawingml/2006/main" prst="roundRect">
             <a:avLst>
-              <a:gd name="adj" fmla="val 5172"/>
+              <a:gd name="adj" fmla="val 16667"/>
             </a:avLst>
           </a:prstGeom>
           <a:solidFill xmlns:a="http://schemas.openxmlformats.org/drawingml/2006/main">
@@ -8429,219 +11127,22 @@
       </p:sp>
       <p:sp>
         <p:nvSpPr>
-          <p:cNvPr id="5" name="">
-            <a:extLst xmlns:a="http://schemas.openxmlformats.org/drawingml/2006/main">
-              <a:ext uri="{FF2B5EF4-FFF2-40B4-BE49-F238E27FC236}">
-                <a16:creationId xmlns:a16="http://schemas.microsoft.com/office/drawing/2014/main" id="{9110B18D-423B-4853-A138-3A47997073DB}"/>
-              </a:ext>
-            </a:extLst>
-          </p:cNvPr>
-          <p:cNvSpPr>
-            <a:spLocks xmlns:a="http://schemas.openxmlformats.org/drawingml/2006/main" noGrp="1"/>
-          </p:cNvSpPr>
-          <p:nvPr/>
-        </p:nvSpPr>
-        <p:spPr>
-          <a:xfrm xmlns:a="http://schemas.openxmlformats.org/drawingml/2006/main">
-            <a:off x="895350" y="2343150"/>
-            <a:ext cx="381000" cy="333375"/>
-          </a:xfrm>
-          <a:prstGeom xmlns:a="http://schemas.openxmlformats.org/drawingml/2006/main" prst="rect">
-            <a:avLst/>
-          </a:prstGeom>
-          <a:noFill xmlns:a="http://schemas.openxmlformats.org/drawingml/2006/main"/>
-          <a:ln xmlns:a="http://schemas.openxmlformats.org/drawingml/2006/main" w="0">
-            <a:noFill/>
-            <a:prstDash val="solid"/>
-          </a:ln>
-        </p:spPr>
-        <p:txBody>
-          <a:bodyPr xmlns:a="http://schemas.openxmlformats.org/drawingml/2006/main" lIns="0" tIns="0" rIns="0" bIns="0" anchor="t">
-            <a:normAutofit fontScale="100000"/>
-          </a:bodyPr>
-          <a:lstStyle xmlns:a="http://schemas.openxmlformats.org/drawingml/2006/main"/>
-          <a:p xmlns:a="http://schemas.openxmlformats.org/drawingml/2006/main">
-            <a:pPr algn="l">
-              <a:defRPr sz="1875" b="1">
-                <a:solidFill>
-                  <a:srgbClr val="2563EB"/>
-                </a:solidFill>
-                <a:latin typeface="Microsoft YaHei"/>
-                <a:ea typeface="Microsoft YaHei"/>
-                <a:cs typeface="Microsoft YaHei"/>
-              </a:defRPr>
-            </a:pPr>
-            <a:r>
-              <a:rPr sz="1875" b="1">
-                <a:solidFill>
-                  <a:srgbClr val="2563EB"/>
-                </a:solidFill>
-                <a:latin typeface="Microsoft YaHei"/>
-                <a:ea typeface="Microsoft YaHei"/>
-                <a:cs typeface="Microsoft YaHei"/>
-              </a:rPr>
-              <a:t>1</a:t>
-            </a:r>
-          </a:p>
-        </p:txBody>
-      </p:sp>
-      <p:sp>
-        <p:nvSpPr>
           <p:cNvPr id="6" name="">
             <a:extLst xmlns:a="http://schemas.openxmlformats.org/drawingml/2006/main">
               <a:ext uri="{FF2B5EF4-FFF2-40B4-BE49-F238E27FC236}">
-                <a16:creationId xmlns:a16="http://schemas.microsoft.com/office/drawing/2014/main" id="{19A745F4-B6A4-4E24-8B0A-64334FB3E20C}"/>
-              </a:ext>
-            </a:extLst>
-          </p:cNvPr>
-          <p:cNvSpPr>
-            <a:spLocks xmlns:a="http://schemas.openxmlformats.org/drawingml/2006/main" noGrp="1"/>
-          </p:cNvSpPr>
-          <p:nvPr/>
-        </p:nvSpPr>
-        <p:spPr>
-          <a:xfrm xmlns:a="http://schemas.openxmlformats.org/drawingml/2006/main">
-            <a:off x="895350" y="2800350"/>
-            <a:ext cx="1809750" cy="381000"/>
-          </a:xfrm>
-          <a:prstGeom xmlns:a="http://schemas.openxmlformats.org/drawingml/2006/main" prst="rect">
-            <a:avLst/>
-          </a:prstGeom>
-          <a:noFill xmlns:a="http://schemas.openxmlformats.org/drawingml/2006/main"/>
-          <a:ln xmlns:a="http://schemas.openxmlformats.org/drawingml/2006/main" w="0">
-            <a:noFill/>
-            <a:prstDash val="solid"/>
-          </a:ln>
-        </p:spPr>
-        <p:txBody>
-          <a:bodyPr xmlns:a="http://schemas.openxmlformats.org/drawingml/2006/main" lIns="0" tIns="0" rIns="0" bIns="0" anchor="t">
-            <a:normAutofit fontScale="100000"/>
-          </a:bodyPr>
-          <a:lstStyle xmlns:a="http://schemas.openxmlformats.org/drawingml/2006/main"/>
-          <a:p xmlns:a="http://schemas.openxmlformats.org/drawingml/2006/main">
-            <a:pPr algn="l">
-              <a:defRPr sz="2175" b="1">
-                <a:solidFill>
-                  <a:srgbClr val="101828"/>
-                </a:solidFill>
-                <a:latin typeface="Microsoft YaHei"/>
-                <a:ea typeface="Microsoft YaHei"/>
-                <a:cs typeface="Microsoft YaHei"/>
-              </a:defRPr>
-            </a:pPr>
-            <a:r>
-              <a:rPr sz="2175" b="1">
-                <a:solidFill>
-                  <a:srgbClr val="101828"/>
-                </a:solidFill>
-                <a:latin typeface="Microsoft YaHei"/>
-                <a:ea typeface="Microsoft YaHei"/>
-                <a:cs typeface="Microsoft YaHei"/>
-              </a:rPr>
-              <a:t>看声明</a:t>
-            </a:r>
-          </a:p>
-        </p:txBody>
-      </p:sp>
-      <p:sp>
-        <p:nvSpPr>
-          <p:cNvPr id="7" name="">
-            <a:extLst xmlns:a="http://schemas.openxmlformats.org/drawingml/2006/main">
-              <a:ext uri="{FF2B5EF4-FFF2-40B4-BE49-F238E27FC236}">
-                <a16:creationId xmlns:a16="http://schemas.microsoft.com/office/drawing/2014/main" id="{6A1533C1-CE8B-42E5-8D56-48837A817361}"/>
-              </a:ext>
-            </a:extLst>
-          </p:cNvPr>
-          <p:cNvSpPr>
-            <a:spLocks xmlns:a="http://schemas.openxmlformats.org/drawingml/2006/main" noGrp="1"/>
-          </p:cNvSpPr>
-          <p:nvPr/>
-        </p:nvSpPr>
-        <p:spPr>
-          <a:xfrm xmlns:a="http://schemas.openxmlformats.org/drawingml/2006/main">
-            <a:off x="895350" y="3381375"/>
-            <a:ext cx="1847850" cy="666750"/>
-          </a:xfrm>
-          <a:prstGeom xmlns:a="http://schemas.openxmlformats.org/drawingml/2006/main" prst="rect">
-            <a:avLst/>
-          </a:prstGeom>
-          <a:noFill xmlns:a="http://schemas.openxmlformats.org/drawingml/2006/main"/>
-          <a:ln xmlns:a="http://schemas.openxmlformats.org/drawingml/2006/main" w="0">
-            <a:noFill/>
-            <a:prstDash val="solid"/>
-          </a:ln>
-        </p:spPr>
-        <p:txBody>
-          <a:bodyPr xmlns:a="http://schemas.openxmlformats.org/drawingml/2006/main" lIns="0" tIns="0" rIns="0" bIns="0" anchor="t">
-            <a:normAutofit fontScale="100000"/>
-          </a:bodyPr>
-          <a:lstStyle xmlns:a="http://schemas.openxmlformats.org/drawingml/2006/main"/>
-          <a:p xmlns:a="http://schemas.openxmlformats.org/drawingml/2006/main">
-            <a:pPr algn="l">
-              <a:defRPr sz="1575" b="0">
-                <a:solidFill>
-                  <a:srgbClr val="5F6B7A"/>
-                </a:solidFill>
-                <a:latin typeface="Microsoft YaHei"/>
-                <a:ea typeface="Microsoft YaHei"/>
-                <a:cs typeface="Microsoft YaHei"/>
-              </a:defRPr>
-            </a:pPr>
-            <a:r>
-              <a:rPr sz="1575" b="0">
-                <a:solidFill>
-                  <a:srgbClr val="5F6B7A"/>
-                </a:solidFill>
-                <a:latin typeface="Microsoft YaHei"/>
-                <a:ea typeface="Microsoft YaHei"/>
-                <a:cs typeface="Microsoft YaHei"/>
-              </a:rPr>
-              <a:t>T 存什么？</a:t>
-            </a:r>
-          </a:p>
-          <a:p xmlns:a="http://schemas.openxmlformats.org/drawingml/2006/main">
-            <a:pPr algn="l">
-              <a:defRPr sz="1575" b="0">
-                <a:solidFill>
-                  <a:srgbClr val="5F6B7A"/>
-                </a:solidFill>
-                <a:latin typeface="Microsoft YaHei"/>
-                <a:ea typeface="Microsoft YaHei"/>
-                <a:cs typeface="Microsoft YaHei"/>
-              </a:defRPr>
-            </a:pPr>
-            <a:r>
-              <a:rPr sz="1575" b="0">
-                <a:solidFill>
-                  <a:srgbClr val="5F6B7A"/>
-                </a:solidFill>
-                <a:latin typeface="Microsoft YaHei"/>
-                <a:ea typeface="Microsoft YaHei"/>
-                <a:cs typeface="Microsoft YaHei"/>
-              </a:rPr>
-              <a:t>Compare 是谁？</a:t>
-            </a:r>
-          </a:p>
-        </p:txBody>
-      </p:sp>
-      <p:sp>
-        <p:nvSpPr>
-          <p:cNvPr id="8" name="">
-            <a:extLst xmlns:a="http://schemas.openxmlformats.org/drawingml/2006/main">
-              <a:ext uri="{FF2B5EF4-FFF2-40B4-BE49-F238E27FC236}">
-                <a16:creationId xmlns:a16="http://schemas.microsoft.com/office/drawing/2014/main" id="{C17120D7-CCDD-4ED9-81EF-959C625E0862}"/>
-              </a:ext>
-            </a:extLst>
-          </p:cNvPr>
-          <p:cNvSpPr>
-            <a:spLocks xmlns:a="http://schemas.openxmlformats.org/drawingml/2006/main" noGrp="1"/>
-          </p:cNvSpPr>
-          <p:nvPr/>
-        </p:nvSpPr>
-        <p:spPr>
-          <a:xfrm xmlns:a="http://schemas.openxmlformats.org/drawingml/2006/main">
-            <a:off x="3057525" y="2952750"/>
-            <a:ext cx="342900" cy="342900"/>
+                <a16:creationId xmlns:a16="http://schemas.microsoft.com/office/drawing/2014/main" id="{AEAF0640-8B68-4810-84B5-F94D3019DAB4}"/>
+              </a:ext>
+            </a:extLst>
+          </p:cNvPr>
+          <p:cNvSpPr>
+            <a:spLocks xmlns:a="http://schemas.openxmlformats.org/drawingml/2006/main" noGrp="1"/>
+          </p:cNvSpPr>
+          <p:nvPr/>
+        </p:nvSpPr>
+        <p:spPr>
+          <a:xfrm xmlns:a="http://schemas.openxmlformats.org/drawingml/2006/main">
+            <a:off x="2857500" y="1390650"/>
+            <a:ext cx="781050" cy="342900"/>
           </a:xfrm>
           <a:prstGeom xmlns:a="http://schemas.openxmlformats.org/drawingml/2006/main" prst="rect">
             <a:avLst/>
@@ -8661,7 +11162,7 @@
             <a:pPr algn="ctr">
               <a:defRPr sz="2100" b="1">
                 <a:solidFill>
-                  <a:srgbClr val="2563EB"/>
+                  <a:srgbClr val="101828"/>
                 </a:solidFill>
                 <a:latin typeface="Microsoft YaHei"/>
                 <a:ea typeface="Microsoft YaHei"/>
@@ -8671,39 +11172,318 @@
             <a:r>
               <a:rPr sz="2100" b="1">
                 <a:solidFill>
-                  <a:srgbClr val="2563EB"/>
-                </a:solidFill>
-                <a:latin typeface="Microsoft YaHei"/>
-                <a:ea typeface="Microsoft YaHei"/>
-                <a:cs typeface="Microsoft YaHei"/>
-              </a:rPr>
-              <a:t>→</a:t>
-            </a:r>
-          </a:p>
-        </p:txBody>
-      </p:sp>
-      <p:sp>
-        <p:nvSpPr>
-          <p:cNvPr id="9" name="">
-            <a:extLst xmlns:a="http://schemas.openxmlformats.org/drawingml/2006/main">
-              <a:ext uri="{FF2B5EF4-FFF2-40B4-BE49-F238E27FC236}">
-                <a16:creationId xmlns:a16="http://schemas.microsoft.com/office/drawing/2014/main" id="{9ED91531-127A-4798-BBE9-3191545AB9F4}"/>
-              </a:ext>
-            </a:extLst>
-          </p:cNvPr>
-          <p:cNvSpPr>
-            <a:spLocks xmlns:a="http://schemas.openxmlformats.org/drawingml/2006/main" noGrp="1"/>
-          </p:cNvSpPr>
-          <p:nvPr/>
-        </p:nvSpPr>
-        <p:spPr>
-          <a:xfrm xmlns:a="http://schemas.openxmlformats.org/drawingml/2006/main">
-            <a:off x="3505200" y="2133600"/>
-            <a:ext cx="2266950" cy="2209800"/>
+                  <a:srgbClr val="101828"/>
+                </a:solidFill>
+                <a:latin typeface="Microsoft YaHei"/>
+                <a:ea typeface="Microsoft YaHei"/>
+                <a:cs typeface="Microsoft YaHei"/>
+              </a:rPr>
+              <a:t>1</a:t>
+            </a:r>
+          </a:p>
+        </p:txBody>
+      </p:sp>
+      <p:sp>
+        <p:nvSpPr>
+          <p:cNvPr id="7" name="">
+            <a:extLst xmlns:a="http://schemas.openxmlformats.org/drawingml/2006/main">
+              <a:ext uri="{FF2B5EF4-FFF2-40B4-BE49-F238E27FC236}">
+                <a16:creationId xmlns:a16="http://schemas.microsoft.com/office/drawing/2014/main" id="{185CE405-AC7C-4376-BD1C-8376E09089A8}"/>
+              </a:ext>
+            </a:extLst>
+          </p:cNvPr>
+          <p:cNvSpPr>
+            <a:spLocks xmlns:a="http://schemas.openxmlformats.org/drawingml/2006/main" noGrp="1"/>
+          </p:cNvSpPr>
+          <p:nvPr/>
+        </p:nvSpPr>
+        <p:spPr>
+          <a:xfrm xmlns:a="http://schemas.openxmlformats.org/drawingml/2006/main">
+            <a:off x="3924300" y="1219200"/>
+            <a:ext cx="781050" cy="685800"/>
           </a:xfrm>
           <a:prstGeom xmlns:a="http://schemas.openxmlformats.org/drawingml/2006/main" prst="roundRect">
             <a:avLst>
-              <a:gd name="adj" fmla="val 5172"/>
+              <a:gd name="adj" fmla="val 16667"/>
+            </a:avLst>
+          </a:prstGeom>
+          <a:solidFill xmlns:a="http://schemas.openxmlformats.org/drawingml/2006/main">
+            <a:srgbClr val="EAF1FF"/>
+          </a:solidFill>
+          <a:ln xmlns:a="http://schemas.openxmlformats.org/drawingml/2006/main" w="9525">
+            <a:solidFill>
+              <a:srgbClr val="8FB3FF"/>
+            </a:solidFill>
+            <a:prstDash val="solid"/>
+          </a:ln>
+        </p:spPr>
+      </p:sp>
+      <p:sp>
+        <p:nvSpPr>
+          <p:cNvPr id="8" name="">
+            <a:extLst xmlns:a="http://schemas.openxmlformats.org/drawingml/2006/main">
+              <a:ext uri="{FF2B5EF4-FFF2-40B4-BE49-F238E27FC236}">
+                <a16:creationId xmlns:a16="http://schemas.microsoft.com/office/drawing/2014/main" id="{C6AA06A0-7B4B-4898-8B29-EFBD2A3F8191}"/>
+              </a:ext>
+            </a:extLst>
+          </p:cNvPr>
+          <p:cNvSpPr>
+            <a:spLocks xmlns:a="http://schemas.openxmlformats.org/drawingml/2006/main" noGrp="1"/>
+          </p:cNvSpPr>
+          <p:nvPr/>
+        </p:nvSpPr>
+        <p:spPr>
+          <a:xfrm xmlns:a="http://schemas.openxmlformats.org/drawingml/2006/main">
+            <a:off x="3924300" y="1390650"/>
+            <a:ext cx="781050" cy="342900"/>
+          </a:xfrm>
+          <a:prstGeom xmlns:a="http://schemas.openxmlformats.org/drawingml/2006/main" prst="rect">
+            <a:avLst/>
+          </a:prstGeom>
+          <a:noFill xmlns:a="http://schemas.openxmlformats.org/drawingml/2006/main"/>
+          <a:ln xmlns:a="http://schemas.openxmlformats.org/drawingml/2006/main" w="0">
+            <a:noFill/>
+            <a:prstDash val="solid"/>
+          </a:ln>
+        </p:spPr>
+        <p:txBody>
+          <a:bodyPr xmlns:a="http://schemas.openxmlformats.org/drawingml/2006/main" lIns="0" tIns="0" rIns="0" bIns="0" anchor="t">
+            <a:normAutofit fontScale="100000"/>
+          </a:bodyPr>
+          <a:lstStyle xmlns:a="http://schemas.openxmlformats.org/drawingml/2006/main"/>
+          <a:p xmlns:a="http://schemas.openxmlformats.org/drawingml/2006/main">
+            <a:pPr algn="ctr">
+              <a:defRPr sz="2100" b="1">
+                <a:solidFill>
+                  <a:srgbClr val="2563EB"/>
+                </a:solidFill>
+                <a:latin typeface="Microsoft YaHei"/>
+                <a:ea typeface="Microsoft YaHei"/>
+                <a:cs typeface="Microsoft YaHei"/>
+              </a:defRPr>
+            </a:pPr>
+            <a:r>
+              <a:rPr sz="2100" b="1">
+                <a:solidFill>
+                  <a:srgbClr val="2563EB"/>
+                </a:solidFill>
+                <a:latin typeface="Microsoft YaHei"/>
+                <a:ea typeface="Microsoft YaHei"/>
+                <a:cs typeface="Microsoft YaHei"/>
+              </a:rPr>
+              <a:t>3</a:t>
+            </a:r>
+          </a:p>
+        </p:txBody>
+      </p:sp>
+      <p:sp>
+        <p:nvSpPr>
+          <p:cNvPr id="9" name="">
+            <a:extLst xmlns:a="http://schemas.openxmlformats.org/drawingml/2006/main">
+              <a:ext uri="{FF2B5EF4-FFF2-40B4-BE49-F238E27FC236}">
+                <a16:creationId xmlns:a16="http://schemas.microsoft.com/office/drawing/2014/main" id="{5CA6E411-D676-45E5-B5A4-EABAC0755013}"/>
+              </a:ext>
+            </a:extLst>
+          </p:cNvPr>
+          <p:cNvSpPr>
+            <a:spLocks xmlns:a="http://schemas.openxmlformats.org/drawingml/2006/main" noGrp="1"/>
+          </p:cNvSpPr>
+          <p:nvPr/>
+        </p:nvSpPr>
+        <p:spPr>
+          <a:xfrm xmlns:a="http://schemas.openxmlformats.org/drawingml/2006/main">
+            <a:off x="4991100" y="1219200"/>
+            <a:ext cx="781050" cy="685800"/>
+          </a:xfrm>
+          <a:prstGeom xmlns:a="http://schemas.openxmlformats.org/drawingml/2006/main" prst="roundRect">
+            <a:avLst>
+              <a:gd name="adj" fmla="val 16667"/>
+            </a:avLst>
+          </a:prstGeom>
+          <a:solidFill xmlns:a="http://schemas.openxmlformats.org/drawingml/2006/main">
+            <a:srgbClr val="EAF1FF"/>
+          </a:solidFill>
+          <a:ln xmlns:a="http://schemas.openxmlformats.org/drawingml/2006/main" w="9525">
+            <a:solidFill>
+              <a:srgbClr val="8FB3FF"/>
+            </a:solidFill>
+            <a:prstDash val="solid"/>
+          </a:ln>
+        </p:spPr>
+      </p:sp>
+      <p:sp>
+        <p:nvSpPr>
+          <p:cNvPr id="10" name="">
+            <a:extLst xmlns:a="http://schemas.openxmlformats.org/drawingml/2006/main">
+              <a:ext uri="{FF2B5EF4-FFF2-40B4-BE49-F238E27FC236}">
+                <a16:creationId xmlns:a16="http://schemas.microsoft.com/office/drawing/2014/main" id="{DEBCD0B0-D013-4545-BD92-F9493D88AFD8}"/>
+              </a:ext>
+            </a:extLst>
+          </p:cNvPr>
+          <p:cNvSpPr>
+            <a:spLocks xmlns:a="http://schemas.openxmlformats.org/drawingml/2006/main" noGrp="1"/>
+          </p:cNvSpPr>
+          <p:nvPr/>
+        </p:nvSpPr>
+        <p:spPr>
+          <a:xfrm xmlns:a="http://schemas.openxmlformats.org/drawingml/2006/main">
+            <a:off x="4991100" y="1390650"/>
+            <a:ext cx="781050" cy="342900"/>
+          </a:xfrm>
+          <a:prstGeom xmlns:a="http://schemas.openxmlformats.org/drawingml/2006/main" prst="rect">
+            <a:avLst/>
+          </a:prstGeom>
+          <a:noFill xmlns:a="http://schemas.openxmlformats.org/drawingml/2006/main"/>
+          <a:ln xmlns:a="http://schemas.openxmlformats.org/drawingml/2006/main" w="0">
+            <a:noFill/>
+            <a:prstDash val="solid"/>
+          </a:ln>
+        </p:spPr>
+        <p:txBody>
+          <a:bodyPr xmlns:a="http://schemas.openxmlformats.org/drawingml/2006/main" lIns="0" tIns="0" rIns="0" bIns="0" anchor="t">
+            <a:normAutofit fontScale="100000"/>
+          </a:bodyPr>
+          <a:lstStyle xmlns:a="http://schemas.openxmlformats.org/drawingml/2006/main"/>
+          <a:p xmlns:a="http://schemas.openxmlformats.org/drawingml/2006/main">
+            <a:pPr algn="ctr">
+              <a:defRPr sz="2100" b="1">
+                <a:solidFill>
+                  <a:srgbClr val="2563EB"/>
+                </a:solidFill>
+                <a:latin typeface="Microsoft YaHei"/>
+                <a:ea typeface="Microsoft YaHei"/>
+                <a:cs typeface="Microsoft YaHei"/>
+              </a:defRPr>
+            </a:pPr>
+            <a:r>
+              <a:rPr sz="2100" b="1">
+                <a:solidFill>
+                  <a:srgbClr val="2563EB"/>
+                </a:solidFill>
+                <a:latin typeface="Microsoft YaHei"/>
+                <a:ea typeface="Microsoft YaHei"/>
+                <a:cs typeface="Microsoft YaHei"/>
+              </a:rPr>
+              <a:t>3</a:t>
+            </a:r>
+          </a:p>
+        </p:txBody>
+      </p:sp>
+      <p:sp>
+        <p:nvSpPr>
+          <p:cNvPr id="11" name="">
+            <a:extLst xmlns:a="http://schemas.openxmlformats.org/drawingml/2006/main">
+              <a:ext uri="{FF2B5EF4-FFF2-40B4-BE49-F238E27FC236}">
+                <a16:creationId xmlns:a16="http://schemas.microsoft.com/office/drawing/2014/main" id="{07B49A97-BF16-41B6-8422-29ED597938E5}"/>
+              </a:ext>
+            </a:extLst>
+          </p:cNvPr>
+          <p:cNvSpPr>
+            <a:spLocks xmlns:a="http://schemas.openxmlformats.org/drawingml/2006/main" noGrp="1"/>
+          </p:cNvSpPr>
+          <p:nvPr/>
+        </p:nvSpPr>
+        <p:spPr>
+          <a:xfrm xmlns:a="http://schemas.openxmlformats.org/drawingml/2006/main">
+            <a:off x="6057900" y="1219200"/>
+            <a:ext cx="781050" cy="685800"/>
+          </a:xfrm>
+          <a:prstGeom xmlns:a="http://schemas.openxmlformats.org/drawingml/2006/main" prst="roundRect">
+            <a:avLst>
+              <a:gd name="adj" fmla="val 16667"/>
+            </a:avLst>
+          </a:prstGeom>
+          <a:solidFill xmlns:a="http://schemas.openxmlformats.org/drawingml/2006/main">
+            <a:srgbClr val="EAF1FF"/>
+          </a:solidFill>
+          <a:ln xmlns:a="http://schemas.openxmlformats.org/drawingml/2006/main" w="9525">
+            <a:solidFill>
+              <a:srgbClr val="8FB3FF"/>
+            </a:solidFill>
+            <a:prstDash val="solid"/>
+          </a:ln>
+        </p:spPr>
+      </p:sp>
+      <p:sp>
+        <p:nvSpPr>
+          <p:cNvPr id="12" name="">
+            <a:extLst xmlns:a="http://schemas.openxmlformats.org/drawingml/2006/main">
+              <a:ext uri="{FF2B5EF4-FFF2-40B4-BE49-F238E27FC236}">
+                <a16:creationId xmlns:a16="http://schemas.microsoft.com/office/drawing/2014/main" id="{5CBEE4E0-FFEA-4F08-B8C5-A99395E7BD0C}"/>
+              </a:ext>
+            </a:extLst>
+          </p:cNvPr>
+          <p:cNvSpPr>
+            <a:spLocks xmlns:a="http://schemas.openxmlformats.org/drawingml/2006/main" noGrp="1"/>
+          </p:cNvSpPr>
+          <p:nvPr/>
+        </p:nvSpPr>
+        <p:spPr>
+          <a:xfrm xmlns:a="http://schemas.openxmlformats.org/drawingml/2006/main">
+            <a:off x="6057900" y="1390650"/>
+            <a:ext cx="781050" cy="342900"/>
+          </a:xfrm>
+          <a:prstGeom xmlns:a="http://schemas.openxmlformats.org/drawingml/2006/main" prst="rect">
+            <a:avLst/>
+          </a:prstGeom>
+          <a:noFill xmlns:a="http://schemas.openxmlformats.org/drawingml/2006/main"/>
+          <a:ln xmlns:a="http://schemas.openxmlformats.org/drawingml/2006/main" w="0">
+            <a:noFill/>
+            <a:prstDash val="solid"/>
+          </a:ln>
+        </p:spPr>
+        <p:txBody>
+          <a:bodyPr xmlns:a="http://schemas.openxmlformats.org/drawingml/2006/main" lIns="0" tIns="0" rIns="0" bIns="0" anchor="t">
+            <a:normAutofit fontScale="100000"/>
+          </a:bodyPr>
+          <a:lstStyle xmlns:a="http://schemas.openxmlformats.org/drawingml/2006/main"/>
+          <a:p xmlns:a="http://schemas.openxmlformats.org/drawingml/2006/main">
+            <a:pPr algn="ctr">
+              <a:defRPr sz="2100" b="1">
+                <a:solidFill>
+                  <a:srgbClr val="2563EB"/>
+                </a:solidFill>
+                <a:latin typeface="Microsoft YaHei"/>
+                <a:ea typeface="Microsoft YaHei"/>
+                <a:cs typeface="Microsoft YaHei"/>
+              </a:defRPr>
+            </a:pPr>
+            <a:r>
+              <a:rPr sz="2100" b="1">
+                <a:solidFill>
+                  <a:srgbClr val="2563EB"/>
+                </a:solidFill>
+                <a:latin typeface="Microsoft YaHei"/>
+                <a:ea typeface="Microsoft YaHei"/>
+                <a:cs typeface="Microsoft YaHei"/>
+              </a:rPr>
+              <a:t>3</a:t>
+            </a:r>
+          </a:p>
+        </p:txBody>
+      </p:sp>
+      <p:sp>
+        <p:nvSpPr>
+          <p:cNvPr id="13" name="">
+            <a:extLst xmlns:a="http://schemas.openxmlformats.org/drawingml/2006/main">
+              <a:ext uri="{FF2B5EF4-FFF2-40B4-BE49-F238E27FC236}">
+                <a16:creationId xmlns:a16="http://schemas.microsoft.com/office/drawing/2014/main" id="{463CC862-EE55-4526-9FEC-22EB63486B64}"/>
+              </a:ext>
+            </a:extLst>
+          </p:cNvPr>
+          <p:cNvSpPr>
+            <a:spLocks xmlns:a="http://schemas.openxmlformats.org/drawingml/2006/main" noGrp="1"/>
+          </p:cNvSpPr>
+          <p:nvPr/>
+        </p:nvSpPr>
+        <p:spPr>
+          <a:xfrm xmlns:a="http://schemas.openxmlformats.org/drawingml/2006/main">
+            <a:off x="7124700" y="1219200"/>
+            <a:ext cx="781050" cy="685800"/>
+          </a:xfrm>
+          <a:prstGeom xmlns:a="http://schemas.openxmlformats.org/drawingml/2006/main" prst="roundRect">
+            <a:avLst>
+              <a:gd name="adj" fmla="val 16667"/>
             </a:avLst>
           </a:prstGeom>
           <a:solidFill xmlns:a="http://schemas.openxmlformats.org/drawingml/2006/main">
@@ -8719,219 +11499,22 @@
       </p:sp>
       <p:sp>
         <p:nvSpPr>
-          <p:cNvPr id="10" name="">
-            <a:extLst xmlns:a="http://schemas.openxmlformats.org/drawingml/2006/main">
-              <a:ext uri="{FF2B5EF4-FFF2-40B4-BE49-F238E27FC236}">
-                <a16:creationId xmlns:a16="http://schemas.microsoft.com/office/drawing/2014/main" id="{B3629AB1-F362-4A4E-9259-E54B3713EC22}"/>
-              </a:ext>
-            </a:extLst>
-          </p:cNvPr>
-          <p:cNvSpPr>
-            <a:spLocks xmlns:a="http://schemas.openxmlformats.org/drawingml/2006/main" noGrp="1"/>
-          </p:cNvSpPr>
-          <p:nvPr/>
-        </p:nvSpPr>
-        <p:spPr>
-          <a:xfrm xmlns:a="http://schemas.openxmlformats.org/drawingml/2006/main">
-            <a:off x="3714750" y="2343150"/>
-            <a:ext cx="381000" cy="333375"/>
-          </a:xfrm>
-          <a:prstGeom xmlns:a="http://schemas.openxmlformats.org/drawingml/2006/main" prst="rect">
-            <a:avLst/>
-          </a:prstGeom>
-          <a:noFill xmlns:a="http://schemas.openxmlformats.org/drawingml/2006/main"/>
-          <a:ln xmlns:a="http://schemas.openxmlformats.org/drawingml/2006/main" w="0">
-            <a:noFill/>
-            <a:prstDash val="solid"/>
-          </a:ln>
-        </p:spPr>
-        <p:txBody>
-          <a:bodyPr xmlns:a="http://schemas.openxmlformats.org/drawingml/2006/main" lIns="0" tIns="0" rIns="0" bIns="0" anchor="t">
-            <a:normAutofit fontScale="100000"/>
-          </a:bodyPr>
-          <a:lstStyle xmlns:a="http://schemas.openxmlformats.org/drawingml/2006/main"/>
-          <a:p xmlns:a="http://schemas.openxmlformats.org/drawingml/2006/main">
-            <a:pPr algn="l">
-              <a:defRPr sz="1875" b="1">
-                <a:solidFill>
-                  <a:srgbClr val="2563EB"/>
-                </a:solidFill>
-                <a:latin typeface="Microsoft YaHei"/>
-                <a:ea typeface="Microsoft YaHei"/>
-                <a:cs typeface="Microsoft YaHei"/>
-              </a:defRPr>
-            </a:pPr>
-            <a:r>
-              <a:rPr sz="1875" b="1">
-                <a:solidFill>
-                  <a:srgbClr val="2563EB"/>
-                </a:solidFill>
-                <a:latin typeface="Microsoft YaHei"/>
-                <a:ea typeface="Microsoft YaHei"/>
-                <a:cs typeface="Microsoft YaHei"/>
-              </a:rPr>
-              <a:t>2</a:t>
-            </a:r>
-          </a:p>
-        </p:txBody>
-      </p:sp>
-      <p:sp>
-        <p:nvSpPr>
-          <p:cNvPr id="11" name="">
-            <a:extLst xmlns:a="http://schemas.openxmlformats.org/drawingml/2006/main">
-              <a:ext uri="{FF2B5EF4-FFF2-40B4-BE49-F238E27FC236}">
-                <a16:creationId xmlns:a16="http://schemas.microsoft.com/office/drawing/2014/main" id="{46672D7D-32E8-46A2-B074-FBD1E369F5D1}"/>
-              </a:ext>
-            </a:extLst>
-          </p:cNvPr>
-          <p:cNvSpPr>
-            <a:spLocks xmlns:a="http://schemas.openxmlformats.org/drawingml/2006/main" noGrp="1"/>
-          </p:cNvSpPr>
-          <p:nvPr/>
-        </p:nvSpPr>
-        <p:spPr>
-          <a:xfrm xmlns:a="http://schemas.openxmlformats.org/drawingml/2006/main">
-            <a:off x="3714750" y="2800350"/>
-            <a:ext cx="1809750" cy="381000"/>
-          </a:xfrm>
-          <a:prstGeom xmlns:a="http://schemas.openxmlformats.org/drawingml/2006/main" prst="rect">
-            <a:avLst/>
-          </a:prstGeom>
-          <a:noFill xmlns:a="http://schemas.openxmlformats.org/drawingml/2006/main"/>
-          <a:ln xmlns:a="http://schemas.openxmlformats.org/drawingml/2006/main" w="0">
-            <a:noFill/>
-            <a:prstDash val="solid"/>
-          </a:ln>
-        </p:spPr>
-        <p:txBody>
-          <a:bodyPr xmlns:a="http://schemas.openxmlformats.org/drawingml/2006/main" lIns="0" tIns="0" rIns="0" bIns="0" anchor="t">
-            <a:normAutofit fontScale="100000"/>
-          </a:bodyPr>
-          <a:lstStyle xmlns:a="http://schemas.openxmlformats.org/drawingml/2006/main"/>
-          <a:p xmlns:a="http://schemas.openxmlformats.org/drawingml/2006/main">
-            <a:pPr algn="l">
-              <a:defRPr sz="2175" b="1">
-                <a:solidFill>
-                  <a:srgbClr val="101828"/>
-                </a:solidFill>
-                <a:latin typeface="Microsoft YaHei"/>
-                <a:ea typeface="Microsoft YaHei"/>
-                <a:cs typeface="Microsoft YaHei"/>
-              </a:defRPr>
-            </a:pPr>
-            <a:r>
-              <a:rPr sz="2175" b="1">
-                <a:solidFill>
-                  <a:srgbClr val="101828"/>
-                </a:solidFill>
-                <a:latin typeface="Microsoft YaHei"/>
-                <a:ea typeface="Microsoft YaHei"/>
-                <a:cs typeface="Microsoft YaHei"/>
-              </a:rPr>
-              <a:t>读语义</a:t>
-            </a:r>
-          </a:p>
-        </p:txBody>
-      </p:sp>
-      <p:sp>
-        <p:nvSpPr>
-          <p:cNvPr id="12" name="">
-            <a:extLst xmlns:a="http://schemas.openxmlformats.org/drawingml/2006/main">
-              <a:ext uri="{FF2B5EF4-FFF2-40B4-BE49-F238E27FC236}">
-                <a16:creationId xmlns:a16="http://schemas.microsoft.com/office/drawing/2014/main" id="{3EA4223F-DA1F-44FF-B844-3311EC5F02DE}"/>
-              </a:ext>
-            </a:extLst>
-          </p:cNvPr>
-          <p:cNvSpPr>
-            <a:spLocks xmlns:a="http://schemas.openxmlformats.org/drawingml/2006/main" noGrp="1"/>
-          </p:cNvSpPr>
-          <p:nvPr/>
-        </p:nvSpPr>
-        <p:spPr>
-          <a:xfrm xmlns:a="http://schemas.openxmlformats.org/drawingml/2006/main">
-            <a:off x="3714750" y="3381375"/>
-            <a:ext cx="1847850" cy="666750"/>
-          </a:xfrm>
-          <a:prstGeom xmlns:a="http://schemas.openxmlformats.org/drawingml/2006/main" prst="rect">
-            <a:avLst/>
-          </a:prstGeom>
-          <a:noFill xmlns:a="http://schemas.openxmlformats.org/drawingml/2006/main"/>
-          <a:ln xmlns:a="http://schemas.openxmlformats.org/drawingml/2006/main" w="0">
-            <a:noFill/>
-            <a:prstDash val="solid"/>
-          </a:ln>
-        </p:spPr>
-        <p:txBody>
-          <a:bodyPr xmlns:a="http://schemas.openxmlformats.org/drawingml/2006/main" lIns="0" tIns="0" rIns="0" bIns="0" anchor="t">
-            <a:normAutofit fontScale="100000"/>
-          </a:bodyPr>
-          <a:lstStyle xmlns:a="http://schemas.openxmlformats.org/drawingml/2006/main"/>
-          <a:p xmlns:a="http://schemas.openxmlformats.org/drawingml/2006/main">
-            <a:pPr algn="l">
-              <a:defRPr sz="1575" b="0">
-                <a:solidFill>
-                  <a:srgbClr val="5F6B7A"/>
-                </a:solidFill>
-                <a:latin typeface="Microsoft YaHei"/>
-                <a:ea typeface="Microsoft YaHei"/>
-                <a:cs typeface="Microsoft YaHei"/>
-              </a:defRPr>
-            </a:pPr>
-            <a:r>
-              <a:rPr sz="1575" b="0">
-                <a:solidFill>
-                  <a:srgbClr val="5F6B7A"/>
-                </a:solidFill>
-                <a:latin typeface="Microsoft YaHei"/>
-                <a:ea typeface="Microsoft YaHei"/>
-                <a:cs typeface="Microsoft YaHei"/>
-              </a:rPr>
-              <a:t>true 是否表示</a:t>
-            </a:r>
-          </a:p>
-          <a:p xmlns:a="http://schemas.openxmlformats.org/drawingml/2006/main">
-            <a:pPr algn="l">
-              <a:defRPr sz="1575" b="0">
-                <a:solidFill>
-                  <a:srgbClr val="5F6B7A"/>
-                </a:solidFill>
-                <a:latin typeface="Microsoft YaHei"/>
-                <a:ea typeface="Microsoft YaHei"/>
-                <a:cs typeface="Microsoft YaHei"/>
-              </a:defRPr>
-            </a:pPr>
-            <a:r>
-              <a:rPr sz="1575" b="0">
-                <a:solidFill>
-                  <a:srgbClr val="5F6B7A"/>
-                </a:solidFill>
-                <a:latin typeface="Microsoft YaHei"/>
-                <a:ea typeface="Microsoft YaHei"/>
-                <a:cs typeface="Microsoft YaHei"/>
-              </a:rPr>
-              <a:t>严格排在前？</a:t>
-            </a:r>
-          </a:p>
-        </p:txBody>
-      </p:sp>
-      <p:sp>
-        <p:nvSpPr>
-          <p:cNvPr id="13" name="">
-            <a:extLst xmlns:a="http://schemas.openxmlformats.org/drawingml/2006/main">
-              <a:ext uri="{FF2B5EF4-FFF2-40B4-BE49-F238E27FC236}">
-                <a16:creationId xmlns:a16="http://schemas.microsoft.com/office/drawing/2014/main" id="{D064131F-FE1B-476A-A5DF-F8E9A9D7446A}"/>
-              </a:ext>
-            </a:extLst>
-          </p:cNvPr>
-          <p:cNvSpPr>
-            <a:spLocks xmlns:a="http://schemas.openxmlformats.org/drawingml/2006/main" noGrp="1"/>
-          </p:cNvSpPr>
-          <p:nvPr/>
-        </p:nvSpPr>
-        <p:spPr>
-          <a:xfrm xmlns:a="http://schemas.openxmlformats.org/drawingml/2006/main">
-            <a:off x="5876925" y="2952750"/>
-            <a:ext cx="342900" cy="342900"/>
+          <p:cNvPr id="14" name="">
+            <a:extLst xmlns:a="http://schemas.openxmlformats.org/drawingml/2006/main">
+              <a:ext uri="{FF2B5EF4-FFF2-40B4-BE49-F238E27FC236}">
+                <a16:creationId xmlns:a16="http://schemas.microsoft.com/office/drawing/2014/main" id="{6D1EBBC6-3E6A-4450-B200-1BFAEC34C6EC}"/>
+              </a:ext>
+            </a:extLst>
+          </p:cNvPr>
+          <p:cNvSpPr>
+            <a:spLocks xmlns:a="http://schemas.openxmlformats.org/drawingml/2006/main" noGrp="1"/>
+          </p:cNvSpPr>
+          <p:nvPr/>
+        </p:nvSpPr>
+        <p:spPr>
+          <a:xfrm xmlns:a="http://schemas.openxmlformats.org/drawingml/2006/main">
+            <a:off x="7124700" y="1390650"/>
+            <a:ext cx="781050" cy="342900"/>
           </a:xfrm>
           <a:prstGeom xmlns:a="http://schemas.openxmlformats.org/drawingml/2006/main" prst="rect">
             <a:avLst/>
@@ -8951,7 +11534,7 @@
             <a:pPr algn="ctr">
               <a:defRPr sz="2100" b="1">
                 <a:solidFill>
-                  <a:srgbClr val="2563EB"/>
+                  <a:srgbClr val="101828"/>
                 </a:solidFill>
                 <a:latin typeface="Microsoft YaHei"/>
                 <a:ea typeface="Microsoft YaHei"/>
@@ -8961,329 +11544,39 @@
             <a:r>
               <a:rPr sz="2100" b="1">
                 <a:solidFill>
-                  <a:srgbClr val="2563EB"/>
-                </a:solidFill>
-                <a:latin typeface="Microsoft YaHei"/>
-                <a:ea typeface="Microsoft YaHei"/>
-                <a:cs typeface="Microsoft YaHei"/>
-              </a:rPr>
-              <a:t>→</a:t>
-            </a:r>
-          </a:p>
-        </p:txBody>
-      </p:sp>
-      <p:sp>
-        <p:nvSpPr>
-          <p:cNvPr id="14" name="">
-            <a:extLst xmlns:a="http://schemas.openxmlformats.org/drawingml/2006/main">
-              <a:ext uri="{FF2B5EF4-FFF2-40B4-BE49-F238E27FC236}">
-                <a16:creationId xmlns:a16="http://schemas.microsoft.com/office/drawing/2014/main" id="{913F9BBF-75BB-406B-8FA2-6999A2D98120}"/>
-              </a:ext>
-            </a:extLst>
-          </p:cNvPr>
-          <p:cNvSpPr>
-            <a:spLocks xmlns:a="http://schemas.openxmlformats.org/drawingml/2006/main" noGrp="1"/>
-          </p:cNvSpPr>
-          <p:nvPr/>
-        </p:nvSpPr>
-        <p:spPr>
-          <a:xfrm xmlns:a="http://schemas.openxmlformats.org/drawingml/2006/main">
-            <a:off x="6324600" y="2133600"/>
-            <a:ext cx="2266950" cy="2209800"/>
+                  <a:srgbClr val="101828"/>
+                </a:solidFill>
+                <a:latin typeface="Microsoft YaHei"/>
+                <a:ea typeface="Microsoft YaHei"/>
+                <a:cs typeface="Microsoft YaHei"/>
+              </a:rPr>
+              <a:t>5</a:t>
+            </a:r>
+          </a:p>
+        </p:txBody>
+      </p:sp>
+      <p:sp>
+        <p:nvSpPr>
+          <p:cNvPr id="15" name="">
+            <a:extLst xmlns:a="http://schemas.openxmlformats.org/drawingml/2006/main">
+              <a:ext uri="{FF2B5EF4-FFF2-40B4-BE49-F238E27FC236}">
+                <a16:creationId xmlns:a16="http://schemas.microsoft.com/office/drawing/2014/main" id="{E14FA2D0-BB2C-42DE-BC44-21EE689A5F88}"/>
+              </a:ext>
+            </a:extLst>
+          </p:cNvPr>
+          <p:cNvSpPr>
+            <a:spLocks xmlns:a="http://schemas.openxmlformats.org/drawingml/2006/main" noGrp="1"/>
+          </p:cNvSpPr>
+          <p:nvPr/>
+        </p:nvSpPr>
+        <p:spPr>
+          <a:xfrm xmlns:a="http://schemas.openxmlformats.org/drawingml/2006/main">
+            <a:off x="8191500" y="1219200"/>
+            <a:ext cx="781050" cy="685800"/>
           </a:xfrm>
           <a:prstGeom xmlns:a="http://schemas.openxmlformats.org/drawingml/2006/main" prst="roundRect">
             <a:avLst>
-              <a:gd name="adj" fmla="val 5172"/>
-            </a:avLst>
-          </a:prstGeom>
-          <a:solidFill xmlns:a="http://schemas.openxmlformats.org/drawingml/2006/main">
-            <a:srgbClr val="EAF1FF"/>
-          </a:solidFill>
-          <a:ln xmlns:a="http://schemas.openxmlformats.org/drawingml/2006/main" w="9525">
-            <a:solidFill>
-              <a:srgbClr val="8FB3FF"/>
-            </a:solidFill>
-            <a:prstDash val="solid"/>
-          </a:ln>
-        </p:spPr>
-      </p:sp>
-      <p:sp>
-        <p:nvSpPr>
-          <p:cNvPr id="15" name="">
-            <a:extLst xmlns:a="http://schemas.openxmlformats.org/drawingml/2006/main">
-              <a:ext uri="{FF2B5EF4-FFF2-40B4-BE49-F238E27FC236}">
-                <a16:creationId xmlns:a16="http://schemas.microsoft.com/office/drawing/2014/main" id="{0BB44CCD-329A-4D6D-AD2E-24C94C974AE8}"/>
-              </a:ext>
-            </a:extLst>
-          </p:cNvPr>
-          <p:cNvSpPr>
-            <a:spLocks xmlns:a="http://schemas.openxmlformats.org/drawingml/2006/main" noGrp="1"/>
-          </p:cNvSpPr>
-          <p:nvPr/>
-        </p:nvSpPr>
-        <p:spPr>
-          <a:xfrm xmlns:a="http://schemas.openxmlformats.org/drawingml/2006/main">
-            <a:off x="6534150" y="2343150"/>
-            <a:ext cx="381000" cy="333375"/>
-          </a:xfrm>
-          <a:prstGeom xmlns:a="http://schemas.openxmlformats.org/drawingml/2006/main" prst="rect">
-            <a:avLst/>
-          </a:prstGeom>
-          <a:noFill xmlns:a="http://schemas.openxmlformats.org/drawingml/2006/main"/>
-          <a:ln xmlns:a="http://schemas.openxmlformats.org/drawingml/2006/main" w="0">
-            <a:noFill/>
-            <a:prstDash val="solid"/>
-          </a:ln>
-        </p:spPr>
-        <p:txBody>
-          <a:bodyPr xmlns:a="http://schemas.openxmlformats.org/drawingml/2006/main" lIns="0" tIns="0" rIns="0" bIns="0" anchor="t">
-            <a:normAutofit fontScale="100000"/>
-          </a:bodyPr>
-          <a:lstStyle xmlns:a="http://schemas.openxmlformats.org/drawingml/2006/main"/>
-          <a:p xmlns:a="http://schemas.openxmlformats.org/drawingml/2006/main">
-            <a:pPr algn="l">
-              <a:defRPr sz="1875" b="1">
-                <a:solidFill>
-                  <a:srgbClr val="2563EB"/>
-                </a:solidFill>
-                <a:latin typeface="Microsoft YaHei"/>
-                <a:ea typeface="Microsoft YaHei"/>
-                <a:cs typeface="Microsoft YaHei"/>
-              </a:defRPr>
-            </a:pPr>
-            <a:r>
-              <a:rPr sz="1875" b="1">
-                <a:solidFill>
-                  <a:srgbClr val="2563EB"/>
-                </a:solidFill>
-                <a:latin typeface="Microsoft YaHei"/>
-                <a:ea typeface="Microsoft YaHei"/>
-                <a:cs typeface="Microsoft YaHei"/>
-              </a:rPr>
-              <a:t>3</a:t>
-            </a:r>
-          </a:p>
-        </p:txBody>
-      </p:sp>
-      <p:sp>
-        <p:nvSpPr>
-          <p:cNvPr id="16" name="">
-            <a:extLst xmlns:a="http://schemas.openxmlformats.org/drawingml/2006/main">
-              <a:ext uri="{FF2B5EF4-FFF2-40B4-BE49-F238E27FC236}">
-                <a16:creationId xmlns:a16="http://schemas.microsoft.com/office/drawing/2014/main" id="{C432934C-8609-426A-B179-E54AEE7A7AEB}"/>
-              </a:ext>
-            </a:extLst>
-          </p:cNvPr>
-          <p:cNvSpPr>
-            <a:spLocks xmlns:a="http://schemas.openxmlformats.org/drawingml/2006/main" noGrp="1"/>
-          </p:cNvSpPr>
-          <p:nvPr/>
-        </p:nvSpPr>
-        <p:spPr>
-          <a:xfrm xmlns:a="http://schemas.openxmlformats.org/drawingml/2006/main">
-            <a:off x="6534150" y="2800350"/>
-            <a:ext cx="1809750" cy="381000"/>
-          </a:xfrm>
-          <a:prstGeom xmlns:a="http://schemas.openxmlformats.org/drawingml/2006/main" prst="rect">
-            <a:avLst/>
-          </a:prstGeom>
-          <a:noFill xmlns:a="http://schemas.openxmlformats.org/drawingml/2006/main"/>
-          <a:ln xmlns:a="http://schemas.openxmlformats.org/drawingml/2006/main" w="0">
-            <a:noFill/>
-            <a:prstDash val="solid"/>
-          </a:ln>
-        </p:spPr>
-        <p:txBody>
-          <a:bodyPr xmlns:a="http://schemas.openxmlformats.org/drawingml/2006/main" lIns="0" tIns="0" rIns="0" bIns="0" anchor="t">
-            <a:normAutofit fontScale="100000"/>
-          </a:bodyPr>
-          <a:lstStyle xmlns:a="http://schemas.openxmlformats.org/drawingml/2006/main"/>
-          <a:p xmlns:a="http://schemas.openxmlformats.org/drawingml/2006/main">
-            <a:pPr algn="l">
-              <a:defRPr sz="2175" b="1">
-                <a:solidFill>
-                  <a:srgbClr val="101828"/>
-                </a:solidFill>
-                <a:latin typeface="Microsoft YaHei"/>
-                <a:ea typeface="Microsoft YaHei"/>
-                <a:cs typeface="Microsoft YaHei"/>
-              </a:defRPr>
-            </a:pPr>
-            <a:r>
-              <a:rPr sz="2175" b="1">
-                <a:solidFill>
-                  <a:srgbClr val="101828"/>
-                </a:solidFill>
-                <a:latin typeface="Microsoft YaHei"/>
-                <a:ea typeface="Microsoft YaHei"/>
-                <a:cs typeface="Microsoft YaHei"/>
-              </a:rPr>
-              <a:t>验性质</a:t>
-            </a:r>
-          </a:p>
-        </p:txBody>
-      </p:sp>
-      <p:sp>
-        <p:nvSpPr>
-          <p:cNvPr id="17" name="">
-            <a:extLst xmlns:a="http://schemas.openxmlformats.org/drawingml/2006/main">
-              <a:ext uri="{FF2B5EF4-FFF2-40B4-BE49-F238E27FC236}">
-                <a16:creationId xmlns:a16="http://schemas.microsoft.com/office/drawing/2014/main" id="{0D66BD8D-ECF9-46AF-9542-DF6DDC016673}"/>
-              </a:ext>
-            </a:extLst>
-          </p:cNvPr>
-          <p:cNvSpPr>
-            <a:spLocks xmlns:a="http://schemas.openxmlformats.org/drawingml/2006/main" noGrp="1"/>
-          </p:cNvSpPr>
-          <p:nvPr/>
-        </p:nvSpPr>
-        <p:spPr>
-          <a:xfrm xmlns:a="http://schemas.openxmlformats.org/drawingml/2006/main">
-            <a:off x="6534150" y="3381375"/>
-            <a:ext cx="1847850" cy="666750"/>
-          </a:xfrm>
-          <a:prstGeom xmlns:a="http://schemas.openxmlformats.org/drawingml/2006/main" prst="rect">
-            <a:avLst/>
-          </a:prstGeom>
-          <a:noFill xmlns:a="http://schemas.openxmlformats.org/drawingml/2006/main"/>
-          <a:ln xmlns:a="http://schemas.openxmlformats.org/drawingml/2006/main" w="0">
-            <a:noFill/>
-            <a:prstDash val="solid"/>
-          </a:ln>
-        </p:spPr>
-        <p:txBody>
-          <a:bodyPr xmlns:a="http://schemas.openxmlformats.org/drawingml/2006/main" lIns="0" tIns="0" rIns="0" bIns="0" anchor="t">
-            <a:normAutofit fontScale="100000"/>
-          </a:bodyPr>
-          <a:lstStyle xmlns:a="http://schemas.openxmlformats.org/drawingml/2006/main"/>
-          <a:p xmlns:a="http://schemas.openxmlformats.org/drawingml/2006/main">
-            <a:pPr algn="l">
-              <a:defRPr sz="1575" b="0">
-                <a:solidFill>
-                  <a:srgbClr val="5F6B7A"/>
-                </a:solidFill>
-                <a:latin typeface="Microsoft YaHei"/>
-                <a:ea typeface="Microsoft YaHei"/>
-                <a:cs typeface="Microsoft YaHei"/>
-              </a:defRPr>
-            </a:pPr>
-            <a:r>
-              <a:rPr sz="1575" b="0">
-                <a:solidFill>
-                  <a:srgbClr val="5F6B7A"/>
-                </a:solidFill>
-                <a:latin typeface="Microsoft YaHei"/>
-                <a:ea typeface="Microsoft YaHei"/>
-                <a:cs typeface="Microsoft YaHei"/>
-              </a:rPr>
-              <a:t>非自反、非对称、</a:t>
-            </a:r>
-          </a:p>
-          <a:p xmlns:a="http://schemas.openxmlformats.org/drawingml/2006/main">
-            <a:pPr algn="l">
-              <a:defRPr sz="1575" b="0">
-                <a:solidFill>
-                  <a:srgbClr val="5F6B7A"/>
-                </a:solidFill>
-                <a:latin typeface="Microsoft YaHei"/>
-                <a:ea typeface="Microsoft YaHei"/>
-                <a:cs typeface="Microsoft YaHei"/>
-              </a:defRPr>
-            </a:pPr>
-            <a:r>
-              <a:rPr sz="1575" b="0">
-                <a:solidFill>
-                  <a:srgbClr val="5F6B7A"/>
-                </a:solidFill>
-                <a:latin typeface="Microsoft YaHei"/>
-                <a:ea typeface="Microsoft YaHei"/>
-                <a:cs typeface="Microsoft YaHei"/>
-              </a:rPr>
-              <a:t>传递、等价传递</a:t>
-            </a:r>
-          </a:p>
-        </p:txBody>
-      </p:sp>
-      <p:sp>
-        <p:nvSpPr>
-          <p:cNvPr id="18" name="">
-            <a:extLst xmlns:a="http://schemas.openxmlformats.org/drawingml/2006/main">
-              <a:ext uri="{FF2B5EF4-FFF2-40B4-BE49-F238E27FC236}">
-                <a16:creationId xmlns:a16="http://schemas.microsoft.com/office/drawing/2014/main" id="{A6EDC7C1-CA2D-4B5F-B506-F818255ACFB9}"/>
-              </a:ext>
-            </a:extLst>
-          </p:cNvPr>
-          <p:cNvSpPr>
-            <a:spLocks xmlns:a="http://schemas.openxmlformats.org/drawingml/2006/main" noGrp="1"/>
-          </p:cNvSpPr>
-          <p:nvPr/>
-        </p:nvSpPr>
-        <p:spPr>
-          <a:xfrm xmlns:a="http://schemas.openxmlformats.org/drawingml/2006/main">
-            <a:off x="8696325" y="2952750"/>
-            <a:ext cx="342900" cy="342900"/>
-          </a:xfrm>
-          <a:prstGeom xmlns:a="http://schemas.openxmlformats.org/drawingml/2006/main" prst="rect">
-            <a:avLst/>
-          </a:prstGeom>
-          <a:noFill xmlns:a="http://schemas.openxmlformats.org/drawingml/2006/main"/>
-          <a:ln xmlns:a="http://schemas.openxmlformats.org/drawingml/2006/main" w="0">
-            <a:noFill/>
-            <a:prstDash val="solid"/>
-          </a:ln>
-        </p:spPr>
-        <p:txBody>
-          <a:bodyPr xmlns:a="http://schemas.openxmlformats.org/drawingml/2006/main" lIns="0" tIns="0" rIns="0" bIns="0" anchor="t">
-            <a:normAutofit fontScale="100000"/>
-          </a:bodyPr>
-          <a:lstStyle xmlns:a="http://schemas.openxmlformats.org/drawingml/2006/main"/>
-          <a:p xmlns:a="http://schemas.openxmlformats.org/drawingml/2006/main">
-            <a:pPr algn="ctr">
-              <a:defRPr sz="2100" b="1">
-                <a:solidFill>
-                  <a:srgbClr val="2563EB"/>
-                </a:solidFill>
-                <a:latin typeface="Microsoft YaHei"/>
-                <a:ea typeface="Microsoft YaHei"/>
-                <a:cs typeface="Microsoft YaHei"/>
-              </a:defRPr>
-            </a:pPr>
-            <a:r>
-              <a:rPr sz="2100" b="1">
-                <a:solidFill>
-                  <a:srgbClr val="2563EB"/>
-                </a:solidFill>
-                <a:latin typeface="Microsoft YaHei"/>
-                <a:ea typeface="Microsoft YaHei"/>
-                <a:cs typeface="Microsoft YaHei"/>
-              </a:rPr>
-              <a:t>→</a:t>
-            </a:r>
-          </a:p>
-        </p:txBody>
-      </p:sp>
-      <p:sp>
-        <p:nvSpPr>
-          <p:cNvPr id="19" name="">
-            <a:extLst xmlns:a="http://schemas.openxmlformats.org/drawingml/2006/main">
-              <a:ext uri="{FF2B5EF4-FFF2-40B4-BE49-F238E27FC236}">
-                <a16:creationId xmlns:a16="http://schemas.microsoft.com/office/drawing/2014/main" id="{961C8728-EA3C-4AEA-9722-BE4D3EE6C87A}"/>
-              </a:ext>
-            </a:extLst>
-          </p:cNvPr>
-          <p:cNvSpPr>
-            <a:spLocks xmlns:a="http://schemas.openxmlformats.org/drawingml/2006/main" noGrp="1"/>
-          </p:cNvSpPr>
-          <p:nvPr/>
-        </p:nvSpPr>
-        <p:spPr>
-          <a:xfrm xmlns:a="http://schemas.openxmlformats.org/drawingml/2006/main">
-            <a:off x="9144000" y="2133600"/>
-            <a:ext cx="2266950" cy="2209800"/>
-          </a:xfrm>
-          <a:prstGeom xmlns:a="http://schemas.openxmlformats.org/drawingml/2006/main" prst="roundRect">
-            <a:avLst>
-              <a:gd name="adj" fmla="val 5172"/>
+              <a:gd name="adj" fmla="val 16667"/>
             </a:avLst>
           </a:prstGeom>
           <a:solidFill xmlns:a="http://schemas.openxmlformats.org/drawingml/2006/main">
@@ -9299,22 +11592,231 @@
       </p:sp>
       <p:sp>
         <p:nvSpPr>
+          <p:cNvPr id="16" name="">
+            <a:extLst xmlns:a="http://schemas.openxmlformats.org/drawingml/2006/main">
+              <a:ext uri="{FF2B5EF4-FFF2-40B4-BE49-F238E27FC236}">
+                <a16:creationId xmlns:a16="http://schemas.microsoft.com/office/drawing/2014/main" id="{3A925CBC-859D-4611-9B67-D6863574299F}"/>
+              </a:ext>
+            </a:extLst>
+          </p:cNvPr>
+          <p:cNvSpPr>
+            <a:spLocks xmlns:a="http://schemas.openxmlformats.org/drawingml/2006/main" noGrp="1"/>
+          </p:cNvSpPr>
+          <p:nvPr/>
+        </p:nvSpPr>
+        <p:spPr>
+          <a:xfrm xmlns:a="http://schemas.openxmlformats.org/drawingml/2006/main">
+            <a:off x="8191500" y="1390650"/>
+            <a:ext cx="781050" cy="342900"/>
+          </a:xfrm>
+          <a:prstGeom xmlns:a="http://schemas.openxmlformats.org/drawingml/2006/main" prst="rect">
+            <a:avLst/>
+          </a:prstGeom>
+          <a:noFill xmlns:a="http://schemas.openxmlformats.org/drawingml/2006/main"/>
+          <a:ln xmlns:a="http://schemas.openxmlformats.org/drawingml/2006/main" w="0">
+            <a:noFill/>
+            <a:prstDash val="solid"/>
+          </a:ln>
+        </p:spPr>
+        <p:txBody>
+          <a:bodyPr xmlns:a="http://schemas.openxmlformats.org/drawingml/2006/main" lIns="0" tIns="0" rIns="0" bIns="0" anchor="t">
+            <a:normAutofit fontScale="100000"/>
+          </a:bodyPr>
+          <a:lstStyle xmlns:a="http://schemas.openxmlformats.org/drawingml/2006/main"/>
+          <a:p xmlns:a="http://schemas.openxmlformats.org/drawingml/2006/main">
+            <a:pPr algn="ctr">
+              <a:defRPr sz="2100" b="1">
+                <a:solidFill>
+                  <a:srgbClr val="101828"/>
+                </a:solidFill>
+                <a:latin typeface="Microsoft YaHei"/>
+                <a:ea typeface="Microsoft YaHei"/>
+                <a:cs typeface="Microsoft YaHei"/>
+              </a:defRPr>
+            </a:pPr>
+            <a:r>
+              <a:rPr sz="2100" b="1">
+                <a:solidFill>
+                  <a:srgbClr val="101828"/>
+                </a:solidFill>
+                <a:latin typeface="Microsoft YaHei"/>
+                <a:ea typeface="Microsoft YaHei"/>
+                <a:cs typeface="Microsoft YaHei"/>
+              </a:rPr>
+              <a:t>8</a:t>
+            </a:r>
+          </a:p>
+        </p:txBody>
+      </p:sp>
+      <p:sp>
+        <p:nvSpPr>
+          <p:cNvPr id="17" name="">
+            <a:extLst xmlns:a="http://schemas.openxmlformats.org/drawingml/2006/main">
+              <a:ext uri="{FF2B5EF4-FFF2-40B4-BE49-F238E27FC236}">
+                <a16:creationId xmlns:a16="http://schemas.microsoft.com/office/drawing/2014/main" id="{72D372FC-0684-4D59-B768-2D8B7065CB81}"/>
+              </a:ext>
+            </a:extLst>
+          </p:cNvPr>
+          <p:cNvSpPr>
+            <a:spLocks xmlns:a="http://schemas.openxmlformats.org/drawingml/2006/main" noGrp="1"/>
+          </p:cNvSpPr>
+          <p:nvPr/>
+        </p:nvSpPr>
+        <p:spPr>
+          <a:xfrm xmlns:a="http://schemas.openxmlformats.org/drawingml/2006/main">
+            <a:off x="685800" y="2324100"/>
+            <a:ext cx="2476500" cy="361950"/>
+          </a:xfrm>
+          <a:prstGeom xmlns:a="http://schemas.openxmlformats.org/drawingml/2006/main" prst="rect">
+            <a:avLst/>
+          </a:prstGeom>
+          <a:noFill xmlns:a="http://schemas.openxmlformats.org/drawingml/2006/main"/>
+          <a:ln xmlns:a="http://schemas.openxmlformats.org/drawingml/2006/main" w="0">
+            <a:noFill/>
+            <a:prstDash val="solid"/>
+          </a:ln>
+        </p:spPr>
+        <p:txBody>
+          <a:bodyPr xmlns:a="http://schemas.openxmlformats.org/drawingml/2006/main" lIns="0" tIns="0" rIns="0" bIns="0" anchor="t">
+            <a:normAutofit fontScale="100000"/>
+          </a:bodyPr>
+          <a:lstStyle xmlns:a="http://schemas.openxmlformats.org/drawingml/2006/main"/>
+          <a:p xmlns:a="http://schemas.openxmlformats.org/drawingml/2006/main">
+            <a:pPr algn="l">
+              <a:defRPr sz="2100" b="1">
+                <a:solidFill>
+                  <a:srgbClr val="101828"/>
+                </a:solidFill>
+                <a:latin typeface="Consolas"/>
+                <a:ea typeface="Consolas"/>
+                <a:cs typeface="Consolas"/>
+              </a:defRPr>
+            </a:pPr>
+            <a:r>
+              <a:rPr sz="2100" b="1">
+                <a:solidFill>
+                  <a:srgbClr val="101828"/>
+                </a:solidFill>
+                <a:latin typeface="Consolas"/>
+                <a:ea typeface="Consolas"/>
+                <a:cs typeface="Consolas"/>
+              </a:rPr>
+              <a:t>查询 key = 3</a:t>
+            </a:r>
+          </a:p>
+        </p:txBody>
+      </p:sp>
+      <p:sp>
+        <p:nvSpPr>
+          <p:cNvPr id="18" name="">
+            <a:extLst xmlns:a="http://schemas.openxmlformats.org/drawingml/2006/main">
+              <a:ext uri="{FF2B5EF4-FFF2-40B4-BE49-F238E27FC236}">
+                <a16:creationId xmlns:a16="http://schemas.microsoft.com/office/drawing/2014/main" id="{A089F562-3C89-4E62-94DC-8692D9CE92D1}"/>
+              </a:ext>
+            </a:extLst>
+          </p:cNvPr>
+          <p:cNvSpPr>
+            <a:spLocks xmlns:a="http://schemas.openxmlformats.org/drawingml/2006/main" noGrp="1"/>
+          </p:cNvSpPr>
+          <p:nvPr/>
+        </p:nvSpPr>
+        <p:spPr>
+          <a:xfrm xmlns:a="http://schemas.openxmlformats.org/drawingml/2006/main">
+            <a:off x="685800" y="2952750"/>
+            <a:ext cx="4972050" cy="1924050"/>
+          </a:xfrm>
+          <a:prstGeom xmlns:a="http://schemas.openxmlformats.org/drawingml/2006/main" prst="roundRect">
+            <a:avLst>
+              <a:gd name="adj" fmla="val 5941"/>
+            </a:avLst>
+          </a:prstGeom>
+          <a:solidFill xmlns:a="http://schemas.openxmlformats.org/drawingml/2006/main">
+            <a:srgbClr val="FFFFFF"/>
+          </a:solidFill>
+          <a:ln xmlns:a="http://schemas.openxmlformats.org/drawingml/2006/main" w="9525">
+            <a:solidFill>
+              <a:srgbClr val="D8DEE8"/>
+            </a:solidFill>
+            <a:prstDash val="solid"/>
+          </a:ln>
+        </p:spPr>
+      </p:sp>
+      <p:sp>
+        <p:nvSpPr>
+          <p:cNvPr id="19" name="">
+            <a:extLst xmlns:a="http://schemas.openxmlformats.org/drawingml/2006/main">
+              <a:ext uri="{FF2B5EF4-FFF2-40B4-BE49-F238E27FC236}">
+                <a16:creationId xmlns:a16="http://schemas.microsoft.com/office/drawing/2014/main" id="{F08327B5-6FEF-4E66-868C-D1D6C5D79992}"/>
+              </a:ext>
+            </a:extLst>
+          </p:cNvPr>
+          <p:cNvSpPr>
+            <a:spLocks xmlns:a="http://schemas.openxmlformats.org/drawingml/2006/main" noGrp="1"/>
+          </p:cNvSpPr>
+          <p:nvPr/>
+        </p:nvSpPr>
+        <p:spPr>
+          <a:xfrm xmlns:a="http://schemas.openxmlformats.org/drawingml/2006/main">
+            <a:off x="971550" y="3238500"/>
+            <a:ext cx="4095750" cy="361950"/>
+          </a:xfrm>
+          <a:prstGeom xmlns:a="http://schemas.openxmlformats.org/drawingml/2006/main" prst="rect">
+            <a:avLst/>
+          </a:prstGeom>
+          <a:noFill xmlns:a="http://schemas.openxmlformats.org/drawingml/2006/main"/>
+          <a:ln xmlns:a="http://schemas.openxmlformats.org/drawingml/2006/main" w="0">
+            <a:noFill/>
+            <a:prstDash val="solid"/>
+          </a:ln>
+        </p:spPr>
+        <p:txBody>
+          <a:bodyPr xmlns:a="http://schemas.openxmlformats.org/drawingml/2006/main" lIns="0" tIns="0" rIns="0" bIns="0" anchor="t">
+            <a:normAutofit fontScale="100000"/>
+          </a:bodyPr>
+          <a:lstStyle xmlns:a="http://schemas.openxmlformats.org/drawingml/2006/main"/>
+          <a:p xmlns:a="http://schemas.openxmlformats.org/drawingml/2006/main">
+            <a:pPr algn="l">
+              <a:defRPr sz="2175" b="1">
+                <a:solidFill>
+                  <a:srgbClr val="2563EB"/>
+                </a:solidFill>
+                <a:latin typeface="Consolas"/>
+                <a:ea typeface="Consolas"/>
+                <a:cs typeface="Consolas"/>
+              </a:defRPr>
+            </a:pPr>
+            <a:r>
+              <a:rPr sz="2175" b="1">
+                <a:solidFill>
+                  <a:srgbClr val="2563EB"/>
+                </a:solidFill>
+                <a:latin typeface="Consolas"/>
+                <a:ea typeface="Consolas"/>
+                <a:cs typeface="Consolas"/>
+              </a:rPr>
+              <a:t>lower_bound(3)</a:t>
+            </a:r>
+          </a:p>
+        </p:txBody>
+      </p:sp>
+      <p:sp>
+        <p:nvSpPr>
           <p:cNvPr id="20" name="">
             <a:extLst xmlns:a="http://schemas.openxmlformats.org/drawingml/2006/main">
               <a:ext uri="{FF2B5EF4-FFF2-40B4-BE49-F238E27FC236}">
-                <a16:creationId xmlns:a16="http://schemas.microsoft.com/office/drawing/2014/main" id="{80525DE4-96D5-45C6-8534-79192CEB02DE}"/>
-              </a:ext>
-            </a:extLst>
-          </p:cNvPr>
-          <p:cNvSpPr>
-            <a:spLocks xmlns:a="http://schemas.openxmlformats.org/drawingml/2006/main" noGrp="1"/>
-          </p:cNvSpPr>
-          <p:nvPr/>
-        </p:nvSpPr>
-        <p:spPr>
-          <a:xfrm xmlns:a="http://schemas.openxmlformats.org/drawingml/2006/main">
-            <a:off x="9353550" y="2343150"/>
-            <a:ext cx="381000" cy="333375"/>
+                <a16:creationId xmlns:a16="http://schemas.microsoft.com/office/drawing/2014/main" id="{AAD4D64D-2374-490A-9ADF-E10A37453E2C}"/>
+              </a:ext>
+            </a:extLst>
+          </p:cNvPr>
+          <p:cNvSpPr>
+            <a:spLocks xmlns:a="http://schemas.openxmlformats.org/drawingml/2006/main" noGrp="1"/>
+          </p:cNvSpPr>
+          <p:nvPr/>
+        </p:nvSpPr>
+        <p:spPr>
+          <a:xfrm xmlns:a="http://schemas.openxmlformats.org/drawingml/2006/main">
+            <a:off x="971550" y="3790950"/>
+            <a:ext cx="4095750" cy="342900"/>
           </a:xfrm>
           <a:prstGeom xmlns:a="http://schemas.openxmlformats.org/drawingml/2006/main" prst="rect">
             <a:avLst/>
@@ -9332,6 +11834,64 @@
           <a:lstStyle xmlns:a="http://schemas.openxmlformats.org/drawingml/2006/main"/>
           <a:p xmlns:a="http://schemas.openxmlformats.org/drawingml/2006/main">
             <a:pPr algn="l">
+              <a:defRPr sz="1800" b="0">
+                <a:solidFill>
+                  <a:srgbClr val="101828"/>
+                </a:solidFill>
+                <a:latin typeface="Microsoft YaHei"/>
+                <a:ea typeface="Microsoft YaHei"/>
+                <a:cs typeface="Microsoft YaHei"/>
+              </a:defRPr>
+            </a:pPr>
+            <a:r>
+              <a:rPr sz="1800" b="0">
+                <a:solidFill>
+                  <a:srgbClr val="101828"/>
+                </a:solidFill>
+                <a:latin typeface="Microsoft YaHei"/>
+                <a:ea typeface="Microsoft YaHei"/>
+                <a:cs typeface="Microsoft YaHei"/>
+              </a:rPr>
+              <a:t>第一个“不小于 3”的位置</a:t>
+            </a:r>
+          </a:p>
+        </p:txBody>
+      </p:sp>
+      <p:sp>
+        <p:nvSpPr>
+          <p:cNvPr id="21" name="">
+            <a:extLst xmlns:a="http://schemas.openxmlformats.org/drawingml/2006/main">
+              <a:ext uri="{FF2B5EF4-FFF2-40B4-BE49-F238E27FC236}">
+                <a16:creationId xmlns:a16="http://schemas.microsoft.com/office/drawing/2014/main" id="{E003C5A5-DB3A-4C8E-A7C8-F03B1A2A9808}"/>
+              </a:ext>
+            </a:extLst>
+          </p:cNvPr>
+          <p:cNvSpPr>
+            <a:spLocks xmlns:a="http://schemas.openxmlformats.org/drawingml/2006/main" noGrp="1"/>
+          </p:cNvSpPr>
+          <p:nvPr/>
+        </p:nvSpPr>
+        <p:spPr>
+          <a:xfrm xmlns:a="http://schemas.openxmlformats.org/drawingml/2006/main">
+            <a:off x="971550" y="4343400"/>
+            <a:ext cx="4095750" cy="323850"/>
+          </a:xfrm>
+          <a:prstGeom xmlns:a="http://schemas.openxmlformats.org/drawingml/2006/main" prst="rect">
+            <a:avLst/>
+          </a:prstGeom>
+          <a:noFill xmlns:a="http://schemas.openxmlformats.org/drawingml/2006/main"/>
+          <a:ln xmlns:a="http://schemas.openxmlformats.org/drawingml/2006/main" w="0">
+            <a:noFill/>
+            <a:prstDash val="solid"/>
+          </a:ln>
+        </p:spPr>
+        <p:txBody>
+          <a:bodyPr xmlns:a="http://schemas.openxmlformats.org/drawingml/2006/main" lIns="0" tIns="0" rIns="0" bIns="0" anchor="t">
+            <a:normAutofit fontScale="100000"/>
+          </a:bodyPr>
+          <a:lstStyle xmlns:a="http://schemas.openxmlformats.org/drawingml/2006/main"/>
+          <a:p xmlns:a="http://schemas.openxmlformats.org/drawingml/2006/main">
+            <a:pPr algn="l">
               <a:defRPr sz="1875" b="1">
                 <a:solidFill>
                   <a:srgbClr val="2563EB"/>
@@ -9350,29 +11910,64 @@
                 <a:ea typeface="Microsoft YaHei"/>
                 <a:cs typeface="Microsoft YaHei"/>
               </a:rPr>
-              <a:t>4</a:t>
-            </a:r>
-          </a:p>
-        </p:txBody>
-      </p:sp>
-      <p:sp>
-        <p:nvSpPr>
-          <p:cNvPr id="21" name="">
-            <a:extLst xmlns:a="http://schemas.openxmlformats.org/drawingml/2006/main">
-              <a:ext uri="{FF2B5EF4-FFF2-40B4-BE49-F238E27FC236}">
-                <a16:creationId xmlns:a16="http://schemas.microsoft.com/office/drawing/2014/main" id="{B9D82C1C-B680-4DAC-B7BC-5BEF79CD0DEE}"/>
-              </a:ext>
-            </a:extLst>
-          </p:cNvPr>
-          <p:cNvSpPr>
-            <a:spLocks xmlns:a="http://schemas.openxmlformats.org/drawingml/2006/main" noGrp="1"/>
-          </p:cNvSpPr>
-          <p:nvPr/>
-        </p:nvSpPr>
-        <p:spPr>
-          <a:xfrm xmlns:a="http://schemas.openxmlformats.org/drawingml/2006/main">
-            <a:off x="9353550" y="2800350"/>
-            <a:ext cx="1809750" cy="381000"/>
+              <a:t>→ 指向第一个 3</a:t>
+            </a:r>
+          </a:p>
+        </p:txBody>
+      </p:sp>
+      <p:sp>
+        <p:nvSpPr>
+          <p:cNvPr id="22" name="">
+            <a:extLst xmlns:a="http://schemas.openxmlformats.org/drawingml/2006/main">
+              <a:ext uri="{FF2B5EF4-FFF2-40B4-BE49-F238E27FC236}">
+                <a16:creationId xmlns:a16="http://schemas.microsoft.com/office/drawing/2014/main" id="{65466792-196C-4A2B-B8D4-4E440F7D4275}"/>
+              </a:ext>
+            </a:extLst>
+          </p:cNvPr>
+          <p:cNvSpPr>
+            <a:spLocks xmlns:a="http://schemas.openxmlformats.org/drawingml/2006/main" noGrp="1"/>
+          </p:cNvSpPr>
+          <p:nvPr/>
+        </p:nvSpPr>
+        <p:spPr>
+          <a:xfrm xmlns:a="http://schemas.openxmlformats.org/drawingml/2006/main">
+            <a:off x="6000750" y="2952750"/>
+            <a:ext cx="5238750" cy="1924050"/>
+          </a:xfrm>
+          <a:prstGeom xmlns:a="http://schemas.openxmlformats.org/drawingml/2006/main" prst="roundRect">
+            <a:avLst>
+              <a:gd name="adj" fmla="val 5941"/>
+            </a:avLst>
+          </a:prstGeom>
+          <a:solidFill xmlns:a="http://schemas.openxmlformats.org/drawingml/2006/main">
+            <a:srgbClr val="FFFFFF"/>
+          </a:solidFill>
+          <a:ln xmlns:a="http://schemas.openxmlformats.org/drawingml/2006/main" w="9525">
+            <a:solidFill>
+              <a:srgbClr val="D8DEE8"/>
+            </a:solidFill>
+            <a:prstDash val="solid"/>
+          </a:ln>
+        </p:spPr>
+      </p:sp>
+      <p:sp>
+        <p:nvSpPr>
+          <p:cNvPr id="23" name="">
+            <a:extLst xmlns:a="http://schemas.openxmlformats.org/drawingml/2006/main">
+              <a:ext uri="{FF2B5EF4-FFF2-40B4-BE49-F238E27FC236}">
+                <a16:creationId xmlns:a16="http://schemas.microsoft.com/office/drawing/2014/main" id="{7698466C-DE06-4960-B87C-D202C3A8D5D4}"/>
+              </a:ext>
+            </a:extLst>
+          </p:cNvPr>
+          <p:cNvSpPr>
+            <a:spLocks xmlns:a="http://schemas.openxmlformats.org/drawingml/2006/main" noGrp="1"/>
+          </p:cNvSpPr>
+          <p:nvPr/>
+        </p:nvSpPr>
+        <p:spPr>
+          <a:xfrm xmlns:a="http://schemas.openxmlformats.org/drawingml/2006/main">
+            <a:off x="6286500" y="3238500"/>
+            <a:ext cx="4286250" cy="361950"/>
           </a:xfrm>
           <a:prstGeom xmlns:a="http://schemas.openxmlformats.org/drawingml/2006/main" prst="rect">
             <a:avLst/>
@@ -9392,6 +11987,64 @@
             <a:pPr algn="l">
               <a:defRPr sz="2175" b="1">
                 <a:solidFill>
+                  <a:srgbClr val="E5484D"/>
+                </a:solidFill>
+                <a:latin typeface="Consolas"/>
+                <a:ea typeface="Consolas"/>
+                <a:cs typeface="Consolas"/>
+              </a:defRPr>
+            </a:pPr>
+            <a:r>
+              <a:rPr sz="2175" b="1">
+                <a:solidFill>
+                  <a:srgbClr val="E5484D"/>
+                </a:solidFill>
+                <a:latin typeface="Consolas"/>
+                <a:ea typeface="Consolas"/>
+                <a:cs typeface="Consolas"/>
+              </a:rPr>
+              <a:t>upper_bound(3)</a:t>
+            </a:r>
+          </a:p>
+        </p:txBody>
+      </p:sp>
+      <p:sp>
+        <p:nvSpPr>
+          <p:cNvPr id="24" name="">
+            <a:extLst xmlns:a="http://schemas.openxmlformats.org/drawingml/2006/main">
+              <a:ext uri="{FF2B5EF4-FFF2-40B4-BE49-F238E27FC236}">
+                <a16:creationId xmlns:a16="http://schemas.microsoft.com/office/drawing/2014/main" id="{77F226D3-C8A9-4828-B786-708D81B0F2D2}"/>
+              </a:ext>
+            </a:extLst>
+          </p:cNvPr>
+          <p:cNvSpPr>
+            <a:spLocks xmlns:a="http://schemas.openxmlformats.org/drawingml/2006/main" noGrp="1"/>
+          </p:cNvSpPr>
+          <p:nvPr/>
+        </p:nvSpPr>
+        <p:spPr>
+          <a:xfrm xmlns:a="http://schemas.openxmlformats.org/drawingml/2006/main">
+            <a:off x="6286500" y="3790950"/>
+            <a:ext cx="4381500" cy="342900"/>
+          </a:xfrm>
+          <a:prstGeom xmlns:a="http://schemas.openxmlformats.org/drawingml/2006/main" prst="rect">
+            <a:avLst/>
+          </a:prstGeom>
+          <a:noFill xmlns:a="http://schemas.openxmlformats.org/drawingml/2006/main"/>
+          <a:ln xmlns:a="http://schemas.openxmlformats.org/drawingml/2006/main" w="0">
+            <a:noFill/>
+            <a:prstDash val="solid"/>
+          </a:ln>
+        </p:spPr>
+        <p:txBody>
+          <a:bodyPr xmlns:a="http://schemas.openxmlformats.org/drawingml/2006/main" lIns="0" tIns="0" rIns="0" bIns="0" anchor="t">
+            <a:normAutofit fontScale="100000"/>
+          </a:bodyPr>
+          <a:lstStyle xmlns:a="http://schemas.openxmlformats.org/drawingml/2006/main"/>
+          <a:p xmlns:a="http://schemas.openxmlformats.org/drawingml/2006/main">
+            <a:pPr algn="l">
+              <a:defRPr sz="1800" b="0">
+                <a:solidFill>
                   <a:srgbClr val="101828"/>
                 </a:solidFill>
                 <a:latin typeface="Microsoft YaHei"/>
@@ -9400,7 +12053,7 @@
               </a:defRPr>
             </a:pPr>
             <a:r>
-              <a:rPr sz="2175" b="1">
+              <a:rPr sz="1800" b="0">
                 <a:solidFill>
                   <a:srgbClr val="101828"/>
                 </a:solidFill>
@@ -9408,29 +12061,29 @@
                 <a:ea typeface="Microsoft YaHei"/>
                 <a:cs typeface="Microsoft YaHei"/>
               </a:rPr>
-              <a:t>推结果</a:t>
-            </a:r>
-          </a:p>
-        </p:txBody>
-      </p:sp>
-      <p:sp>
-        <p:nvSpPr>
-          <p:cNvPr id="22" name="">
-            <a:extLst xmlns:a="http://schemas.openxmlformats.org/drawingml/2006/main">
-              <a:ext uri="{FF2B5EF4-FFF2-40B4-BE49-F238E27FC236}">
-                <a16:creationId xmlns:a16="http://schemas.microsoft.com/office/drawing/2014/main" id="{06FD600A-BB5C-44EE-9726-80EE8D2F2874}"/>
-              </a:ext>
-            </a:extLst>
-          </p:cNvPr>
-          <p:cNvSpPr>
-            <a:spLocks xmlns:a="http://schemas.openxmlformats.org/drawingml/2006/main" noGrp="1"/>
-          </p:cNvSpPr>
-          <p:nvPr/>
-        </p:nvSpPr>
-        <p:spPr>
-          <a:xfrm xmlns:a="http://schemas.openxmlformats.org/drawingml/2006/main">
-            <a:off x="9353550" y="3381375"/>
-            <a:ext cx="1847850" cy="666750"/>
+              <a:t>第一个“严格大于 3”的位置</a:t>
+            </a:r>
+          </a:p>
+        </p:txBody>
+      </p:sp>
+      <p:sp>
+        <p:nvSpPr>
+          <p:cNvPr id="25" name="">
+            <a:extLst xmlns:a="http://schemas.openxmlformats.org/drawingml/2006/main">
+              <a:ext uri="{FF2B5EF4-FFF2-40B4-BE49-F238E27FC236}">
+                <a16:creationId xmlns:a16="http://schemas.microsoft.com/office/drawing/2014/main" id="{F6B1983E-9D67-4139-AF5D-CBD740DED9AA}"/>
+              </a:ext>
+            </a:extLst>
+          </p:cNvPr>
+          <p:cNvSpPr>
+            <a:spLocks xmlns:a="http://schemas.openxmlformats.org/drawingml/2006/main" noGrp="1"/>
+          </p:cNvSpPr>
+          <p:nvPr/>
+        </p:nvSpPr>
+        <p:spPr>
+          <a:xfrm xmlns:a="http://schemas.openxmlformats.org/drawingml/2006/main">
+            <a:off x="6286500" y="4343400"/>
+            <a:ext cx="4095750" cy="323850"/>
           </a:xfrm>
           <a:prstGeom xmlns:a="http://schemas.openxmlformats.org/drawingml/2006/main" prst="rect">
             <a:avLst/>
@@ -9448,70 +12101,47 @@
           <a:lstStyle xmlns:a="http://schemas.openxmlformats.org/drawingml/2006/main"/>
           <a:p xmlns:a="http://schemas.openxmlformats.org/drawingml/2006/main">
             <a:pPr algn="l">
-              <a:defRPr sz="1575" b="0">
-                <a:solidFill>
-                  <a:srgbClr val="5F6B7A"/>
-                </a:solidFill>
-                <a:latin typeface="Microsoft YaHei"/>
-                <a:ea typeface="Microsoft YaHei"/>
-                <a:cs typeface="Microsoft YaHei"/>
-              </a:defRPr>
-            </a:pPr>
-            <a:r>
-              <a:rPr sz="1575" b="0">
-                <a:solidFill>
-                  <a:srgbClr val="5F6B7A"/>
-                </a:solidFill>
-                <a:latin typeface="Microsoft YaHei"/>
-                <a:ea typeface="Microsoft YaHei"/>
-                <a:cs typeface="Microsoft YaHei"/>
-              </a:rPr>
-              <a:t>顺序、去重、</a:t>
-            </a:r>
-          </a:p>
-          <a:p xmlns:a="http://schemas.openxmlformats.org/drawingml/2006/main">
-            <a:pPr algn="l">
-              <a:defRPr sz="1575" b="0">
-                <a:solidFill>
-                  <a:srgbClr val="5F6B7A"/>
-                </a:solidFill>
-                <a:latin typeface="Microsoft YaHei"/>
-                <a:ea typeface="Microsoft YaHei"/>
-                <a:cs typeface="Microsoft YaHei"/>
-              </a:defRPr>
-            </a:pPr>
-            <a:r>
-              <a:rPr sz="1575" b="0">
-                <a:solidFill>
-                  <a:srgbClr val="5F6B7A"/>
-                </a:solidFill>
-                <a:latin typeface="Microsoft YaHei"/>
-                <a:ea typeface="Microsoft YaHei"/>
-                <a:cs typeface="Microsoft YaHei"/>
-              </a:rPr>
-              <a:t>查找边界</a:t>
-            </a:r>
-          </a:p>
-        </p:txBody>
-      </p:sp>
-      <p:sp>
-        <p:nvSpPr>
-          <p:cNvPr id="23" name="">
-            <a:extLst xmlns:a="http://schemas.openxmlformats.org/drawingml/2006/main">
-              <a:ext uri="{FF2B5EF4-FFF2-40B4-BE49-F238E27FC236}">
-                <a16:creationId xmlns:a16="http://schemas.microsoft.com/office/drawing/2014/main" id="{0AD3A4AA-DC44-4598-B9ED-9F50E9F525C0}"/>
-              </a:ext>
-            </a:extLst>
-          </p:cNvPr>
-          <p:cNvSpPr>
-            <a:spLocks xmlns:a="http://schemas.openxmlformats.org/drawingml/2006/main" noGrp="1"/>
-          </p:cNvSpPr>
-          <p:nvPr/>
-        </p:nvSpPr>
-        <p:spPr>
-          <a:xfrm xmlns:a="http://schemas.openxmlformats.org/drawingml/2006/main">
-            <a:off x="685800" y="4972050"/>
-            <a:ext cx="1905000" cy="342900"/>
+              <a:defRPr sz="1875" b="1">
+                <a:solidFill>
+                  <a:srgbClr val="E5484D"/>
+                </a:solidFill>
+                <a:latin typeface="Microsoft YaHei"/>
+                <a:ea typeface="Microsoft YaHei"/>
+                <a:cs typeface="Microsoft YaHei"/>
+              </a:defRPr>
+            </a:pPr>
+            <a:r>
+              <a:rPr sz="1875" b="1">
+                <a:solidFill>
+                  <a:srgbClr val="E5484D"/>
+                </a:solidFill>
+                <a:latin typeface="Microsoft YaHei"/>
+                <a:ea typeface="Microsoft YaHei"/>
+                <a:cs typeface="Microsoft YaHei"/>
+              </a:rPr>
+              <a:t>→ 指向 5</a:t>
+            </a:r>
+          </a:p>
+        </p:txBody>
+      </p:sp>
+      <p:sp>
+        <p:nvSpPr>
+          <p:cNvPr id="26" name="">
+            <a:extLst xmlns:a="http://schemas.openxmlformats.org/drawingml/2006/main">
+              <a:ext uri="{FF2B5EF4-FFF2-40B4-BE49-F238E27FC236}">
+                <a16:creationId xmlns:a16="http://schemas.microsoft.com/office/drawing/2014/main" id="{A8D90BF0-A685-4C51-8495-C718929B6DEE}"/>
+              </a:ext>
+            </a:extLst>
+          </p:cNvPr>
+          <p:cNvSpPr>
+            <a:spLocks xmlns:a="http://schemas.openxmlformats.org/drawingml/2006/main" noGrp="1"/>
+          </p:cNvSpPr>
+          <p:nvPr/>
+        </p:nvSpPr>
+        <p:spPr>
+          <a:xfrm xmlns:a="http://schemas.openxmlformats.org/drawingml/2006/main">
+            <a:off x="685800" y="5448300"/>
+            <a:ext cx="10477500" cy="438150"/>
           </a:xfrm>
           <a:prstGeom xmlns:a="http://schemas.openxmlformats.org/drawingml/2006/main" prst="rect">
             <a:avLst/>
@@ -9529,65 +12159,7 @@
           <a:lstStyle xmlns:a="http://schemas.openxmlformats.org/drawingml/2006/main"/>
           <a:p xmlns:a="http://schemas.openxmlformats.org/drawingml/2006/main">
             <a:pPr algn="l">
-              <a:defRPr sz="1875" b="1">
-                <a:solidFill>
-                  <a:srgbClr val="2563EB"/>
-                </a:solidFill>
-                <a:latin typeface="Microsoft YaHei"/>
-                <a:ea typeface="Microsoft YaHei"/>
-                <a:cs typeface="Microsoft YaHei"/>
-              </a:defRPr>
-            </a:pPr>
-            <a:r>
-              <a:rPr sz="1875" b="1">
-                <a:solidFill>
-                  <a:srgbClr val="2563EB"/>
-                </a:solidFill>
-                <a:latin typeface="Microsoft YaHei"/>
-                <a:ea typeface="Microsoft YaHei"/>
-                <a:cs typeface="Microsoft YaHei"/>
-              </a:rPr>
-              <a:t>一句话记忆</a:t>
-            </a:r>
-          </a:p>
-        </p:txBody>
-      </p:sp>
-      <p:sp>
-        <p:nvSpPr>
-          <p:cNvPr id="24" name="">
-            <a:extLst xmlns:a="http://schemas.openxmlformats.org/drawingml/2006/main">
-              <a:ext uri="{FF2B5EF4-FFF2-40B4-BE49-F238E27FC236}">
-                <a16:creationId xmlns:a16="http://schemas.microsoft.com/office/drawing/2014/main" id="{D4B1F877-A740-4538-A270-11091A81535D}"/>
-              </a:ext>
-            </a:extLst>
-          </p:cNvPr>
-          <p:cNvSpPr>
-            <a:spLocks xmlns:a="http://schemas.openxmlformats.org/drawingml/2006/main" noGrp="1"/>
-          </p:cNvSpPr>
-          <p:nvPr/>
-        </p:nvSpPr>
-        <p:spPr>
-          <a:xfrm xmlns:a="http://schemas.openxmlformats.org/drawingml/2006/main">
-            <a:off x="685800" y="5429250"/>
-            <a:ext cx="10477500" cy="552450"/>
-          </a:xfrm>
-          <a:prstGeom xmlns:a="http://schemas.openxmlformats.org/drawingml/2006/main" prst="rect">
-            <a:avLst/>
-          </a:prstGeom>
-          <a:noFill xmlns:a="http://schemas.openxmlformats.org/drawingml/2006/main"/>
-          <a:ln xmlns:a="http://schemas.openxmlformats.org/drawingml/2006/main" w="0">
-            <a:noFill/>
-            <a:prstDash val="solid"/>
-          </a:ln>
-        </p:spPr>
-        <p:txBody>
-          <a:bodyPr xmlns:a="http://schemas.openxmlformats.org/drawingml/2006/main" lIns="0" tIns="0" rIns="0" bIns="0" anchor="t">
-            <a:normAutofit fontScale="100000"/>
-          </a:bodyPr>
-          <a:lstStyle xmlns:a="http://schemas.openxmlformats.org/drawingml/2006/main"/>
-          <a:p xmlns:a="http://schemas.openxmlformats.org/drawingml/2006/main">
-            <a:pPr algn="l">
-              <a:defRPr sz="2250" b="1">
+              <a:defRPr sz="1950" b="1">
                 <a:solidFill>
                   <a:srgbClr val="101828"/>
                 </a:solidFill>
@@ -9597,7 +12169,7 @@
               </a:defRPr>
             </a:pPr>
             <a:r>
-              <a:rPr sz="2250" b="1">
+              <a:rPr sz="1950" b="1">
                 <a:solidFill>
                   <a:srgbClr val="101828"/>
                 </a:solidFill>
@@ -9605,7 +12177,7 @@
                 <a:ea typeface="Microsoft YaHei"/>
                 <a:cs typeface="Microsoft YaHei"/>
               </a:rPr>
-              <a:t>set 用比较器建立“严格弱序”；不可区分的元素，就是 set 眼中的同一个键。</a:t>
+              <a:t>区间 [lower_bound(key), upper_bound(key)) 恰好覆盖所有与 key 等价的元素。</a:t>
             </a:r>
           </a:p>
         </p:txBody>
@@ -9613,7 +12185,1148 @@
     </p:spTree>
     <p:extLst>
       <p:ext uri="{BB962C8B-B14F-4D97-AF65-F5344CB8AC3E}">
-        <p14:creationId xmlns:p14="http://schemas.microsoft.com/office/powerpoint/2010/main" val="1731735670"/>
+        <p14:creationId xmlns:p14="http://schemas.microsoft.com/office/powerpoint/2010/main" val="1291906221"/>
+      </p:ext>
+    </p:extLst>
+  </p:cSld>
+</p:sld>
+</file>
+
+<file path=ppt/slides/slide9.xml><?xml version="1.0" encoding="utf-8"?>
+<p:sld xmlns:p="http://schemas.openxmlformats.org/presentationml/2006/main">
+  <p:cSld>
+    <p:bg>
+      <p:bgPr>
+        <a:solidFill xmlns:a="http://schemas.openxmlformats.org/drawingml/2006/main">
+          <a:srgbClr val="F7F8FA"/>
+        </a:solidFill>
+      </p:bgPr>
+    </p:bg>
+    <p:spTree>
+      <p:nvGrpSpPr>
+        <p:cNvPr id="1" name=""/>
+        <p:cNvGrpSpPr/>
+        <p:nvPr/>
+      </p:nvGrpSpPr>
+      <p:grpSpPr>
+        <a:xfrm xmlns:a="http://schemas.openxmlformats.org/drawingml/2006/main"/>
+      </p:grpSpPr>
+      <p:sp>
+        <p:nvSpPr>
+          <p:cNvPr id="23" name="">
+            <a:extLst xmlns:a="http://schemas.openxmlformats.org/drawingml/2006/main">
+              <a:ext uri="{FF2B5EF4-FFF2-40B4-BE49-F238E27FC236}">
+                <a16:creationId xmlns:a16="http://schemas.microsoft.com/office/drawing/2014/main" id="{5F2BF100-7F5D-4121-9DC7-B14402B61F56}"/>
+              </a:ext>
+            </a:extLst>
+          </p:cNvPr>
+          <p:cNvSpPr>
+            <a:spLocks xmlns:a="http://schemas.openxmlformats.org/drawingml/2006/main" noGrp="1"/>
+          </p:cNvSpPr>
+          <p:nvPr/>
+        </p:nvSpPr>
+        <p:spPr>
+          <a:xfrm xmlns:a="http://schemas.openxmlformats.org/drawingml/2006/main">
+            <a:off x="0" y="0"/>
+            <a:ext cx="133350" cy="6858000"/>
+          </a:xfrm>
+          <a:prstGeom xmlns:a="http://schemas.openxmlformats.org/drawingml/2006/main" prst="rect">
+            <a:avLst/>
+          </a:prstGeom>
+          <a:solidFill xmlns:a="http://schemas.openxmlformats.org/drawingml/2006/main">
+            <a:srgbClr val="2563EB"/>
+          </a:solidFill>
+          <a:ln xmlns:a="http://schemas.openxmlformats.org/drawingml/2006/main" w="0">
+            <a:solidFill>
+              <a:srgbClr val="2563EB"/>
+            </a:solidFill>
+            <a:prstDash val="solid"/>
+          </a:ln>
+        </p:spPr>
+      </p:sp>
+      <p:sp>
+        <p:nvSpPr>
+          <p:cNvPr id="2" name="">
+            <a:extLst xmlns:a="http://schemas.openxmlformats.org/drawingml/2006/main">
+              <a:ext uri="{FF2B5EF4-FFF2-40B4-BE49-F238E27FC236}">
+                <a16:creationId xmlns:a16="http://schemas.microsoft.com/office/drawing/2014/main" id="{09FBBCFB-F722-4B83-9A42-C62DEB9D07C2}"/>
+              </a:ext>
+            </a:extLst>
+          </p:cNvPr>
+          <p:cNvSpPr>
+            <a:spLocks xmlns:a="http://schemas.openxmlformats.org/drawingml/2006/main" noGrp="1"/>
+          </p:cNvSpPr>
+          <p:nvPr/>
+        </p:nvSpPr>
+        <p:spPr>
+          <a:xfrm xmlns:a="http://schemas.openxmlformats.org/drawingml/2006/main">
+            <a:off x="514350" y="361950"/>
+            <a:ext cx="10953750" cy="590550"/>
+          </a:xfrm>
+          <a:prstGeom xmlns:a="http://schemas.openxmlformats.org/drawingml/2006/main" prst="rect">
+            <a:avLst/>
+          </a:prstGeom>
+          <a:noFill xmlns:a="http://schemas.openxmlformats.org/drawingml/2006/main"/>
+          <a:ln xmlns:a="http://schemas.openxmlformats.org/drawingml/2006/main" w="0">
+            <a:noFill/>
+            <a:prstDash val="solid"/>
+          </a:ln>
+        </p:spPr>
+        <p:txBody>
+          <a:bodyPr xmlns:a="http://schemas.openxmlformats.org/drawingml/2006/main" lIns="0" tIns="0" rIns="0" bIns="0" anchor="t">
+            <a:normAutofit fontScale="100000"/>
+          </a:bodyPr>
+          <a:lstStyle xmlns:a="http://schemas.openxmlformats.org/drawingml/2006/main"/>
+          <a:p xmlns:a="http://schemas.openxmlformats.org/drawingml/2006/main">
+            <a:pPr algn="l">
+              <a:defRPr sz="2925" b="1">
+                <a:solidFill>
+                  <a:srgbClr val="101828"/>
+                </a:solidFill>
+                <a:latin typeface="Microsoft YaHei"/>
+                <a:ea typeface="Microsoft YaHei"/>
+                <a:cs typeface="Microsoft YaHei"/>
+              </a:defRPr>
+            </a:pPr>
+            <a:r>
+              <a:rPr sz="2925" b="1">
+                <a:solidFill>
+                  <a:srgbClr val="101828"/>
+                </a:solidFill>
+                <a:latin typeface="Microsoft YaHei"/>
+                <a:ea typeface="Microsoft YaHei"/>
+                <a:cs typeface="Microsoft YaHei"/>
+              </a:rPr>
+              <a:t>在 set 中优先调用成员函数</a:t>
+            </a:r>
+          </a:p>
+        </p:txBody>
+      </p:sp>
+      <p:sp>
+        <p:nvSpPr>
+          <p:cNvPr id="3" name="">
+            <a:extLst xmlns:a="http://schemas.openxmlformats.org/drawingml/2006/main">
+              <a:ext uri="{FF2B5EF4-FFF2-40B4-BE49-F238E27FC236}">
+                <a16:creationId xmlns:a16="http://schemas.microsoft.com/office/drawing/2014/main" id="{C96687AA-2582-42A6-8526-FF942AA01A51}"/>
+              </a:ext>
+            </a:extLst>
+          </p:cNvPr>
+          <p:cNvSpPr>
+            <a:spLocks xmlns:a="http://schemas.openxmlformats.org/drawingml/2006/main" noGrp="1"/>
+          </p:cNvSpPr>
+          <p:nvPr/>
+        </p:nvSpPr>
+        <p:spPr>
+          <a:xfrm xmlns:a="http://schemas.openxmlformats.org/drawingml/2006/main">
+            <a:off x="11239500" y="6362700"/>
+            <a:ext cx="457200" cy="190500"/>
+          </a:xfrm>
+          <a:prstGeom xmlns:a="http://schemas.openxmlformats.org/drawingml/2006/main" prst="rect">
+            <a:avLst/>
+          </a:prstGeom>
+          <a:noFill xmlns:a="http://schemas.openxmlformats.org/drawingml/2006/main"/>
+          <a:ln xmlns:a="http://schemas.openxmlformats.org/drawingml/2006/main" w="0">
+            <a:noFill/>
+            <a:prstDash val="solid"/>
+          </a:ln>
+        </p:spPr>
+        <p:txBody>
+          <a:bodyPr xmlns:a="http://schemas.openxmlformats.org/drawingml/2006/main" lIns="0" tIns="0" rIns="0" bIns="0" anchor="t">
+            <a:normAutofit fontScale="100000"/>
+          </a:bodyPr>
+          <a:lstStyle xmlns:a="http://schemas.openxmlformats.org/drawingml/2006/main"/>
+          <a:p xmlns:a="http://schemas.openxmlformats.org/drawingml/2006/main">
+            <a:pPr algn="r">
+              <a:defRPr sz="1050" b="0">
+                <a:solidFill>
+                  <a:srgbClr val="5F6B7A"/>
+                </a:solidFill>
+                <a:latin typeface="Microsoft YaHei"/>
+                <a:ea typeface="Microsoft YaHei"/>
+                <a:cs typeface="Microsoft YaHei"/>
+              </a:defRPr>
+            </a:pPr>
+            <a:r>
+              <a:rPr sz="1050" b="0">
+                <a:solidFill>
+                  <a:srgbClr val="5F6B7A"/>
+                </a:solidFill>
+                <a:latin typeface="Microsoft YaHei"/>
+                <a:ea typeface="Microsoft YaHei"/>
+                <a:cs typeface="Microsoft YaHei"/>
+              </a:rPr>
+              <a:t>09</a:t>
+            </a:r>
+          </a:p>
+        </p:txBody>
+      </p:sp>
+      <p:sp>
+        <p:nvSpPr>
+          <p:cNvPr id="4" name="">
+            <a:extLst xmlns:a="http://schemas.openxmlformats.org/drawingml/2006/main">
+              <a:ext uri="{FF2B5EF4-FFF2-40B4-BE49-F238E27FC236}">
+                <a16:creationId xmlns:a16="http://schemas.microsoft.com/office/drawing/2014/main" id="{09DC3A9B-5EBC-464D-9741-288974A41AD7}"/>
+              </a:ext>
+            </a:extLst>
+          </p:cNvPr>
+          <p:cNvSpPr>
+            <a:spLocks xmlns:a="http://schemas.openxmlformats.org/drawingml/2006/main" noGrp="1"/>
+          </p:cNvSpPr>
+          <p:nvPr/>
+        </p:nvSpPr>
+        <p:spPr>
+          <a:xfrm xmlns:a="http://schemas.openxmlformats.org/drawingml/2006/main">
+            <a:off x="685800" y="1352550"/>
+            <a:ext cx="6191250" cy="3143250"/>
+          </a:xfrm>
+          <a:prstGeom xmlns:a="http://schemas.openxmlformats.org/drawingml/2006/main" prst="roundRect">
+            <a:avLst>
+              <a:gd name="adj" fmla="val 3636"/>
+            </a:avLst>
+          </a:prstGeom>
+          <a:solidFill xmlns:a="http://schemas.openxmlformats.org/drawingml/2006/main">
+            <a:srgbClr val="101828"/>
+          </a:solidFill>
+          <a:ln xmlns:a="http://schemas.openxmlformats.org/drawingml/2006/main" w="9525">
+            <a:solidFill>
+              <a:srgbClr val="101828"/>
+            </a:solidFill>
+            <a:prstDash val="solid"/>
+          </a:ln>
+        </p:spPr>
+      </p:sp>
+      <p:sp>
+        <p:nvSpPr>
+          <p:cNvPr id="5" name="">
+            <a:extLst xmlns:a="http://schemas.openxmlformats.org/drawingml/2006/main">
+              <a:ext uri="{FF2B5EF4-FFF2-40B4-BE49-F238E27FC236}">
+                <a16:creationId xmlns:a16="http://schemas.microsoft.com/office/drawing/2014/main" id="{975BE22D-77BD-400B-89B7-295B71DAC536}"/>
+              </a:ext>
+            </a:extLst>
+          </p:cNvPr>
+          <p:cNvSpPr>
+            <a:spLocks xmlns:a="http://schemas.openxmlformats.org/drawingml/2006/main" noGrp="1"/>
+          </p:cNvSpPr>
+          <p:nvPr/>
+        </p:nvSpPr>
+        <p:spPr>
+          <a:xfrm xmlns:a="http://schemas.openxmlformats.org/drawingml/2006/main">
+            <a:off x="914400" y="1524000"/>
+            <a:ext cx="5734050" cy="285750"/>
+          </a:xfrm>
+          <a:prstGeom xmlns:a="http://schemas.openxmlformats.org/drawingml/2006/main" prst="rect">
+            <a:avLst/>
+          </a:prstGeom>
+          <a:noFill xmlns:a="http://schemas.openxmlformats.org/drawingml/2006/main"/>
+          <a:ln xmlns:a="http://schemas.openxmlformats.org/drawingml/2006/main" w="0">
+            <a:noFill/>
+            <a:prstDash val="solid"/>
+          </a:ln>
+        </p:spPr>
+        <p:txBody>
+          <a:bodyPr xmlns:a="http://schemas.openxmlformats.org/drawingml/2006/main" lIns="0" tIns="0" rIns="0" bIns="0" anchor="t">
+            <a:noAutofit/>
+          </a:bodyPr>
+          <a:lstStyle xmlns:a="http://schemas.openxmlformats.org/drawingml/2006/main"/>
+          <a:p xmlns:a="http://schemas.openxmlformats.org/drawingml/2006/main">
+            <a:pPr algn="l">
+              <a:defRPr sz="1350" b="0">
+                <a:solidFill>
+                  <a:srgbClr val="E6EDF7"/>
+                </a:solidFill>
+                <a:latin typeface="Consolas"/>
+                <a:ea typeface="Consolas"/>
+                <a:cs typeface="Consolas"/>
+              </a:defRPr>
+            </a:pPr>
+            <a:r>
+              <a:rPr sz="1350" b="0">
+                <a:solidFill>
+                  <a:srgbClr val="E6EDF7"/>
+                </a:solidFill>
+                <a:latin typeface="Consolas"/>
+                <a:ea typeface="Consolas"/>
+                <a:cs typeface="Consolas"/>
+              </a:rPr>
+              <a:t>set&lt;int&gt; s{1, 3, 5, 7, 9};</a:t>
+            </a:r>
+          </a:p>
+        </p:txBody>
+      </p:sp>
+      <p:sp>
+        <p:nvSpPr>
+          <p:cNvPr id="6" name="">
+            <a:extLst xmlns:a="http://schemas.openxmlformats.org/drawingml/2006/main">
+              <a:ext uri="{FF2B5EF4-FFF2-40B4-BE49-F238E27FC236}">
+                <a16:creationId xmlns:a16="http://schemas.microsoft.com/office/drawing/2014/main" id="{FA2273DF-70F3-43D0-B196-0DFF71FB8B4C}"/>
+              </a:ext>
+            </a:extLst>
+          </p:cNvPr>
+          <p:cNvSpPr>
+            <a:spLocks xmlns:a="http://schemas.openxmlformats.org/drawingml/2006/main" noGrp="1"/>
+          </p:cNvSpPr>
+          <p:nvPr/>
+        </p:nvSpPr>
+        <p:spPr>
+          <a:xfrm xmlns:a="http://schemas.openxmlformats.org/drawingml/2006/main">
+            <a:off x="914400" y="1809750"/>
+            <a:ext cx="5734050" cy="285750"/>
+          </a:xfrm>
+          <a:prstGeom xmlns:a="http://schemas.openxmlformats.org/drawingml/2006/main" prst="rect">
+            <a:avLst/>
+          </a:prstGeom>
+          <a:noFill xmlns:a="http://schemas.openxmlformats.org/drawingml/2006/main"/>
+          <a:ln xmlns:a="http://schemas.openxmlformats.org/drawingml/2006/main" w="0">
+            <a:noFill/>
+            <a:prstDash val="solid"/>
+          </a:ln>
+        </p:spPr>
+        <p:txBody>
+          <a:bodyPr xmlns:a="http://schemas.openxmlformats.org/drawingml/2006/main" lIns="0" tIns="0" rIns="0" bIns="0" anchor="t">
+            <a:noAutofit/>
+          </a:bodyPr>
+          <a:lstStyle xmlns:a="http://schemas.openxmlformats.org/drawingml/2006/main"/>
+          <a:p xmlns:a="http://schemas.openxmlformats.org/drawingml/2006/main">
+            <a:pPr algn="l">
+              <a:defRPr sz="1350" b="0">
+                <a:solidFill>
+                  <a:srgbClr val="7DD3FC"/>
+                </a:solidFill>
+                <a:latin typeface="Consolas"/>
+                <a:ea typeface="Consolas"/>
+                <a:cs typeface="Consolas"/>
+              </a:defRPr>
+            </a:pPr>
+            <a:r>
+              <a:rPr sz="1350" b="0">
+                <a:solidFill>
+                  <a:srgbClr val="7DD3FC"/>
+                </a:solidFill>
+                <a:latin typeface="Consolas"/>
+                <a:ea typeface="Consolas"/>
+                <a:cs typeface="Consolas"/>
+              </a:rPr>
+              <a:t>auto lo = s.lower_bound(5); // *lo == 5</a:t>
+            </a:r>
+          </a:p>
+        </p:txBody>
+      </p:sp>
+      <p:sp>
+        <p:nvSpPr>
+          <p:cNvPr id="7" name="">
+            <a:extLst xmlns:a="http://schemas.openxmlformats.org/drawingml/2006/main">
+              <a:ext uri="{FF2B5EF4-FFF2-40B4-BE49-F238E27FC236}">
+                <a16:creationId xmlns:a16="http://schemas.microsoft.com/office/drawing/2014/main" id="{CEA46F61-2C66-49FA-B3A4-D5B3A1A1163C}"/>
+              </a:ext>
+            </a:extLst>
+          </p:cNvPr>
+          <p:cNvSpPr>
+            <a:spLocks xmlns:a="http://schemas.openxmlformats.org/drawingml/2006/main" noGrp="1"/>
+          </p:cNvSpPr>
+          <p:nvPr/>
+        </p:nvSpPr>
+        <p:spPr>
+          <a:xfrm xmlns:a="http://schemas.openxmlformats.org/drawingml/2006/main">
+            <a:off x="914400" y="2095500"/>
+            <a:ext cx="5734050" cy="285750"/>
+          </a:xfrm>
+          <a:prstGeom xmlns:a="http://schemas.openxmlformats.org/drawingml/2006/main" prst="rect">
+            <a:avLst/>
+          </a:prstGeom>
+          <a:noFill xmlns:a="http://schemas.openxmlformats.org/drawingml/2006/main"/>
+          <a:ln xmlns:a="http://schemas.openxmlformats.org/drawingml/2006/main" w="0">
+            <a:noFill/>
+            <a:prstDash val="solid"/>
+          </a:ln>
+        </p:spPr>
+        <p:txBody>
+          <a:bodyPr xmlns:a="http://schemas.openxmlformats.org/drawingml/2006/main" lIns="0" tIns="0" rIns="0" bIns="0" anchor="t">
+            <a:noAutofit/>
+          </a:bodyPr>
+          <a:lstStyle xmlns:a="http://schemas.openxmlformats.org/drawingml/2006/main"/>
+          <a:p xmlns:a="http://schemas.openxmlformats.org/drawingml/2006/main">
+            <a:pPr algn="l">
+              <a:defRPr sz="1350" b="0">
+                <a:solidFill>
+                  <a:srgbClr val="7DD3FC"/>
+                </a:solidFill>
+                <a:latin typeface="Consolas"/>
+                <a:ea typeface="Consolas"/>
+                <a:cs typeface="Consolas"/>
+              </a:defRPr>
+            </a:pPr>
+            <a:r>
+              <a:rPr sz="1350" b="0">
+                <a:solidFill>
+                  <a:srgbClr val="7DD3FC"/>
+                </a:solidFill>
+                <a:latin typeface="Consolas"/>
+                <a:ea typeface="Consolas"/>
+                <a:cs typeface="Consolas"/>
+              </a:rPr>
+              <a:t>auto hi = s.upper_bound(5); // *hi == 7</a:t>
+            </a:r>
+          </a:p>
+        </p:txBody>
+      </p:sp>
+      <p:sp>
+        <p:nvSpPr>
+          <p:cNvPr id="8" name="">
+            <a:extLst xmlns:a="http://schemas.openxmlformats.org/drawingml/2006/main">
+              <a:ext uri="{FF2B5EF4-FFF2-40B4-BE49-F238E27FC236}">
+                <a16:creationId xmlns:a16="http://schemas.microsoft.com/office/drawing/2014/main" id="{4247B981-AC75-40EA-BA6C-6F2A3B8C34CF}"/>
+              </a:ext>
+            </a:extLst>
+          </p:cNvPr>
+          <p:cNvSpPr>
+            <a:spLocks xmlns:a="http://schemas.openxmlformats.org/drawingml/2006/main" noGrp="1"/>
+          </p:cNvSpPr>
+          <p:nvPr/>
+        </p:nvSpPr>
+        <p:spPr>
+          <a:xfrm xmlns:a="http://schemas.openxmlformats.org/drawingml/2006/main">
+            <a:off x="914400" y="2381250"/>
+            <a:ext cx="5734050" cy="285750"/>
+          </a:xfrm>
+          <a:prstGeom xmlns:a="http://schemas.openxmlformats.org/drawingml/2006/main" prst="rect">
+            <a:avLst/>
+          </a:prstGeom>
+          <a:noFill xmlns:a="http://schemas.openxmlformats.org/drawingml/2006/main"/>
+          <a:ln xmlns:a="http://schemas.openxmlformats.org/drawingml/2006/main" w="0">
+            <a:noFill/>
+            <a:prstDash val="solid"/>
+          </a:ln>
+        </p:spPr>
+        <p:txBody>
+          <a:bodyPr xmlns:a="http://schemas.openxmlformats.org/drawingml/2006/main" lIns="0" tIns="0" rIns="0" bIns="0" anchor="t">
+            <a:noAutofit/>
+          </a:bodyPr>
+          <a:lstStyle xmlns:a="http://schemas.openxmlformats.org/drawingml/2006/main"/>
+          <a:p xmlns:a="http://schemas.openxmlformats.org/drawingml/2006/main">
+            <a:r>
+              <a:t/>
+            </a:r>
+          </a:p>
+        </p:txBody>
+      </p:sp>
+      <p:sp>
+        <p:nvSpPr>
+          <p:cNvPr id="9" name="">
+            <a:extLst xmlns:a="http://schemas.openxmlformats.org/drawingml/2006/main">
+              <a:ext uri="{FF2B5EF4-FFF2-40B4-BE49-F238E27FC236}">
+                <a16:creationId xmlns:a16="http://schemas.microsoft.com/office/drawing/2014/main" id="{11F0D5DD-DC15-49B5-8CE9-5890F8B8A847}"/>
+              </a:ext>
+            </a:extLst>
+          </p:cNvPr>
+          <p:cNvSpPr>
+            <a:spLocks xmlns:a="http://schemas.openxmlformats.org/drawingml/2006/main" noGrp="1"/>
+          </p:cNvSpPr>
+          <p:nvPr/>
+        </p:nvSpPr>
+        <p:spPr>
+          <a:xfrm xmlns:a="http://schemas.openxmlformats.org/drawingml/2006/main">
+            <a:off x="914400" y="2667000"/>
+            <a:ext cx="5734050" cy="285750"/>
+          </a:xfrm>
+          <a:prstGeom xmlns:a="http://schemas.openxmlformats.org/drawingml/2006/main" prst="rect">
+            <a:avLst/>
+          </a:prstGeom>
+          <a:noFill xmlns:a="http://schemas.openxmlformats.org/drawingml/2006/main"/>
+          <a:ln xmlns:a="http://schemas.openxmlformats.org/drawingml/2006/main" w="0">
+            <a:noFill/>
+            <a:prstDash val="solid"/>
+          </a:ln>
+        </p:spPr>
+        <p:txBody>
+          <a:bodyPr xmlns:a="http://schemas.openxmlformats.org/drawingml/2006/main" lIns="0" tIns="0" rIns="0" bIns="0" anchor="t">
+            <a:noAutofit/>
+          </a:bodyPr>
+          <a:lstStyle xmlns:a="http://schemas.openxmlformats.org/drawingml/2006/main"/>
+          <a:p xmlns:a="http://schemas.openxmlformats.org/drawingml/2006/main">
+            <a:pPr algn="l">
+              <a:defRPr sz="1350" b="0">
+                <a:solidFill>
+                  <a:srgbClr val="E6EDF7"/>
+                </a:solidFill>
+                <a:latin typeface="Consolas"/>
+                <a:ea typeface="Consolas"/>
+                <a:cs typeface="Consolas"/>
+              </a:defRPr>
+            </a:pPr>
+            <a:r>
+              <a:rPr sz="1350" b="0">
+                <a:solidFill>
+                  <a:srgbClr val="E6EDF7"/>
+                </a:solidFill>
+                <a:latin typeface="Consolas"/>
+                <a:ea typeface="Consolas"/>
+                <a:cs typeface="Consolas"/>
+              </a:rPr>
+              <a:t>// 查找闭区间 [L, R] 内的元素</a:t>
+            </a:r>
+          </a:p>
+        </p:txBody>
+      </p:sp>
+      <p:sp>
+        <p:nvSpPr>
+          <p:cNvPr id="10" name="">
+            <a:extLst xmlns:a="http://schemas.openxmlformats.org/drawingml/2006/main">
+              <a:ext uri="{FF2B5EF4-FFF2-40B4-BE49-F238E27FC236}">
+                <a16:creationId xmlns:a16="http://schemas.microsoft.com/office/drawing/2014/main" id="{28E68FFB-A571-4141-B5EC-549DA2C01AEF}"/>
+              </a:ext>
+            </a:extLst>
+          </p:cNvPr>
+          <p:cNvSpPr>
+            <a:spLocks xmlns:a="http://schemas.openxmlformats.org/drawingml/2006/main" noGrp="1"/>
+          </p:cNvSpPr>
+          <p:nvPr/>
+        </p:nvSpPr>
+        <p:spPr>
+          <a:xfrm xmlns:a="http://schemas.openxmlformats.org/drawingml/2006/main">
+            <a:off x="914400" y="2952750"/>
+            <a:ext cx="5734050" cy="285750"/>
+          </a:xfrm>
+          <a:prstGeom xmlns:a="http://schemas.openxmlformats.org/drawingml/2006/main" prst="rect">
+            <a:avLst/>
+          </a:prstGeom>
+          <a:noFill xmlns:a="http://schemas.openxmlformats.org/drawingml/2006/main"/>
+          <a:ln xmlns:a="http://schemas.openxmlformats.org/drawingml/2006/main" w="0">
+            <a:noFill/>
+            <a:prstDash val="solid"/>
+          </a:ln>
+        </p:spPr>
+        <p:txBody>
+          <a:bodyPr xmlns:a="http://schemas.openxmlformats.org/drawingml/2006/main" lIns="0" tIns="0" rIns="0" bIns="0" anchor="t">
+            <a:noAutofit/>
+          </a:bodyPr>
+          <a:lstStyle xmlns:a="http://schemas.openxmlformats.org/drawingml/2006/main"/>
+          <a:p xmlns:a="http://schemas.openxmlformats.org/drawingml/2006/main">
+            <a:pPr algn="l">
+              <a:defRPr sz="1350" b="0">
+                <a:solidFill>
+                  <a:srgbClr val="7DD3FC"/>
+                </a:solidFill>
+                <a:latin typeface="Consolas"/>
+                <a:ea typeface="Consolas"/>
+                <a:cs typeface="Consolas"/>
+              </a:defRPr>
+            </a:pPr>
+            <a:r>
+              <a:rPr sz="1350" b="0">
+                <a:solidFill>
+                  <a:srgbClr val="7DD3FC"/>
+                </a:solidFill>
+                <a:latin typeface="Consolas"/>
+                <a:ea typeface="Consolas"/>
+                <a:cs typeface="Consolas"/>
+              </a:rPr>
+              <a:t>for (auto it = s.lower_bound(L);</a:t>
+            </a:r>
+          </a:p>
+        </p:txBody>
+      </p:sp>
+      <p:sp>
+        <p:nvSpPr>
+          <p:cNvPr id="11" name="">
+            <a:extLst xmlns:a="http://schemas.openxmlformats.org/drawingml/2006/main">
+              <a:ext uri="{FF2B5EF4-FFF2-40B4-BE49-F238E27FC236}">
+                <a16:creationId xmlns:a16="http://schemas.microsoft.com/office/drawing/2014/main" id="{38117EA3-4E8F-471D-B036-090C4C96FACD}"/>
+              </a:ext>
+            </a:extLst>
+          </p:cNvPr>
+          <p:cNvSpPr>
+            <a:spLocks xmlns:a="http://schemas.openxmlformats.org/drawingml/2006/main" noGrp="1"/>
+          </p:cNvSpPr>
+          <p:nvPr/>
+        </p:nvSpPr>
+        <p:spPr>
+          <a:xfrm xmlns:a="http://schemas.openxmlformats.org/drawingml/2006/main">
+            <a:off x="914400" y="3238500"/>
+            <a:ext cx="5734050" cy="285750"/>
+          </a:xfrm>
+          <a:prstGeom xmlns:a="http://schemas.openxmlformats.org/drawingml/2006/main" prst="rect">
+            <a:avLst/>
+          </a:prstGeom>
+          <a:noFill xmlns:a="http://schemas.openxmlformats.org/drawingml/2006/main"/>
+          <a:ln xmlns:a="http://schemas.openxmlformats.org/drawingml/2006/main" w="0">
+            <a:noFill/>
+            <a:prstDash val="solid"/>
+          </a:ln>
+        </p:spPr>
+        <p:txBody>
+          <a:bodyPr xmlns:a="http://schemas.openxmlformats.org/drawingml/2006/main" lIns="0" tIns="0" rIns="0" bIns="0" anchor="t">
+            <a:noAutofit/>
+          </a:bodyPr>
+          <a:lstStyle xmlns:a="http://schemas.openxmlformats.org/drawingml/2006/main"/>
+          <a:p xmlns:a="http://schemas.openxmlformats.org/drawingml/2006/main">
+            <a:pPr algn="l">
+              <a:defRPr sz="1350" b="0">
+                <a:solidFill>
+                  <a:srgbClr val="7DD3FC"/>
+                </a:solidFill>
+                <a:latin typeface="Consolas"/>
+                <a:ea typeface="Consolas"/>
+                <a:cs typeface="Consolas"/>
+              </a:defRPr>
+            </a:pPr>
+            <a:r>
+              <a:rPr sz="1350" b="0">
+                <a:solidFill>
+                  <a:srgbClr val="7DD3FC"/>
+                </a:solidFill>
+                <a:latin typeface="Consolas"/>
+                <a:ea typeface="Consolas"/>
+                <a:cs typeface="Consolas"/>
+              </a:rPr>
+              <a:t>     it != s.upper_bound(R); ++it)</a:t>
+            </a:r>
+          </a:p>
+        </p:txBody>
+      </p:sp>
+      <p:sp>
+        <p:nvSpPr>
+          <p:cNvPr id="12" name="">
+            <a:extLst xmlns:a="http://schemas.openxmlformats.org/drawingml/2006/main">
+              <a:ext uri="{FF2B5EF4-FFF2-40B4-BE49-F238E27FC236}">
+                <a16:creationId xmlns:a16="http://schemas.microsoft.com/office/drawing/2014/main" id="{BF899924-9930-4E5A-859A-73D02348E18A}"/>
+              </a:ext>
+            </a:extLst>
+          </p:cNvPr>
+          <p:cNvSpPr>
+            <a:spLocks xmlns:a="http://schemas.openxmlformats.org/drawingml/2006/main" noGrp="1"/>
+          </p:cNvSpPr>
+          <p:nvPr/>
+        </p:nvSpPr>
+        <p:spPr>
+          <a:xfrm xmlns:a="http://schemas.openxmlformats.org/drawingml/2006/main">
+            <a:off x="914400" y="3524250"/>
+            <a:ext cx="5734050" cy="285750"/>
+          </a:xfrm>
+          <a:prstGeom xmlns:a="http://schemas.openxmlformats.org/drawingml/2006/main" prst="rect">
+            <a:avLst/>
+          </a:prstGeom>
+          <a:noFill xmlns:a="http://schemas.openxmlformats.org/drawingml/2006/main"/>
+          <a:ln xmlns:a="http://schemas.openxmlformats.org/drawingml/2006/main" w="0">
+            <a:noFill/>
+            <a:prstDash val="solid"/>
+          </a:ln>
+        </p:spPr>
+        <p:txBody>
+          <a:bodyPr xmlns:a="http://schemas.openxmlformats.org/drawingml/2006/main" lIns="0" tIns="0" rIns="0" bIns="0" anchor="t">
+            <a:noAutofit/>
+          </a:bodyPr>
+          <a:lstStyle xmlns:a="http://schemas.openxmlformats.org/drawingml/2006/main"/>
+          <a:p xmlns:a="http://schemas.openxmlformats.org/drawingml/2006/main">
+            <a:pPr algn="l">
+              <a:defRPr sz="1350" b="0">
+                <a:solidFill>
+                  <a:srgbClr val="E6EDF7"/>
+                </a:solidFill>
+                <a:latin typeface="Consolas"/>
+                <a:ea typeface="Consolas"/>
+                <a:cs typeface="Consolas"/>
+              </a:defRPr>
+            </a:pPr>
+            <a:r>
+              <a:rPr sz="1350" b="0">
+                <a:solidFill>
+                  <a:srgbClr val="E6EDF7"/>
+                </a:solidFill>
+                <a:latin typeface="Consolas"/>
+                <a:ea typeface="Consolas"/>
+                <a:cs typeface="Consolas"/>
+              </a:rPr>
+              <a:t>  cout &lt;&lt; *it &lt;&lt; ' ';</a:t>
+            </a:r>
+          </a:p>
+        </p:txBody>
+      </p:sp>
+      <p:sp>
+        <p:nvSpPr>
+          <p:cNvPr id="13" name="">
+            <a:extLst xmlns:a="http://schemas.openxmlformats.org/drawingml/2006/main">
+              <a:ext uri="{FF2B5EF4-FFF2-40B4-BE49-F238E27FC236}">
+                <a16:creationId xmlns:a16="http://schemas.microsoft.com/office/drawing/2014/main" id="{9B73535B-28BF-41ED-9EDA-7A9F5203BAC3}"/>
+              </a:ext>
+            </a:extLst>
+          </p:cNvPr>
+          <p:cNvSpPr>
+            <a:spLocks xmlns:a="http://schemas.openxmlformats.org/drawingml/2006/main" noGrp="1"/>
+          </p:cNvSpPr>
+          <p:nvPr/>
+        </p:nvSpPr>
+        <p:spPr>
+          <a:xfrm xmlns:a="http://schemas.openxmlformats.org/drawingml/2006/main">
+            <a:off x="7353300" y="1352550"/>
+            <a:ext cx="3886200" cy="3143250"/>
+          </a:xfrm>
+          <a:prstGeom xmlns:a="http://schemas.openxmlformats.org/drawingml/2006/main" prst="roundRect">
+            <a:avLst>
+              <a:gd name="adj" fmla="val 3636"/>
+            </a:avLst>
+          </a:prstGeom>
+          <a:solidFill xmlns:a="http://schemas.openxmlformats.org/drawingml/2006/main">
+            <a:srgbClr val="FFFFFF"/>
+          </a:solidFill>
+          <a:ln xmlns:a="http://schemas.openxmlformats.org/drawingml/2006/main" w="9525">
+            <a:solidFill>
+              <a:srgbClr val="D8DEE8"/>
+            </a:solidFill>
+            <a:prstDash val="solid"/>
+          </a:ln>
+        </p:spPr>
+      </p:sp>
+      <p:sp>
+        <p:nvSpPr>
+          <p:cNvPr id="14" name="">
+            <a:extLst xmlns:a="http://schemas.openxmlformats.org/drawingml/2006/main">
+              <a:ext uri="{FF2B5EF4-FFF2-40B4-BE49-F238E27FC236}">
+                <a16:creationId xmlns:a16="http://schemas.microsoft.com/office/drawing/2014/main" id="{1CFB5963-F91E-45CD-8370-CAB0E3B425CD}"/>
+              </a:ext>
+            </a:extLst>
+          </p:cNvPr>
+          <p:cNvSpPr>
+            <a:spLocks xmlns:a="http://schemas.openxmlformats.org/drawingml/2006/main" noGrp="1"/>
+          </p:cNvSpPr>
+          <p:nvPr/>
+        </p:nvSpPr>
+        <p:spPr>
+          <a:xfrm xmlns:a="http://schemas.openxmlformats.org/drawingml/2006/main">
+            <a:off x="7639050" y="1657350"/>
+            <a:ext cx="3238500" cy="361950"/>
+          </a:xfrm>
+          <a:prstGeom xmlns:a="http://schemas.openxmlformats.org/drawingml/2006/main" prst="rect">
+            <a:avLst/>
+          </a:prstGeom>
+          <a:noFill xmlns:a="http://schemas.openxmlformats.org/drawingml/2006/main"/>
+          <a:ln xmlns:a="http://schemas.openxmlformats.org/drawingml/2006/main" w="0">
+            <a:noFill/>
+            <a:prstDash val="solid"/>
+          </a:ln>
+        </p:spPr>
+        <p:txBody>
+          <a:bodyPr xmlns:a="http://schemas.openxmlformats.org/drawingml/2006/main" lIns="0" tIns="0" rIns="0" bIns="0" anchor="t">
+            <a:normAutofit fontScale="100000"/>
+          </a:bodyPr>
+          <a:lstStyle xmlns:a="http://schemas.openxmlformats.org/drawingml/2006/main"/>
+          <a:p xmlns:a="http://schemas.openxmlformats.org/drawingml/2006/main">
+            <a:pPr algn="l">
+              <a:defRPr sz="2025" b="1">
+                <a:solidFill>
+                  <a:srgbClr val="2563EB"/>
+                </a:solidFill>
+                <a:latin typeface="Microsoft YaHei"/>
+                <a:ea typeface="Microsoft YaHei"/>
+                <a:cs typeface="Microsoft YaHei"/>
+              </a:defRPr>
+            </a:pPr>
+            <a:r>
+              <a:rPr sz="2025" b="1">
+                <a:solidFill>
+                  <a:srgbClr val="2563EB"/>
+                </a:solidFill>
+                <a:latin typeface="Microsoft YaHei"/>
+                <a:ea typeface="Microsoft YaHei"/>
+                <a:cs typeface="Microsoft YaHei"/>
+              </a:rPr>
+              <a:t>为什么用成员函数？</a:t>
+            </a:r>
+          </a:p>
+        </p:txBody>
+      </p:sp>
+      <p:sp>
+        <p:nvSpPr>
+          <p:cNvPr id="15" name="">
+            <a:extLst xmlns:a="http://schemas.openxmlformats.org/drawingml/2006/main">
+              <a:ext uri="{FF2B5EF4-FFF2-40B4-BE49-F238E27FC236}">
+                <a16:creationId xmlns:a16="http://schemas.microsoft.com/office/drawing/2014/main" id="{DF4E0BBE-4105-4EE9-8F70-830917B47157}"/>
+              </a:ext>
+            </a:extLst>
+          </p:cNvPr>
+          <p:cNvSpPr>
+            <a:spLocks xmlns:a="http://schemas.openxmlformats.org/drawingml/2006/main" noGrp="1"/>
+          </p:cNvSpPr>
+          <p:nvPr/>
+        </p:nvSpPr>
+        <p:spPr>
+          <a:xfrm xmlns:a="http://schemas.openxmlformats.org/drawingml/2006/main">
+            <a:off x="7639050" y="2352675"/>
+            <a:ext cx="95250" cy="95250"/>
+          </a:xfrm>
+          <a:prstGeom xmlns:a="http://schemas.openxmlformats.org/drawingml/2006/main" prst="ellipse">
+            <a:avLst/>
+          </a:prstGeom>
+          <a:solidFill xmlns:a="http://schemas.openxmlformats.org/drawingml/2006/main">
+            <a:srgbClr val="2563EB"/>
+          </a:solidFill>
+          <a:ln xmlns:a="http://schemas.openxmlformats.org/drawingml/2006/main" w="0">
+            <a:solidFill>
+              <a:srgbClr val="2563EB"/>
+            </a:solidFill>
+            <a:prstDash val="solid"/>
+          </a:ln>
+        </p:spPr>
+      </p:sp>
+      <p:sp>
+        <p:nvSpPr>
+          <p:cNvPr id="16" name="">
+            <a:extLst xmlns:a="http://schemas.openxmlformats.org/drawingml/2006/main">
+              <a:ext uri="{FF2B5EF4-FFF2-40B4-BE49-F238E27FC236}">
+                <a16:creationId xmlns:a16="http://schemas.microsoft.com/office/drawing/2014/main" id="{58099E91-7551-40F1-B90D-DEC74F536C23}"/>
+              </a:ext>
+            </a:extLst>
+          </p:cNvPr>
+          <p:cNvSpPr>
+            <a:spLocks xmlns:a="http://schemas.openxmlformats.org/drawingml/2006/main" noGrp="1"/>
+          </p:cNvSpPr>
+          <p:nvPr/>
+        </p:nvSpPr>
+        <p:spPr>
+          <a:xfrm xmlns:a="http://schemas.openxmlformats.org/drawingml/2006/main">
+            <a:off x="7867650" y="2266950"/>
+            <a:ext cx="2914650" cy="552450"/>
+          </a:xfrm>
+          <a:prstGeom xmlns:a="http://schemas.openxmlformats.org/drawingml/2006/main" prst="rect">
+            <a:avLst/>
+          </a:prstGeom>
+          <a:noFill xmlns:a="http://schemas.openxmlformats.org/drawingml/2006/main"/>
+          <a:ln xmlns:a="http://schemas.openxmlformats.org/drawingml/2006/main" w="0">
+            <a:noFill/>
+            <a:prstDash val="solid"/>
+          </a:ln>
+        </p:spPr>
+        <p:txBody>
+          <a:bodyPr xmlns:a="http://schemas.openxmlformats.org/drawingml/2006/main" lIns="0" tIns="0" rIns="0" bIns="0" anchor="t">
+            <a:normAutofit fontScale="100000"/>
+          </a:bodyPr>
+          <a:lstStyle xmlns:a="http://schemas.openxmlformats.org/drawingml/2006/main"/>
+          <a:p xmlns:a="http://schemas.openxmlformats.org/drawingml/2006/main">
+            <a:pPr algn="l">
+              <a:defRPr sz="1650" b="0">
+                <a:solidFill>
+                  <a:srgbClr val="14213D"/>
+                </a:solidFill>
+                <a:latin typeface="Microsoft YaHei"/>
+                <a:ea typeface="Microsoft YaHei"/>
+                <a:cs typeface="Microsoft YaHei"/>
+              </a:defRPr>
+            </a:pPr>
+            <a:r>
+              <a:rPr sz="1650" b="0">
+                <a:solidFill>
+                  <a:srgbClr val="14213D"/>
+                </a:solidFill>
+                <a:latin typeface="Microsoft YaHei"/>
+                <a:ea typeface="Microsoft YaHei"/>
+                <a:cs typeface="Microsoft YaHei"/>
+              </a:rPr>
+              <a:t>自动使用 set 保存的 Compare</a:t>
+            </a:r>
+          </a:p>
+        </p:txBody>
+      </p:sp>
+      <p:sp>
+        <p:nvSpPr>
+          <p:cNvPr id="17" name="">
+            <a:extLst xmlns:a="http://schemas.openxmlformats.org/drawingml/2006/main">
+              <a:ext uri="{FF2B5EF4-FFF2-40B4-BE49-F238E27FC236}">
+                <a16:creationId xmlns:a16="http://schemas.microsoft.com/office/drawing/2014/main" id="{A3873DBD-CD7A-437B-969E-03EE1DFF3145}"/>
+              </a:ext>
+            </a:extLst>
+          </p:cNvPr>
+          <p:cNvSpPr>
+            <a:spLocks xmlns:a="http://schemas.openxmlformats.org/drawingml/2006/main" noGrp="1"/>
+          </p:cNvSpPr>
+          <p:nvPr/>
+        </p:nvSpPr>
+        <p:spPr>
+          <a:xfrm xmlns:a="http://schemas.openxmlformats.org/drawingml/2006/main">
+            <a:off x="7639050" y="3038475"/>
+            <a:ext cx="95250" cy="95250"/>
+          </a:xfrm>
+          <a:prstGeom xmlns:a="http://schemas.openxmlformats.org/drawingml/2006/main" prst="ellipse">
+            <a:avLst/>
+          </a:prstGeom>
+          <a:solidFill xmlns:a="http://schemas.openxmlformats.org/drawingml/2006/main">
+            <a:srgbClr val="2563EB"/>
+          </a:solidFill>
+          <a:ln xmlns:a="http://schemas.openxmlformats.org/drawingml/2006/main" w="0">
+            <a:solidFill>
+              <a:srgbClr val="2563EB"/>
+            </a:solidFill>
+            <a:prstDash val="solid"/>
+          </a:ln>
+        </p:spPr>
+      </p:sp>
+      <p:sp>
+        <p:nvSpPr>
+          <p:cNvPr id="18" name="">
+            <a:extLst xmlns:a="http://schemas.openxmlformats.org/drawingml/2006/main">
+              <a:ext uri="{FF2B5EF4-FFF2-40B4-BE49-F238E27FC236}">
+                <a16:creationId xmlns:a16="http://schemas.microsoft.com/office/drawing/2014/main" id="{25A2EDBA-06A1-4356-9430-4F39F6C8F821}"/>
+              </a:ext>
+            </a:extLst>
+          </p:cNvPr>
+          <p:cNvSpPr>
+            <a:spLocks xmlns:a="http://schemas.openxmlformats.org/drawingml/2006/main" noGrp="1"/>
+          </p:cNvSpPr>
+          <p:nvPr/>
+        </p:nvSpPr>
+        <p:spPr>
+          <a:xfrm xmlns:a="http://schemas.openxmlformats.org/drawingml/2006/main">
+            <a:off x="7867650" y="2952750"/>
+            <a:ext cx="2914650" cy="552450"/>
+          </a:xfrm>
+          <a:prstGeom xmlns:a="http://schemas.openxmlformats.org/drawingml/2006/main" prst="rect">
+            <a:avLst/>
+          </a:prstGeom>
+          <a:noFill xmlns:a="http://schemas.openxmlformats.org/drawingml/2006/main"/>
+          <a:ln xmlns:a="http://schemas.openxmlformats.org/drawingml/2006/main" w="0">
+            <a:noFill/>
+            <a:prstDash val="solid"/>
+          </a:ln>
+        </p:spPr>
+        <p:txBody>
+          <a:bodyPr xmlns:a="http://schemas.openxmlformats.org/drawingml/2006/main" lIns="0" tIns="0" rIns="0" bIns="0" anchor="t">
+            <a:normAutofit fontScale="100000"/>
+          </a:bodyPr>
+          <a:lstStyle xmlns:a="http://schemas.openxmlformats.org/drawingml/2006/main"/>
+          <a:p xmlns:a="http://schemas.openxmlformats.org/drawingml/2006/main">
+            <a:pPr algn="l">
+              <a:defRPr sz="1650" b="0">
+                <a:solidFill>
+                  <a:srgbClr val="14213D"/>
+                </a:solidFill>
+                <a:latin typeface="Microsoft YaHei"/>
+                <a:ea typeface="Microsoft YaHei"/>
+                <a:cs typeface="Microsoft YaHei"/>
+              </a:defRPr>
+            </a:pPr>
+            <a:r>
+              <a:rPr sz="1650" b="0">
+                <a:solidFill>
+                  <a:srgbClr val="14213D"/>
+                </a:solidFill>
+                <a:latin typeface="Microsoft YaHei"/>
+                <a:ea typeface="Microsoft YaHei"/>
+                <a:cs typeface="Microsoft YaHei"/>
+              </a:rPr>
+              <a:t>树上查找，复杂度 O(log n)</a:t>
+            </a:r>
+          </a:p>
+        </p:txBody>
+      </p:sp>
+      <p:sp>
+        <p:nvSpPr>
+          <p:cNvPr id="19" name="">
+            <a:extLst xmlns:a="http://schemas.openxmlformats.org/drawingml/2006/main">
+              <a:ext uri="{FF2B5EF4-FFF2-40B4-BE49-F238E27FC236}">
+                <a16:creationId xmlns:a16="http://schemas.microsoft.com/office/drawing/2014/main" id="{69A3BC5E-4E2A-4FA4-B1E4-80775AC0240F}"/>
+              </a:ext>
+            </a:extLst>
+          </p:cNvPr>
+          <p:cNvSpPr>
+            <a:spLocks xmlns:a="http://schemas.openxmlformats.org/drawingml/2006/main" noGrp="1"/>
+          </p:cNvSpPr>
+          <p:nvPr/>
+        </p:nvSpPr>
+        <p:spPr>
+          <a:xfrm xmlns:a="http://schemas.openxmlformats.org/drawingml/2006/main">
+            <a:off x="7639050" y="3724275"/>
+            <a:ext cx="95250" cy="95250"/>
+          </a:xfrm>
+          <a:prstGeom xmlns:a="http://schemas.openxmlformats.org/drawingml/2006/main" prst="ellipse">
+            <a:avLst/>
+          </a:prstGeom>
+          <a:solidFill xmlns:a="http://schemas.openxmlformats.org/drawingml/2006/main">
+            <a:srgbClr val="2563EB"/>
+          </a:solidFill>
+          <a:ln xmlns:a="http://schemas.openxmlformats.org/drawingml/2006/main" w="0">
+            <a:solidFill>
+              <a:srgbClr val="2563EB"/>
+            </a:solidFill>
+            <a:prstDash val="solid"/>
+          </a:ln>
+        </p:spPr>
+      </p:sp>
+      <p:sp>
+        <p:nvSpPr>
+          <p:cNvPr id="20" name="">
+            <a:extLst xmlns:a="http://schemas.openxmlformats.org/drawingml/2006/main">
+              <a:ext uri="{FF2B5EF4-FFF2-40B4-BE49-F238E27FC236}">
+                <a16:creationId xmlns:a16="http://schemas.microsoft.com/office/drawing/2014/main" id="{64EDDEEB-3C48-4106-9373-CA97CC9638CD}"/>
+              </a:ext>
+            </a:extLst>
+          </p:cNvPr>
+          <p:cNvSpPr>
+            <a:spLocks xmlns:a="http://schemas.openxmlformats.org/drawingml/2006/main" noGrp="1"/>
+          </p:cNvSpPr>
+          <p:nvPr/>
+        </p:nvSpPr>
+        <p:spPr>
+          <a:xfrm xmlns:a="http://schemas.openxmlformats.org/drawingml/2006/main">
+            <a:off x="7867650" y="3638550"/>
+            <a:ext cx="2914650" cy="552450"/>
+          </a:xfrm>
+          <a:prstGeom xmlns:a="http://schemas.openxmlformats.org/drawingml/2006/main" prst="rect">
+            <a:avLst/>
+          </a:prstGeom>
+          <a:noFill xmlns:a="http://schemas.openxmlformats.org/drawingml/2006/main"/>
+          <a:ln xmlns:a="http://schemas.openxmlformats.org/drawingml/2006/main" w="0">
+            <a:noFill/>
+            <a:prstDash val="solid"/>
+          </a:ln>
+        </p:spPr>
+        <p:txBody>
+          <a:bodyPr xmlns:a="http://schemas.openxmlformats.org/drawingml/2006/main" lIns="0" tIns="0" rIns="0" bIns="0" anchor="t">
+            <a:normAutofit fontScale="100000"/>
+          </a:bodyPr>
+          <a:lstStyle xmlns:a="http://schemas.openxmlformats.org/drawingml/2006/main"/>
+          <a:p xmlns:a="http://schemas.openxmlformats.org/drawingml/2006/main">
+            <a:pPr algn="l">
+              <a:defRPr sz="1650" b="0">
+                <a:solidFill>
+                  <a:srgbClr val="14213D"/>
+                </a:solidFill>
+                <a:latin typeface="Microsoft YaHei"/>
+                <a:ea typeface="Microsoft YaHei"/>
+                <a:cs typeface="Microsoft YaHei"/>
+              </a:defRPr>
+            </a:pPr>
+            <a:r>
+              <a:rPr sz="1650" b="0">
+                <a:solidFill>
+                  <a:srgbClr val="14213D"/>
+                </a:solidFill>
+                <a:latin typeface="Microsoft YaHei"/>
+                <a:ea typeface="Microsoft YaHei"/>
+                <a:cs typeface="Microsoft YaHei"/>
+              </a:rPr>
+              <a:t>找不到时返回 end()</a:t>
+            </a:r>
+          </a:p>
+        </p:txBody>
+      </p:sp>
+      <p:sp>
+        <p:nvSpPr>
+          <p:cNvPr id="21" name="">
+            <a:extLst xmlns:a="http://schemas.openxmlformats.org/drawingml/2006/main">
+              <a:ext uri="{FF2B5EF4-FFF2-40B4-BE49-F238E27FC236}">
+                <a16:creationId xmlns:a16="http://schemas.microsoft.com/office/drawing/2014/main" id="{F39290BA-1900-4FC3-AAE9-04922CCE1FAC}"/>
+              </a:ext>
+            </a:extLst>
+          </p:cNvPr>
+          <p:cNvSpPr>
+            <a:spLocks xmlns:a="http://schemas.openxmlformats.org/drawingml/2006/main" noGrp="1"/>
+          </p:cNvSpPr>
+          <p:nvPr/>
+        </p:nvSpPr>
+        <p:spPr>
+          <a:xfrm xmlns:a="http://schemas.openxmlformats.org/drawingml/2006/main">
+            <a:off x="685800" y="5010150"/>
+            <a:ext cx="10477500" cy="704850"/>
+          </a:xfrm>
+          <a:prstGeom xmlns:a="http://schemas.openxmlformats.org/drawingml/2006/main" prst="rect">
+            <a:avLst/>
+          </a:prstGeom>
+          <a:noFill xmlns:a="http://schemas.openxmlformats.org/drawingml/2006/main"/>
+          <a:ln xmlns:a="http://schemas.openxmlformats.org/drawingml/2006/main" w="0">
+            <a:noFill/>
+            <a:prstDash val="solid"/>
+          </a:ln>
+        </p:spPr>
+        <p:txBody>
+          <a:bodyPr xmlns:a="http://schemas.openxmlformats.org/drawingml/2006/main" lIns="0" tIns="0" rIns="0" bIns="0" anchor="t">
+            <a:normAutofit fontScale="100000"/>
+          </a:bodyPr>
+          <a:lstStyle xmlns:a="http://schemas.openxmlformats.org/drawingml/2006/main"/>
+          <a:p xmlns:a="http://schemas.openxmlformats.org/drawingml/2006/main">
+            <a:pPr algn="l">
+              <a:defRPr sz="1725" b="0">
+                <a:solidFill>
+                  <a:srgbClr val="5F6B7A"/>
+                </a:solidFill>
+                <a:latin typeface="Microsoft YaHei"/>
+                <a:ea typeface="Microsoft YaHei"/>
+                <a:cs typeface="Microsoft YaHei"/>
+              </a:defRPr>
+            </a:pPr>
+            <a:r>
+              <a:rPr sz="1725" b="0">
+                <a:solidFill>
+                  <a:srgbClr val="5F6B7A"/>
+                </a:solidFill>
+                <a:latin typeface="Microsoft YaHei"/>
+                <a:ea typeface="Microsoft YaHei"/>
+                <a:cs typeface="Microsoft YaHei"/>
+              </a:rPr>
+              <a:t>算法版 std::lower_bound(first, last, key, comp) 虽只做 O(log n) 次比较，但对 set 迭代器可能产生 O(n) 次移动。</a:t>
+            </a:r>
+          </a:p>
+        </p:txBody>
+      </p:sp>
+      <p:sp>
+        <p:nvSpPr>
+          <p:cNvPr id="22" name="">
+            <a:extLst xmlns:a="http://schemas.openxmlformats.org/drawingml/2006/main">
+              <a:ext uri="{FF2B5EF4-FFF2-40B4-BE49-F238E27FC236}">
+                <a16:creationId xmlns:a16="http://schemas.microsoft.com/office/drawing/2014/main" id="{E64C5792-CEB5-4BFA-8AA6-454ACA069CA0}"/>
+              </a:ext>
+            </a:extLst>
+          </p:cNvPr>
+          <p:cNvSpPr>
+            <a:spLocks xmlns:a="http://schemas.openxmlformats.org/drawingml/2006/main" noGrp="1"/>
+          </p:cNvSpPr>
+          <p:nvPr/>
+        </p:nvSpPr>
+        <p:spPr>
+          <a:xfrm xmlns:a="http://schemas.openxmlformats.org/drawingml/2006/main">
+            <a:off x="685800" y="5905500"/>
+            <a:ext cx="8572500" cy="323850"/>
+          </a:xfrm>
+          <a:prstGeom xmlns:a="http://schemas.openxmlformats.org/drawingml/2006/main" prst="rect">
+            <a:avLst/>
+          </a:prstGeom>
+          <a:noFill xmlns:a="http://schemas.openxmlformats.org/drawingml/2006/main"/>
+          <a:ln xmlns:a="http://schemas.openxmlformats.org/drawingml/2006/main" w="0">
+            <a:noFill/>
+            <a:prstDash val="solid"/>
+          </a:ln>
+        </p:spPr>
+        <p:txBody>
+          <a:bodyPr xmlns:a="http://schemas.openxmlformats.org/drawingml/2006/main" lIns="0" tIns="0" rIns="0" bIns="0" anchor="t">
+            <a:normAutofit fontScale="100000"/>
+          </a:bodyPr>
+          <a:lstStyle xmlns:a="http://schemas.openxmlformats.org/drawingml/2006/main"/>
+          <a:p xmlns:a="http://schemas.openxmlformats.org/drawingml/2006/main">
+            <a:pPr algn="l">
+              <a:defRPr sz="1875" b="1">
+                <a:solidFill>
+                  <a:srgbClr val="2563EB"/>
+                </a:solidFill>
+                <a:latin typeface="Microsoft YaHei"/>
+                <a:ea typeface="Microsoft YaHei"/>
+                <a:cs typeface="Microsoft YaHei"/>
+              </a:defRPr>
+            </a:pPr>
+            <a:r>
+              <a:rPr sz="1875" b="1">
+                <a:solidFill>
+                  <a:srgbClr val="2563EB"/>
+                </a:solidFill>
+                <a:latin typeface="Microsoft YaHei"/>
+                <a:ea typeface="Microsoft YaHei"/>
+                <a:cs typeface="Microsoft YaHei"/>
+              </a:rPr>
+              <a:t>结论：关联容器有成员版，就优先用成员版。</a:t>
+            </a:r>
+          </a:p>
+        </p:txBody>
+      </p:sp>
+    </p:spTree>
+    <p:extLst>
+      <p:ext uri="{BB962C8B-B14F-4D97-AF65-F5344CB8AC3E}">
+        <p14:creationId xmlns:p14="http://schemas.microsoft.com/office/powerpoint/2010/main" val="616725422"/>
       </p:ext>
     </p:extLst>
   </p:cSld>
